--- a/decks/win-win/win-win.pptx
+++ b/decks/win-win/win-win.pptx
@@ -603,8 +603,8 @@
             <a:r>
               <a:rPr lang="en-US" dirty="0"/>
               <a:t>There is a two second pause that costs business owners more money than any competitor.
-Click 1: They go quiet.  Click 2: And you fill the silence with a discount.
-Click 3: Fill the pause with the transformation and the discount never comes up.</a:t>
+Click 1: They go quiet.  Click 2: And you fill the silence with a discount.  Click 3: not that.
+Click 4: Fill the pause with the transformation and the discount never comes up.</a:t>
             </a:r>
             <a:endParaRPr lang="en-US" dirty="0"/>
           </a:p>
@@ -693,8 +693,8 @@
             <a:r>
               <a:rPr lang="en-US" dirty="0"/>
               <a:t>People buy the transformation your product really gives them.
-Clicks 1–3: Name the transformation they are buying, then make every page, every price and every word show it.
-Click 4: WIN-WIN.</a:t>
+Click 1: then make it show.  Clicks 2–4: every page, every price and every word.
+Click 5: WIN-WIN.</a:t>
             </a:r>
             <a:endParaRPr lang="en-US" dirty="0"/>
           </a:p>
@@ -783,7 +783,7 @@
             <a:r>
               <a:rPr lang="en-US" dirty="0"/>
               <a:t>157 dollars to get one customer.
-The number builds in by itself; no clicks on this slide.</a:t>
+Click 1: $157.  Click 2: to get one customer.</a:t>
             </a:r>
             <a:endParaRPr lang="en-US" dirty="0"/>
           </a:p>
@@ -962,7 +962,7 @@
             <a:r>
               <a:rPr lang="en-US" dirty="0"/>
               <a:t>Three fixes, three worse numbers, because the ads were never the problem.
-Click 1: Nobody asked the only question that matters: what does the customer actually get.</a:t>
+Click 1: never.  Click 2: Nobody asked the only question that matters.  Click 3: what does the customer actually get.</a:t>
             </a:r>
             <a:endParaRPr lang="en-US" dirty="0"/>
           </a:p>
@@ -1141,7 +1141,7 @@
             <a:r>
               <a:rPr lang="en-US" dirty="0"/>
               <a:t>Same product. Same audience. Same budget.
-Click 1: 42.  Click 2: 18.  Click 3: 3.58.  Click 4: from one sentence.
+Click 1: 157.  Click 2: 42.  Click 3: 18.  Click 4: 3.58.  Click 5: from one sentence.
 Note: the Short gives these numbers without a label; 'cost per customer' is inferred from the title (157 dollars to 3.58).</a:t>
             </a:r>
             <a:endParaRPr lang="en-US" dirty="0"/>
@@ -1320,8 +1320,8 @@
             <a:r>
               <a:rPr lang="en-US" dirty="0"/>
               <a:t>He is not buying the drill.
-Clicks 1–3: He is buying his garage, the shelf finally level, and the job done.
-Click 4: The drill is just the tool.</a:t>
+Click 1: He is buying:  Clicks 2–4: his garage, the shelf finally level, and the job done.
+Click 5: The drill is just the tool.</a:t>
             </a:r>
             <a:endParaRPr lang="en-US" dirty="0"/>
           </a:p>
@@ -1411,7 +1411,7 @@
               <a:rPr lang="en-US" dirty="0"/>
               <a:t>Nobody buys a ride in the taxi.
 Click 1: They are buying a ride home.
-Click 2: Nobody buys your service for the service. They are buying the identity you hand them.</a:t>
+Click 2: Nobody buys your service for the service.  Click 3: They are buying the identity you hand them.</a:t>
             </a:r>
             <a:endParaRPr lang="en-US" dirty="0"/>
           </a:p>
@@ -2992,7 +2992,7 @@
                                     </p:set>
                                     <p:anim calcmode="lin" valueType="num">
                                       <p:cBhvr>
-                                        <p:cTn id="5" dur="450" fill="hold"/>
+                                        <p:cTn id="5" dur="550" fill="hold"/>
                                         <p:tgtEl>
                                           <p:spTgt spid="3"/>
                                         </p:tgtEl>
@@ -3006,9 +3006,14 @@
                                             <p:strVal val="0"/>
                                           </p:val>
                                         </p:tav>
-                                        <p:tav tm="70000">
-                                          <p:val>
-                                            <p:strVal val="#ppt_w*1.07"/>
+                                        <p:tav tm="60000">
+                                          <p:val>
+                                            <p:strVal val="#ppt_w*1.14"/>
+                                          </p:val>
+                                        </p:tav>
+                                        <p:tav tm="82000">
+                                          <p:val>
+                                            <p:strVal val="#ppt_w*0.97"/>
                                           </p:val>
                                         </p:tav>
                                         <p:tav tm="100000">
@@ -3020,7 +3025,7 @@
                                     </p:anim>
                                     <p:anim calcmode="lin" valueType="num">
                                       <p:cBhvr>
-                                        <p:cTn id="6" dur="450" fill="hold"/>
+                                        <p:cTn id="6" dur="550" fill="hold"/>
                                         <p:tgtEl>
                                           <p:spTgt spid="3"/>
                                         </p:tgtEl>
@@ -3034,9 +3039,14 @@
                                             <p:strVal val="0"/>
                                           </p:val>
                                         </p:tav>
-                                        <p:tav tm="70000">
-                                          <p:val>
-                                            <p:strVal val="#ppt_h*1.07"/>
+                                        <p:tav tm="60000">
+                                          <p:val>
+                                            <p:strVal val="#ppt_h*1.14"/>
+                                          </p:val>
+                                        </p:tav>
+                                        <p:tav tm="82000">
+                                          <p:val>
+                                            <p:strVal val="#ppt_h*0.97"/>
                                           </p:val>
                                         </p:tav>
                                         <p:tav tm="100000">
@@ -3048,7 +3058,7 @@
                                     </p:anim>
                                     <p:animEffect transition="in" filter="fade">
                                       <p:cBhvr>
-                                        <p:cTn id="7" dur="225"/>
+                                        <p:cTn id="7" dur="220"/>
                                         <p:tgtEl>
                                           <p:spTgt spid="3"/>
                                         </p:tgtEl>
@@ -3058,7 +3068,7 @@
                                 </p:cTn>
                               </p:par>
                               <p:par>
-                                <p:cTn id="8" presetID="42" presetClass="entr" presetSubtype="0" fill="hold" grpId="0" nodeType="withEffect">
+                                <p:cTn id="8" presetID="53" presetClass="entr" presetSubtype="16" fill="hold" grpId="0" nodeType="withEffect">
                                   <p:stCondLst>
                                     <p:cond delay="150"/>
                                   </p:stCondLst>
@@ -3083,58 +3093,73 @@
                                     </p:set>
                                     <p:anim calcmode="lin" valueType="num">
                                       <p:cBhvr>
-                                        <p:cTn id="10" dur="500" fill="hold"/>
+                                        <p:cTn id="10" dur="550" fill="hold"/>
                                         <p:tgtEl>
                                           <p:spTgt spid="4"/>
                                         </p:tgtEl>
                                         <p:attrNameLst>
-                                          <p:attrName>ppt_x</p:attrName>
+                                          <p:attrName>ppt_w</p:attrName>
                                         </p:attrNameLst>
                                       </p:cBhvr>
                                       <p:tavLst>
                                         <p:tav tm="0">
                                           <p:val>
-                                            <p:strVal val="#ppt_x"/>
+                                            <p:strVal val="0"/>
+                                          </p:val>
+                                        </p:tav>
+                                        <p:tav tm="60000">
+                                          <p:val>
+                                            <p:strVal val="#ppt_w*1.14"/>
+                                          </p:val>
+                                        </p:tav>
+                                        <p:tav tm="82000">
+                                          <p:val>
+                                            <p:strVal val="#ppt_w*0.97"/>
                                           </p:val>
                                         </p:tav>
                                         <p:tav tm="100000">
                                           <p:val>
-                                            <p:strVal val="#ppt_x"/>
+                                            <p:strVal val="#ppt_w"/>
                                           </p:val>
                                         </p:tav>
                                       </p:tavLst>
                                     </p:anim>
                                     <p:anim calcmode="lin" valueType="num">
                                       <p:cBhvr>
-                                        <p:cTn id="11" dur="500" fill="hold"/>
+                                        <p:cTn id="11" dur="550" fill="hold"/>
                                         <p:tgtEl>
                                           <p:spTgt spid="4"/>
                                         </p:tgtEl>
                                         <p:attrNameLst>
-                                          <p:attrName>ppt_y</p:attrName>
+                                          <p:attrName>ppt_h</p:attrName>
                                         </p:attrNameLst>
                                       </p:cBhvr>
                                       <p:tavLst>
                                         <p:tav tm="0">
                                           <p:val>
-                                            <p:strVal val="#ppt_y+0.08"/>
-                                          </p:val>
-                                        </p:tav>
-                                        <p:tav tm="80000">
-                                          <p:val>
-                                            <p:strVal val="#ppt_y-0.006"/>
+                                            <p:strVal val="0"/>
+                                          </p:val>
+                                        </p:tav>
+                                        <p:tav tm="60000">
+                                          <p:val>
+                                            <p:strVal val="#ppt_h*1.14"/>
+                                          </p:val>
+                                        </p:tav>
+                                        <p:tav tm="82000">
+                                          <p:val>
+                                            <p:strVal val="#ppt_h*0.97"/>
                                           </p:val>
                                         </p:tav>
                                         <p:tav tm="100000">
                                           <p:val>
-                                            <p:strVal val="#ppt_y"/>
+                                            <p:strVal val="#ppt_h"/>
                                           </p:val>
                                         </p:tav>
                                       </p:tavLst>
                                     </p:anim>
                                     <p:animEffect transition="in" filter="fade">
                                       <p:cBhvr>
-                                        <p:cTn id="12" dur="500"/>
+                                        <p:cTn id="12" dur="220"/>
                                         <p:tgtEl>
                                           <p:spTgt spid="4"/>
                                         </p:tgtEl>
@@ -3187,7 +3212,7 @@
                                     </p:set>
                                     <p:anim calcmode="lin" valueType="num">
                                       <p:cBhvr>
-                                        <p:cTn id="17" dur="450" fill="hold"/>
+                                        <p:cTn id="17" dur="550" fill="hold"/>
                                         <p:tgtEl>
                                           <p:spTgt spid="5"/>
                                         </p:tgtEl>
@@ -3201,9 +3226,14 @@
                                             <p:strVal val="0"/>
                                           </p:val>
                                         </p:tav>
-                                        <p:tav tm="70000">
-                                          <p:val>
-                                            <p:strVal val="#ppt_w*1.07"/>
+                                        <p:tav tm="60000">
+                                          <p:val>
+                                            <p:strVal val="#ppt_w*1.14"/>
+                                          </p:val>
+                                        </p:tav>
+                                        <p:tav tm="82000">
+                                          <p:val>
+                                            <p:strVal val="#ppt_w*0.97"/>
                                           </p:val>
                                         </p:tav>
                                         <p:tav tm="100000">
@@ -3215,7 +3245,7 @@
                                     </p:anim>
                                     <p:anim calcmode="lin" valueType="num">
                                       <p:cBhvr>
-                                        <p:cTn id="18" dur="450" fill="hold"/>
+                                        <p:cTn id="18" dur="550" fill="hold"/>
                                         <p:tgtEl>
                                           <p:spTgt spid="5"/>
                                         </p:tgtEl>
@@ -3229,9 +3259,14 @@
                                             <p:strVal val="0"/>
                                           </p:val>
                                         </p:tav>
-                                        <p:tav tm="70000">
-                                          <p:val>
-                                            <p:strVal val="#ppt_h*1.07"/>
+                                        <p:tav tm="60000">
+                                          <p:val>
+                                            <p:strVal val="#ppt_h*1.14"/>
+                                          </p:val>
+                                        </p:tav>
+                                        <p:tav tm="82000">
+                                          <p:val>
+                                            <p:strVal val="#ppt_h*0.97"/>
                                           </p:val>
                                         </p:tav>
                                         <p:tav tm="100000">
@@ -3243,7 +3278,7 @@
                                     </p:anim>
                                     <p:animEffect transition="in" filter="fade">
                                       <p:cBhvr>
-                                        <p:cTn id="19" dur="225"/>
+                                        <p:cTn id="19" dur="220"/>
                                         <p:tgtEl>
                                           <p:spTgt spid="5"/>
                                         </p:tgtEl>
@@ -3278,7 +3313,7 @@
                                     </p:set>
                                     <p:anim calcmode="lin" valueType="num">
                                       <p:cBhvr>
-                                        <p:cTn id="22" dur="450" fill="hold"/>
+                                        <p:cTn id="22" dur="550" fill="hold"/>
                                         <p:tgtEl>
                                           <p:spTgt spid="6"/>
                                         </p:tgtEl>
@@ -3292,9 +3327,14 @@
                                             <p:strVal val="0"/>
                                           </p:val>
                                         </p:tav>
-                                        <p:tav tm="70000">
-                                          <p:val>
-                                            <p:strVal val="#ppt_w*1.07"/>
+                                        <p:tav tm="60000">
+                                          <p:val>
+                                            <p:strVal val="#ppt_w*1.14"/>
+                                          </p:val>
+                                        </p:tav>
+                                        <p:tav tm="82000">
+                                          <p:val>
+                                            <p:strVal val="#ppt_w*0.97"/>
                                           </p:val>
                                         </p:tav>
                                         <p:tav tm="100000">
@@ -3306,7 +3346,7 @@
                                     </p:anim>
                                     <p:anim calcmode="lin" valueType="num">
                                       <p:cBhvr>
-                                        <p:cTn id="23" dur="450" fill="hold"/>
+                                        <p:cTn id="23" dur="550" fill="hold"/>
                                         <p:tgtEl>
                                           <p:spTgt spid="6"/>
                                         </p:tgtEl>
@@ -3320,9 +3360,14 @@
                                             <p:strVal val="0"/>
                                           </p:val>
                                         </p:tav>
-                                        <p:tav tm="70000">
-                                          <p:val>
-                                            <p:strVal val="#ppt_h*1.07"/>
+                                        <p:tav tm="60000">
+                                          <p:val>
+                                            <p:strVal val="#ppt_h*1.14"/>
+                                          </p:val>
+                                        </p:tav>
+                                        <p:tav tm="82000">
+                                          <p:val>
+                                            <p:strVal val="#ppt_h*0.97"/>
                                           </p:val>
                                         </p:tav>
                                         <p:tav tm="100000">
@@ -3334,7 +3379,7 @@
                                     </p:anim>
                                     <p:animEffect transition="in" filter="fade">
                                       <p:cBhvr>
-                                        <p:cTn id="24" dur="225"/>
+                                        <p:cTn id="24" dur="220"/>
                                         <p:tgtEl>
                                           <p:spTgt spid="6"/>
                                         </p:tgtEl>
@@ -3387,7 +3432,7 @@
                                     </p:set>
                                     <p:anim calcmode="lin" valueType="num">
                                       <p:cBhvr>
-                                        <p:cTn id="29" dur="450" fill="hold"/>
+                                        <p:cTn id="29" dur="550" fill="hold"/>
                                         <p:tgtEl>
                                           <p:spTgt spid="7"/>
                                         </p:tgtEl>
@@ -3401,9 +3446,14 @@
                                             <p:strVal val="0"/>
                                           </p:val>
                                         </p:tav>
-                                        <p:tav tm="70000">
-                                          <p:val>
-                                            <p:strVal val="#ppt_w*1.07"/>
+                                        <p:tav tm="60000">
+                                          <p:val>
+                                            <p:strVal val="#ppt_w*1.14"/>
+                                          </p:val>
+                                        </p:tav>
+                                        <p:tav tm="82000">
+                                          <p:val>
+                                            <p:strVal val="#ppt_w*0.97"/>
                                           </p:val>
                                         </p:tav>
                                         <p:tav tm="100000">
@@ -3415,7 +3465,7 @@
                                     </p:anim>
                                     <p:anim calcmode="lin" valueType="num">
                                       <p:cBhvr>
-                                        <p:cTn id="30" dur="450" fill="hold"/>
+                                        <p:cTn id="30" dur="550" fill="hold"/>
                                         <p:tgtEl>
                                           <p:spTgt spid="7"/>
                                         </p:tgtEl>
@@ -3429,9 +3479,14 @@
                                             <p:strVal val="0"/>
                                           </p:val>
                                         </p:tav>
-                                        <p:tav tm="70000">
-                                          <p:val>
-                                            <p:strVal val="#ppt_h*1.07"/>
+                                        <p:tav tm="60000">
+                                          <p:val>
+                                            <p:strVal val="#ppt_h*1.14"/>
+                                          </p:val>
+                                        </p:tav>
+                                        <p:tav tm="82000">
+                                          <p:val>
+                                            <p:strVal val="#ppt_h*0.97"/>
                                           </p:val>
                                         </p:tav>
                                         <p:tav tm="100000">
@@ -3443,7 +3498,7 @@
                                     </p:anim>
                                     <p:animEffect transition="in" filter="fade">
                                       <p:cBhvr>
-                                        <p:cTn id="31" dur="225"/>
+                                        <p:cTn id="31" dur="220"/>
                                         <p:tgtEl>
                                           <p:spTgt spid="7"/>
                                         </p:tgtEl>
@@ -3478,7 +3533,7 @@
                                     </p:set>
                                     <p:anim calcmode="lin" valueType="num">
                                       <p:cBhvr>
-                                        <p:cTn id="34" dur="450" fill="hold"/>
+                                        <p:cTn id="34" dur="550" fill="hold"/>
                                         <p:tgtEl>
                                           <p:spTgt spid="8"/>
                                         </p:tgtEl>
@@ -3492,9 +3547,14 @@
                                             <p:strVal val="0"/>
                                           </p:val>
                                         </p:tav>
-                                        <p:tav tm="70000">
-                                          <p:val>
-                                            <p:strVal val="#ppt_w*1.07"/>
+                                        <p:tav tm="60000">
+                                          <p:val>
+                                            <p:strVal val="#ppt_w*1.14"/>
+                                          </p:val>
+                                        </p:tav>
+                                        <p:tav tm="82000">
+                                          <p:val>
+                                            <p:strVal val="#ppt_w*0.97"/>
                                           </p:val>
                                         </p:tav>
                                         <p:tav tm="100000">
@@ -3506,7 +3566,7 @@
                                     </p:anim>
                                     <p:anim calcmode="lin" valueType="num">
                                       <p:cBhvr>
-                                        <p:cTn id="35" dur="450" fill="hold"/>
+                                        <p:cTn id="35" dur="550" fill="hold"/>
                                         <p:tgtEl>
                                           <p:spTgt spid="8"/>
                                         </p:tgtEl>
@@ -3520,9 +3580,14 @@
                                             <p:strVal val="0"/>
                                           </p:val>
                                         </p:tav>
-                                        <p:tav tm="70000">
-                                          <p:val>
-                                            <p:strVal val="#ppt_h*1.07"/>
+                                        <p:tav tm="60000">
+                                          <p:val>
+                                            <p:strVal val="#ppt_h*1.14"/>
+                                          </p:val>
+                                        </p:tav>
+                                        <p:tav tm="82000">
+                                          <p:val>
+                                            <p:strVal val="#ppt_h*0.97"/>
                                           </p:val>
                                         </p:tav>
                                         <p:tav tm="100000">
@@ -3534,7 +3599,7 @@
                                     </p:anim>
                                     <p:animEffect transition="in" filter="fade">
                                       <p:cBhvr>
-                                        <p:cTn id="36" dur="225"/>
+                                        <p:cTn id="36" dur="220"/>
                                         <p:tgtEl>
                                           <p:spTgt spid="8"/>
                                         </p:tgtEl>
@@ -3550,13 +3615,13 @@
                     </p:cTn>
                   </p:par>
                   <p:par>
-                    <p:cTn id="44" fill="hold">
+                    <p:cTn id="47" fill="hold">
                       <p:stCondLst>
                         <p:cond delay="indefinite"/>
                       </p:stCondLst>
                       <p:childTnLst>
                         <p:par>
-                          <p:cTn id="45" fill="hold">
+                          <p:cTn id="48" fill="hold">
                             <p:stCondLst>
                               <p:cond delay="0"/>
                             </p:stCondLst>
@@ -3587,7 +3652,7 @@
                                     </p:set>
                                     <p:anim calcmode="lin" valueType="num">
                                       <p:cBhvr>
-                                        <p:cTn id="41" dur="450" fill="hold"/>
+                                        <p:cTn id="41" dur="550" fill="hold"/>
                                         <p:tgtEl>
                                           <p:spTgt spid="9"/>
                                         </p:tgtEl>
@@ -3601,9 +3666,14 @@
                                             <p:strVal val="0"/>
                                           </p:val>
                                         </p:tav>
-                                        <p:tav tm="70000">
-                                          <p:val>
-                                            <p:strVal val="#ppt_w*1.07"/>
+                                        <p:tav tm="60000">
+                                          <p:val>
+                                            <p:strVal val="#ppt_w*1.14"/>
+                                          </p:val>
+                                        </p:tav>
+                                        <p:tav tm="82000">
+                                          <p:val>
+                                            <p:strVal val="#ppt_w*0.97"/>
                                           </p:val>
                                         </p:tav>
                                         <p:tav tm="100000">
@@ -3615,7 +3685,7 @@
                                     </p:anim>
                                     <p:anim calcmode="lin" valueType="num">
                                       <p:cBhvr>
-                                        <p:cTn id="42" dur="450" fill="hold"/>
+                                        <p:cTn id="42" dur="550" fill="hold"/>
                                         <p:tgtEl>
                                           <p:spTgt spid="9"/>
                                         </p:tgtEl>
@@ -3629,9 +3699,14 @@
                                             <p:strVal val="0"/>
                                           </p:val>
                                         </p:tav>
-                                        <p:tav tm="70000">
-                                          <p:val>
-                                            <p:strVal val="#ppt_h*1.07"/>
+                                        <p:tav tm="60000">
+                                          <p:val>
+                                            <p:strVal val="#ppt_h*1.14"/>
+                                          </p:val>
+                                        </p:tav>
+                                        <p:tav tm="82000">
+                                          <p:val>
+                                            <p:strVal val="#ppt_h*0.97"/>
                                           </p:val>
                                         </p:tav>
                                         <p:tav tm="100000">
@@ -3643,12 +3718,30 @@
                                     </p:anim>
                                     <p:animEffect transition="in" filter="fade">
                                       <p:cBhvr>
-                                        <p:cTn id="43" dur="225"/>
+                                        <p:cTn id="43" dur="220"/>
                                         <p:tgtEl>
                                           <p:spTgt spid="9"/>
                                         </p:tgtEl>
                                       </p:cBhvr>
                                     </p:animEffect>
+                                  </p:childTnLst>
+                                </p:cTn>
+                              </p:par>
+                              <p:par>
+                                <p:cTn id="44" presetID="6" presetClass="emph" presetSubtype="0" fill="hold" grpId="0" nodeType="withEffect">
+                                  <p:stCondLst>
+                                    <p:cond delay="650"/>
+                                  </p:stCondLst>
+                                  <p:childTnLst>
+                                    <p:animScale>
+                                      <p:cBhvr>
+                                        <p:cTn id="46" dur="180" autoRev="1" fill="hold"/>
+                                        <p:tgtEl>
+                                          <p:spTgt spid="9"/>
+                                        </p:tgtEl>
+                                      </p:cBhvr>
+                                      <p:by x="112000" y="112000"/>
+                                    </p:animScale>
                                   </p:childTnLst>
                                 </p:cTn>
                               </p:par>
@@ -3659,26 +3752,26 @@
                     </p:cTn>
                   </p:par>
                   <p:par>
-                    <p:cTn id="51" fill="hold">
+                    <p:cTn id="54" fill="hold">
                       <p:stCondLst>
                         <p:cond delay="indefinite"/>
                       </p:stCondLst>
                       <p:childTnLst>
                         <p:par>
-                          <p:cTn id="52" fill="hold">
+                          <p:cTn id="55" fill="hold">
                             <p:stCondLst>
                               <p:cond delay="0"/>
                             </p:stCondLst>
                             <p:childTnLst>
                               <p:par>
-                                <p:cTn id="46" presetID="42" presetClass="entr" presetSubtype="0" fill="hold" grpId="0" nodeType="clickEffect">
+                                <p:cTn id="49" presetID="53" presetClass="entr" presetSubtype="16" fill="hold" grpId="0" nodeType="clickEffect">
                                   <p:stCondLst>
                                     <p:cond delay="0"/>
                                   </p:stCondLst>
                                   <p:childTnLst>
                                     <p:set>
                                       <p:cBhvr>
-                                        <p:cTn id="47" dur="1" fill="hold">
+                                        <p:cTn id="50" dur="1" fill="hold">
                                           <p:stCondLst>
                                             <p:cond delay="0"/>
                                           </p:stCondLst>
@@ -3696,58 +3789,73 @@
                                     </p:set>
                                     <p:anim calcmode="lin" valueType="num">
                                       <p:cBhvr>
-                                        <p:cTn id="48" dur="500" fill="hold"/>
+                                        <p:cTn id="51" dur="550" fill="hold"/>
                                         <p:tgtEl>
                                           <p:spTgt spid="10"/>
                                         </p:tgtEl>
                                         <p:attrNameLst>
-                                          <p:attrName>ppt_x</p:attrName>
+                                          <p:attrName>ppt_w</p:attrName>
                                         </p:attrNameLst>
                                       </p:cBhvr>
                                       <p:tavLst>
                                         <p:tav tm="0">
                                           <p:val>
-                                            <p:strVal val="#ppt_x"/>
+                                            <p:strVal val="0"/>
+                                          </p:val>
+                                        </p:tav>
+                                        <p:tav tm="60000">
+                                          <p:val>
+                                            <p:strVal val="#ppt_w*1.14"/>
+                                          </p:val>
+                                        </p:tav>
+                                        <p:tav tm="82000">
+                                          <p:val>
+                                            <p:strVal val="#ppt_w*0.97"/>
                                           </p:val>
                                         </p:tav>
                                         <p:tav tm="100000">
                                           <p:val>
-                                            <p:strVal val="#ppt_x"/>
+                                            <p:strVal val="#ppt_w"/>
                                           </p:val>
                                         </p:tav>
                                       </p:tavLst>
                                     </p:anim>
                                     <p:anim calcmode="lin" valueType="num">
                                       <p:cBhvr>
-                                        <p:cTn id="49" dur="500" fill="hold"/>
+                                        <p:cTn id="52" dur="550" fill="hold"/>
                                         <p:tgtEl>
                                           <p:spTgt spid="10"/>
                                         </p:tgtEl>
                                         <p:attrNameLst>
-                                          <p:attrName>ppt_y</p:attrName>
+                                          <p:attrName>ppt_h</p:attrName>
                                         </p:attrNameLst>
                                       </p:cBhvr>
                                       <p:tavLst>
                                         <p:tav tm="0">
                                           <p:val>
-                                            <p:strVal val="#ppt_y+0.08"/>
-                                          </p:val>
-                                        </p:tav>
-                                        <p:tav tm="80000">
-                                          <p:val>
-                                            <p:strVal val="#ppt_y-0.006"/>
+                                            <p:strVal val="0"/>
+                                          </p:val>
+                                        </p:tav>
+                                        <p:tav tm="60000">
+                                          <p:val>
+                                            <p:strVal val="#ppt_h*1.14"/>
+                                          </p:val>
+                                        </p:tav>
+                                        <p:tav tm="82000">
+                                          <p:val>
+                                            <p:strVal val="#ppt_h*0.97"/>
                                           </p:val>
                                         </p:tav>
                                         <p:tav tm="100000">
                                           <p:val>
-                                            <p:strVal val="#ppt_y"/>
+                                            <p:strVal val="#ppt_h"/>
                                           </p:val>
                                         </p:tav>
                                       </p:tavLst>
                                     </p:anim>
                                     <p:animEffect transition="in" filter="fade">
                                       <p:cBhvr>
-                                        <p:cTn id="50" dur="500"/>
+                                        <p:cTn id="53" dur="220"/>
                                         <p:tgtEl>
                                           <p:spTgt spid="10"/>
                                         </p:tgtEl>
@@ -3790,7 +3898,6 @@
       <p:bldP spid="6" grpId="0" animBg="1"/>
       <p:bldP spid="7" grpId="0" animBg="1"/>
       <p:bldP spid="8" grpId="0" animBg="1"/>
-      <p:bldP spid="9" grpId="0" animBg="1"/>
       <p:bldP spid="10" grpId="0" animBg="1"/>
     </p:bldLst>
   </p:timing>
@@ -4019,7 +4126,45 @@
       </p:sp>
       <p:sp>
         <p:nvSpPr>
-          <p:cNvPr id="6" name="Instead"/>
+          <p:cNvPr id="6" name="Discount X"/>
+          <p:cNvSpPr txBox="1"/>
+          <p:nvPr/>
+        </p:nvSpPr>
+        <p:spPr>
+          <a:xfrm>
+            <a:off x="11018520" y="2148840"/>
+            <a:ext cx="685800" cy="685800"/>
+          </a:xfrm>
+          <a:prstGeom prst="ellipse">
+            <a:avLst/>
+          </a:prstGeom>
+          <a:solidFill>
+            <a:srgbClr val="EF4444"/>
+          </a:solidFill>
+          <a:ln/>
+        </p:spPr>
+        <p:txBody>
+          <a:bodyPr wrap="square" lIns="0" tIns="0" rIns="0" bIns="0" rtlCol="0" anchor="ctr"/>
+          <a:lstStyle/>
+          <a:p>
+            <a:pPr algn="ctr" indent="0" marL="0">
+              <a:buNone/>
+            </a:pPr>
+            <a:r>
+              <a:rPr lang="en-US" sz="2400" b="1" dirty="0">
+                <a:solidFill>
+                  <a:srgbClr val="FFFFFF"/>
+                </a:solidFill>
+              </a:rPr>
+              <a:t>✕</a:t>
+            </a:r>
+            <a:endParaRPr lang="en-US" sz="2400" dirty="0"/>
+          </a:p>
+        </p:txBody>
+      </p:sp>
+      <p:sp>
+        <p:nvSpPr>
+          <p:cNvPr id="7" name="Instead"/>
           <p:cNvSpPr txBox="1"/>
           <p:nvPr/>
         </p:nvSpPr>
@@ -4116,7 +4261,7 @@
                             </p:stCondLst>
                             <p:childTnLst>
                               <p:par>
-                                <p:cTn id="3" presetID="42" presetClass="entr" presetSubtype="0" fill="hold" grpId="0" nodeType="afterEffect">
+                                <p:cTn id="3" presetID="53" presetClass="entr" presetSubtype="16" fill="hold" grpId="0" nodeType="afterEffect">
                                   <p:stCondLst>
                                     <p:cond delay="0"/>
                                   </p:stCondLst>
@@ -4129,7 +4274,7 @@
                                           </p:stCondLst>
                                         </p:cTn>
                                         <p:tgtEl>
-                                          <p:spTgt spid="1"/>
+                                          <p:spTgt spid="3"/>
                                         </p:tgtEl>
                                         <p:attrNameLst>
                                           <p:attrName>style.visibility</p:attrName>
@@ -4141,60 +4286,75 @@
                                     </p:set>
                                     <p:anim calcmode="lin" valueType="num">
                                       <p:cBhvr>
-                                        <p:cTn id="5" dur="500" fill="hold"/>
-                                        <p:tgtEl>
-                                          <p:spTgt spid="1"/>
-                                        </p:tgtEl>
-                                        <p:attrNameLst>
-                                          <p:attrName>ppt_x</p:attrName>
+                                        <p:cTn id="5" dur="550" fill="hold"/>
+                                        <p:tgtEl>
+                                          <p:spTgt spid="3"/>
+                                        </p:tgtEl>
+                                        <p:attrNameLst>
+                                          <p:attrName>ppt_w</p:attrName>
                                         </p:attrNameLst>
                                       </p:cBhvr>
                                       <p:tavLst>
                                         <p:tav tm="0">
                                           <p:val>
-                                            <p:strVal val="#ppt_x"/>
+                                            <p:strVal val="0"/>
+                                          </p:val>
+                                        </p:tav>
+                                        <p:tav tm="60000">
+                                          <p:val>
+                                            <p:strVal val="#ppt_w*1.14"/>
+                                          </p:val>
+                                        </p:tav>
+                                        <p:tav tm="82000">
+                                          <p:val>
+                                            <p:strVal val="#ppt_w*0.97"/>
                                           </p:val>
                                         </p:tav>
                                         <p:tav tm="100000">
                                           <p:val>
-                                            <p:strVal val="#ppt_x"/>
+                                            <p:strVal val="#ppt_w"/>
                                           </p:val>
                                         </p:tav>
                                       </p:tavLst>
                                     </p:anim>
                                     <p:anim calcmode="lin" valueType="num">
                                       <p:cBhvr>
-                                        <p:cTn id="6" dur="500" fill="hold"/>
-                                        <p:tgtEl>
-                                          <p:spTgt spid="1"/>
-                                        </p:tgtEl>
-                                        <p:attrNameLst>
-                                          <p:attrName>ppt_y</p:attrName>
+                                        <p:cTn id="6" dur="550" fill="hold"/>
+                                        <p:tgtEl>
+                                          <p:spTgt spid="3"/>
+                                        </p:tgtEl>
+                                        <p:attrNameLst>
+                                          <p:attrName>ppt_h</p:attrName>
                                         </p:attrNameLst>
                                       </p:cBhvr>
                                       <p:tavLst>
                                         <p:tav tm="0">
                                           <p:val>
-                                            <p:strVal val="#ppt_y+0.08"/>
-                                          </p:val>
-                                        </p:tav>
-                                        <p:tav tm="80000">
-                                          <p:val>
-                                            <p:strVal val="#ppt_y-0.006"/>
+                                            <p:strVal val="0"/>
+                                          </p:val>
+                                        </p:tav>
+                                        <p:tav tm="60000">
+                                          <p:val>
+                                            <p:strVal val="#ppt_h*1.14"/>
+                                          </p:val>
+                                        </p:tav>
+                                        <p:tav tm="82000">
+                                          <p:val>
+                                            <p:strVal val="#ppt_h*0.97"/>
                                           </p:val>
                                         </p:tav>
                                         <p:tav tm="100000">
                                           <p:val>
-                                            <p:strVal val="#ppt_y"/>
+                                            <p:strVal val="#ppt_h"/>
                                           </p:val>
                                         </p:tav>
                                       </p:tavLst>
                                     </p:anim>
                                     <p:animEffect transition="in" filter="fade">
                                       <p:cBhvr>
-                                        <p:cTn id="7" dur="500"/>
-                                        <p:tgtEl>
-                                          <p:spTgt spid="1"/>
+                                        <p:cTn id="7" dur="220"/>
+                                        <p:tgtEl>
+                                          <p:spTgt spid="3"/>
                                         </p:tgtEl>
                                       </p:cBhvr>
                                     </p:animEffect>
@@ -4245,7 +4405,7 @@
                                     </p:set>
                                     <p:anim calcmode="lin" valueType="num">
                                       <p:cBhvr>
-                                        <p:cTn id="12" dur="450" fill="hold"/>
+                                        <p:cTn id="12" dur="550" fill="hold"/>
                                         <p:tgtEl>
                                           <p:spTgt spid="4"/>
                                         </p:tgtEl>
@@ -4259,9 +4419,14 @@
                                             <p:strVal val="0"/>
                                           </p:val>
                                         </p:tav>
-                                        <p:tav tm="70000">
-                                          <p:val>
-                                            <p:strVal val="#ppt_w*1.07"/>
+                                        <p:tav tm="60000">
+                                          <p:val>
+                                            <p:strVal val="#ppt_w*1.14"/>
+                                          </p:val>
+                                        </p:tav>
+                                        <p:tav tm="82000">
+                                          <p:val>
+                                            <p:strVal val="#ppt_w*0.97"/>
                                           </p:val>
                                         </p:tav>
                                         <p:tav tm="100000">
@@ -4273,7 +4438,7 @@
                                     </p:anim>
                                     <p:anim calcmode="lin" valueType="num">
                                       <p:cBhvr>
-                                        <p:cTn id="13" dur="450" fill="hold"/>
+                                        <p:cTn id="13" dur="550" fill="hold"/>
                                         <p:tgtEl>
                                           <p:spTgt spid="4"/>
                                         </p:tgtEl>
@@ -4287,9 +4452,14 @@
                                             <p:strVal val="0"/>
                                           </p:val>
                                         </p:tav>
-                                        <p:tav tm="70000">
-                                          <p:val>
-                                            <p:strVal val="#ppt_h*1.07"/>
+                                        <p:tav tm="60000">
+                                          <p:val>
+                                            <p:strVal val="#ppt_h*1.14"/>
+                                          </p:val>
+                                        </p:tav>
+                                        <p:tav tm="82000">
+                                          <p:val>
+                                            <p:strVal val="#ppt_h*0.97"/>
                                           </p:val>
                                         </p:tav>
                                         <p:tav tm="100000">
@@ -4301,7 +4471,7 @@
                                     </p:anim>
                                     <p:animEffect transition="in" filter="fade">
                                       <p:cBhvr>
-                                        <p:cTn id="14" dur="225"/>
+                                        <p:cTn id="14" dur="220"/>
                                         <p:tgtEl>
                                           <p:spTgt spid="4"/>
                                         </p:tgtEl>
@@ -4329,7 +4499,7 @@
                             </p:stCondLst>
                             <p:childTnLst>
                               <p:par>
-                                <p:cTn id="17" presetID="42" presetClass="entr" presetSubtype="0" fill="hold" grpId="0" nodeType="clickEffect">
+                                <p:cTn id="17" presetID="53" presetClass="entr" presetSubtype="16" fill="hold" grpId="0" nodeType="clickEffect">
                                   <p:stCondLst>
                                     <p:cond delay="0"/>
                                   </p:stCondLst>
@@ -4354,58 +4524,73 @@
                                     </p:set>
                                     <p:anim calcmode="lin" valueType="num">
                                       <p:cBhvr>
-                                        <p:cTn id="19" dur="500" fill="hold"/>
+                                        <p:cTn id="19" dur="550" fill="hold"/>
                                         <p:tgtEl>
                                           <p:spTgt spid="5"/>
                                         </p:tgtEl>
                                         <p:attrNameLst>
-                                          <p:attrName>ppt_x</p:attrName>
+                                          <p:attrName>ppt_w</p:attrName>
                                         </p:attrNameLst>
                                       </p:cBhvr>
                                       <p:tavLst>
                                         <p:tav tm="0">
                                           <p:val>
-                                            <p:strVal val="#ppt_x"/>
+                                            <p:strVal val="0"/>
+                                          </p:val>
+                                        </p:tav>
+                                        <p:tav tm="60000">
+                                          <p:val>
+                                            <p:strVal val="#ppt_w*1.14"/>
+                                          </p:val>
+                                        </p:tav>
+                                        <p:tav tm="82000">
+                                          <p:val>
+                                            <p:strVal val="#ppt_w*0.97"/>
                                           </p:val>
                                         </p:tav>
                                         <p:tav tm="100000">
                                           <p:val>
-                                            <p:strVal val="#ppt_x"/>
+                                            <p:strVal val="#ppt_w"/>
                                           </p:val>
                                         </p:tav>
                                       </p:tavLst>
                                     </p:anim>
                                     <p:anim calcmode="lin" valueType="num">
                                       <p:cBhvr>
-                                        <p:cTn id="20" dur="500" fill="hold"/>
+                                        <p:cTn id="20" dur="550" fill="hold"/>
                                         <p:tgtEl>
                                           <p:spTgt spid="5"/>
                                         </p:tgtEl>
                                         <p:attrNameLst>
-                                          <p:attrName>ppt_y</p:attrName>
+                                          <p:attrName>ppt_h</p:attrName>
                                         </p:attrNameLst>
                                       </p:cBhvr>
                                       <p:tavLst>
                                         <p:tav tm="0">
                                           <p:val>
-                                            <p:strVal val="#ppt_y+0.08"/>
-                                          </p:val>
-                                        </p:tav>
-                                        <p:tav tm="80000">
-                                          <p:val>
-                                            <p:strVal val="#ppt_y-0.006"/>
+                                            <p:strVal val="0"/>
+                                          </p:val>
+                                        </p:tav>
+                                        <p:tav tm="60000">
+                                          <p:val>
+                                            <p:strVal val="#ppt_h*1.14"/>
+                                          </p:val>
+                                        </p:tav>
+                                        <p:tav tm="82000">
+                                          <p:val>
+                                            <p:strVal val="#ppt_h*0.97"/>
                                           </p:val>
                                         </p:tav>
                                         <p:tav tm="100000">
                                           <p:val>
-                                            <p:strVal val="#ppt_y"/>
+                                            <p:strVal val="#ppt_h"/>
                                           </p:val>
                                         </p:tav>
                                       </p:tavLst>
                                     </p:anim>
                                     <p:animEffect transition="in" filter="fade">
                                       <p:cBhvr>
-                                        <p:cTn id="21" dur="500"/>
+                                        <p:cTn id="21" dur="220"/>
                                         <p:tgtEl>
                                           <p:spTgt spid="5"/>
                                         </p:tgtEl>
@@ -4458,7 +4643,7 @@
                                     </p:set>
                                     <p:anim calcmode="lin" valueType="num">
                                       <p:cBhvr>
-                                        <p:cTn id="26" dur="450" fill="hold"/>
+                                        <p:cTn id="26" dur="550" fill="hold"/>
                                         <p:tgtEl>
                                           <p:spTgt spid="6"/>
                                         </p:tgtEl>
@@ -4472,9 +4657,14 @@
                                             <p:strVal val="0"/>
                                           </p:val>
                                         </p:tav>
-                                        <p:tav tm="70000">
-                                          <p:val>
-                                            <p:strVal val="#ppt_w*1.07"/>
+                                        <p:tav tm="60000">
+                                          <p:val>
+                                            <p:strVal val="#ppt_w*1.14"/>
+                                          </p:val>
+                                        </p:tav>
+                                        <p:tav tm="82000">
+                                          <p:val>
+                                            <p:strVal val="#ppt_w*0.97"/>
                                           </p:val>
                                         </p:tav>
                                         <p:tav tm="100000">
@@ -4486,7 +4676,7 @@
                                     </p:anim>
                                     <p:anim calcmode="lin" valueType="num">
                                       <p:cBhvr>
-                                        <p:cTn id="27" dur="450" fill="hold"/>
+                                        <p:cTn id="27" dur="550" fill="hold"/>
                                         <p:tgtEl>
                                           <p:spTgt spid="6"/>
                                         </p:tgtEl>
@@ -4500,9 +4690,14 @@
                                             <p:strVal val="0"/>
                                           </p:val>
                                         </p:tav>
-                                        <p:tav tm="70000">
-                                          <p:val>
-                                            <p:strVal val="#ppt_h*1.07"/>
+                                        <p:tav tm="60000">
+                                          <p:val>
+                                            <p:strVal val="#ppt_h*1.14"/>
+                                          </p:val>
+                                        </p:tav>
+                                        <p:tav tm="82000">
+                                          <p:val>
+                                            <p:strVal val="#ppt_h*0.97"/>
                                           </p:val>
                                         </p:tav>
                                         <p:tav tm="100000">
@@ -4514,12 +4709,149 @@
                                     </p:anim>
                                     <p:animEffect transition="in" filter="fade">
                                       <p:cBhvr>
-                                        <p:cTn id="28" dur="225"/>
+                                        <p:cTn id="28" dur="220"/>
                                         <p:tgtEl>
                                           <p:spTgt spid="6"/>
                                         </p:tgtEl>
                                       </p:cBhvr>
                                     </p:animEffect>
+                                  </p:childTnLst>
+                                </p:cTn>
+                              </p:par>
+                            </p:childTnLst>
+                          </p:cTn>
+                        </p:par>
+                      </p:childTnLst>
+                    </p:cTn>
+                  </p:par>
+                  <p:par>
+                    <p:cTn id="39" fill="hold">
+                      <p:stCondLst>
+                        <p:cond delay="indefinite"/>
+                      </p:stCondLst>
+                      <p:childTnLst>
+                        <p:par>
+                          <p:cTn id="40" fill="hold">
+                            <p:stCondLst>
+                              <p:cond delay="0"/>
+                            </p:stCondLst>
+                            <p:childTnLst>
+                              <p:par>
+                                <p:cTn id="31" presetID="53" presetClass="entr" presetSubtype="16" fill="hold" grpId="0" nodeType="clickEffect">
+                                  <p:stCondLst>
+                                    <p:cond delay="0"/>
+                                  </p:stCondLst>
+                                  <p:childTnLst>
+                                    <p:set>
+                                      <p:cBhvr>
+                                        <p:cTn id="32" dur="1" fill="hold">
+                                          <p:stCondLst>
+                                            <p:cond delay="0"/>
+                                          </p:stCondLst>
+                                        </p:cTn>
+                                        <p:tgtEl>
+                                          <p:spTgt spid="7"/>
+                                        </p:tgtEl>
+                                        <p:attrNameLst>
+                                          <p:attrName>style.visibility</p:attrName>
+                                        </p:attrNameLst>
+                                      </p:cBhvr>
+                                      <p:to>
+                                        <p:strVal val="visible"/>
+                                      </p:to>
+                                    </p:set>
+                                    <p:anim calcmode="lin" valueType="num">
+                                      <p:cBhvr>
+                                        <p:cTn id="33" dur="550" fill="hold"/>
+                                        <p:tgtEl>
+                                          <p:spTgt spid="7"/>
+                                        </p:tgtEl>
+                                        <p:attrNameLst>
+                                          <p:attrName>ppt_w</p:attrName>
+                                        </p:attrNameLst>
+                                      </p:cBhvr>
+                                      <p:tavLst>
+                                        <p:tav tm="0">
+                                          <p:val>
+                                            <p:strVal val="0"/>
+                                          </p:val>
+                                        </p:tav>
+                                        <p:tav tm="60000">
+                                          <p:val>
+                                            <p:strVal val="#ppt_w*1.14"/>
+                                          </p:val>
+                                        </p:tav>
+                                        <p:tav tm="82000">
+                                          <p:val>
+                                            <p:strVal val="#ppt_w*0.97"/>
+                                          </p:val>
+                                        </p:tav>
+                                        <p:tav tm="100000">
+                                          <p:val>
+                                            <p:strVal val="#ppt_w"/>
+                                          </p:val>
+                                        </p:tav>
+                                      </p:tavLst>
+                                    </p:anim>
+                                    <p:anim calcmode="lin" valueType="num">
+                                      <p:cBhvr>
+                                        <p:cTn id="34" dur="550" fill="hold"/>
+                                        <p:tgtEl>
+                                          <p:spTgt spid="7"/>
+                                        </p:tgtEl>
+                                        <p:attrNameLst>
+                                          <p:attrName>ppt_h</p:attrName>
+                                        </p:attrNameLst>
+                                      </p:cBhvr>
+                                      <p:tavLst>
+                                        <p:tav tm="0">
+                                          <p:val>
+                                            <p:strVal val="0"/>
+                                          </p:val>
+                                        </p:tav>
+                                        <p:tav tm="60000">
+                                          <p:val>
+                                            <p:strVal val="#ppt_h*1.14"/>
+                                          </p:val>
+                                        </p:tav>
+                                        <p:tav tm="82000">
+                                          <p:val>
+                                            <p:strVal val="#ppt_h*0.97"/>
+                                          </p:val>
+                                        </p:tav>
+                                        <p:tav tm="100000">
+                                          <p:val>
+                                            <p:strVal val="#ppt_h"/>
+                                          </p:val>
+                                        </p:tav>
+                                      </p:tavLst>
+                                    </p:anim>
+                                    <p:animEffect transition="in" filter="fade">
+                                      <p:cBhvr>
+                                        <p:cTn id="35" dur="220"/>
+                                        <p:tgtEl>
+                                          <p:spTgt spid="7"/>
+                                        </p:tgtEl>
+                                      </p:cBhvr>
+                                    </p:animEffect>
+                                  </p:childTnLst>
+                                </p:cTn>
+                              </p:par>
+                              <p:par>
+                                <p:cTn id="36" presetID="6" presetClass="emph" presetSubtype="0" fill="hold" grpId="0" nodeType="withEffect">
+                                  <p:stCondLst>
+                                    <p:cond delay="650"/>
+                                  </p:stCondLst>
+                                  <p:childTnLst>
+                                    <p:animScale>
+                                      <p:cBhvr>
+                                        <p:cTn id="38" dur="180" autoRev="1" fill="hold"/>
+                                        <p:tgtEl>
+                                          <p:spTgt spid="7"/>
+                                        </p:tgtEl>
+                                      </p:cBhvr>
+                                      <p:by x="112000" y="112000"/>
+                                    </p:animScale>
                                   </p:childTnLst>
                                 </p:cTn>
                               </p:par>
@@ -4551,7 +4883,7 @@
       </p:par>
     </p:tnLst>
     <p:bldLst>
-      <p:bldP spid="1" grpId="0" animBg="1"/>
+      <p:bldP spid="3" grpId="0" animBg="1"/>
       <p:bldP spid="4" grpId="0" animBg="1"/>
       <p:bldP spid="5" grpId="0" animBg="1"/>
       <p:bldP spid="6" grpId="0" animBg="1"/>
@@ -4888,7 +5220,7 @@
               <p:cTn id="2" dur="indefinite" nodeType="mainSeq">
                 <p:childTnLst>
                   <p:par>
-                    <p:cTn id="11" fill="hold">
+                    <p:cTn id="8" fill="hold">
                       <p:stCondLst>
                         <p:cond delay="indefinite"/>
                         <p:cond evt="onBegin" delay="0">
@@ -4897,13 +5229,13 @@
                       </p:stCondLst>
                       <p:childTnLst>
                         <p:par>
-                          <p:cTn id="12" fill="hold">
+                          <p:cTn id="9" fill="hold">
                             <p:stCondLst>
                               <p:cond delay="0"/>
                             </p:stCondLst>
                             <p:childTnLst>
                               <p:par>
-                                <p:cTn id="3" presetID="42" presetClass="entr" presetSubtype="0" fill="hold" grpId="0" nodeType="afterEffect">
+                                <p:cTn id="3" presetID="53" presetClass="entr" presetSubtype="16" fill="hold" grpId="0" nodeType="afterEffect">
                                   <p:stCondLst>
                                     <p:cond delay="0"/>
                                   </p:stCondLst>
@@ -4916,7 +5248,7 @@
                                           </p:stCondLst>
                                         </p:cTn>
                                         <p:tgtEl>
-                                          <p:spTgt spid="1"/>
+                                          <p:spTgt spid="3"/>
                                         </p:tgtEl>
                                         <p:attrNameLst>
                                           <p:attrName>style.visibility</p:attrName>
@@ -4928,95 +5260,75 @@
                                     </p:set>
                                     <p:anim calcmode="lin" valueType="num">
                                       <p:cBhvr>
-                                        <p:cTn id="5" dur="500" fill="hold"/>
-                                        <p:tgtEl>
-                                          <p:spTgt spid="1"/>
-                                        </p:tgtEl>
-                                        <p:attrNameLst>
-                                          <p:attrName>ppt_x</p:attrName>
+                                        <p:cTn id="5" dur="550" fill="hold"/>
+                                        <p:tgtEl>
+                                          <p:spTgt spid="3"/>
+                                        </p:tgtEl>
+                                        <p:attrNameLst>
+                                          <p:attrName>ppt_w</p:attrName>
                                         </p:attrNameLst>
                                       </p:cBhvr>
                                       <p:tavLst>
                                         <p:tav tm="0">
                                           <p:val>
-                                            <p:strVal val="#ppt_x"/>
+                                            <p:strVal val="0"/>
+                                          </p:val>
+                                        </p:tav>
+                                        <p:tav tm="60000">
+                                          <p:val>
+                                            <p:strVal val="#ppt_w*1.14"/>
+                                          </p:val>
+                                        </p:tav>
+                                        <p:tav tm="82000">
+                                          <p:val>
+                                            <p:strVal val="#ppt_w*0.97"/>
                                           </p:val>
                                         </p:tav>
                                         <p:tav tm="100000">
                                           <p:val>
-                                            <p:strVal val="#ppt_x"/>
+                                            <p:strVal val="#ppt_w"/>
                                           </p:val>
                                         </p:tav>
                                       </p:tavLst>
                                     </p:anim>
                                     <p:anim calcmode="lin" valueType="num">
                                       <p:cBhvr>
-                                        <p:cTn id="6" dur="500" fill="hold"/>
-                                        <p:tgtEl>
-                                          <p:spTgt spid="1"/>
-                                        </p:tgtEl>
-                                        <p:attrNameLst>
-                                          <p:attrName>ppt_y</p:attrName>
+                                        <p:cTn id="6" dur="550" fill="hold"/>
+                                        <p:tgtEl>
+                                          <p:spTgt spid="3"/>
+                                        </p:tgtEl>
+                                        <p:attrNameLst>
+                                          <p:attrName>ppt_h</p:attrName>
                                         </p:attrNameLst>
                                       </p:cBhvr>
                                       <p:tavLst>
                                         <p:tav tm="0">
                                           <p:val>
-                                            <p:strVal val="#ppt_y+0.08"/>
-                                          </p:val>
-                                        </p:tav>
-                                        <p:tav tm="80000">
-                                          <p:val>
-                                            <p:strVal val="#ppt_y-0.006"/>
+                                            <p:strVal val="0"/>
+                                          </p:val>
+                                        </p:tav>
+                                        <p:tav tm="60000">
+                                          <p:val>
+                                            <p:strVal val="#ppt_h*1.14"/>
+                                          </p:val>
+                                        </p:tav>
+                                        <p:tav tm="82000">
+                                          <p:val>
+                                            <p:strVal val="#ppt_h*0.97"/>
                                           </p:val>
                                         </p:tav>
                                         <p:tav tm="100000">
                                           <p:val>
-                                            <p:strVal val="#ppt_y"/>
+                                            <p:strVal val="#ppt_h"/>
                                           </p:val>
                                         </p:tav>
                                       </p:tavLst>
                                     </p:anim>
                                     <p:animEffect transition="in" filter="fade">
                                       <p:cBhvr>
-                                        <p:cTn id="7" dur="500"/>
-                                        <p:tgtEl>
-                                          <p:spTgt spid="1"/>
-                                        </p:tgtEl>
-                                      </p:cBhvr>
-                                    </p:animEffect>
-                                  </p:childTnLst>
-                                </p:cTn>
-                              </p:par>
-                              <p:par>
-                                <p:cTn id="8" presetID="10" presetClass="entr" presetSubtype="0" fill="hold" grpId="0" nodeType="withEffect">
-                                  <p:stCondLst>
-                                    <p:cond delay="500"/>
-                                  </p:stCondLst>
-                                  <p:childTnLst>
-                                    <p:set>
-                                      <p:cBhvr>
-                                        <p:cTn id="9" dur="1" fill="hold">
-                                          <p:stCondLst>
-                                            <p:cond delay="0"/>
-                                          </p:stCondLst>
-                                        </p:cTn>
-                                        <p:tgtEl>
-                                          <p:spTgt spid="4"/>
-                                        </p:tgtEl>
-                                        <p:attrNameLst>
-                                          <p:attrName>style.visibility</p:attrName>
-                                        </p:attrNameLst>
-                                      </p:cBhvr>
-                                      <p:to>
-                                        <p:strVal val="visible"/>
-                                      </p:to>
-                                    </p:set>
-                                    <p:animEffect transition="in" filter="fade">
-                                      <p:cBhvr>
-                                        <p:cTn id="10" dur="400"/>
-                                        <p:tgtEl>
-                                          <p:spTgt spid="4"/>
+                                        <p:cTn id="7" dur="220"/>
+                                        <p:tgtEl>
+                                          <p:spTgt spid="3"/>
                                         </p:tgtEl>
                                       </p:cBhvr>
                                     </p:animEffect>
@@ -5030,32 +5342,32 @@
                     </p:cTn>
                   </p:par>
                   <p:par>
-                    <p:cTn id="18" fill="hold">
+                    <p:cTn id="15" fill="hold">
                       <p:stCondLst>
                         <p:cond delay="indefinite"/>
                       </p:stCondLst>
                       <p:childTnLst>
                         <p:par>
-                          <p:cTn id="19" fill="hold">
+                          <p:cTn id="16" fill="hold">
                             <p:stCondLst>
                               <p:cond delay="0"/>
                             </p:stCondLst>
                             <p:childTnLst>
                               <p:par>
-                                <p:cTn id="13" presetID="53" presetClass="entr" presetSubtype="16" fill="hold" grpId="0" nodeType="clickEffect">
+                                <p:cTn id="10" presetID="53" presetClass="entr" presetSubtype="16" fill="hold" grpId="0" nodeType="clickEffect">
                                   <p:stCondLst>
                                     <p:cond delay="0"/>
                                   </p:stCondLst>
                                   <p:childTnLst>
                                     <p:set>
                                       <p:cBhvr>
-                                        <p:cTn id="14" dur="1" fill="hold">
+                                        <p:cTn id="11" dur="1" fill="hold">
                                           <p:stCondLst>
                                             <p:cond delay="0"/>
                                           </p:stCondLst>
                                         </p:cTn>
                                         <p:tgtEl>
-                                          <p:spTgt spid="5"/>
+                                          <p:spTgt spid="4"/>
                                         </p:tgtEl>
                                         <p:attrNameLst>
                                           <p:attrName>style.visibility</p:attrName>
@@ -5067,9 +5379,9 @@
                                     </p:set>
                                     <p:anim calcmode="lin" valueType="num">
                                       <p:cBhvr>
-                                        <p:cTn id="15" dur="450" fill="hold"/>
-                                        <p:tgtEl>
-                                          <p:spTgt spid="5"/>
+                                        <p:cTn id="12" dur="550" fill="hold"/>
+                                        <p:tgtEl>
+                                          <p:spTgt spid="4"/>
                                         </p:tgtEl>
                                         <p:attrNameLst>
                                           <p:attrName>ppt_w</p:attrName>
@@ -5081,9 +5393,14 @@
                                             <p:strVal val="0"/>
                                           </p:val>
                                         </p:tav>
-                                        <p:tav tm="70000">
-                                          <p:val>
-                                            <p:strVal val="#ppt_w*1.07"/>
+                                        <p:tav tm="60000">
+                                          <p:val>
+                                            <p:strVal val="#ppt_w*1.14"/>
+                                          </p:val>
+                                        </p:tav>
+                                        <p:tav tm="82000">
+                                          <p:val>
+                                            <p:strVal val="#ppt_w*0.97"/>
                                           </p:val>
                                         </p:tav>
                                         <p:tav tm="100000">
@@ -5095,9 +5412,9 @@
                                     </p:anim>
                                     <p:anim calcmode="lin" valueType="num">
                                       <p:cBhvr>
-                                        <p:cTn id="16" dur="450" fill="hold"/>
-                                        <p:tgtEl>
-                                          <p:spTgt spid="5"/>
+                                        <p:cTn id="13" dur="550" fill="hold"/>
+                                        <p:tgtEl>
+                                          <p:spTgt spid="4"/>
                                         </p:tgtEl>
                                         <p:attrNameLst>
                                           <p:attrName>ppt_h</p:attrName>
@@ -5109,9 +5426,14 @@
                                             <p:strVal val="0"/>
                                           </p:val>
                                         </p:tav>
-                                        <p:tav tm="70000">
-                                          <p:val>
-                                            <p:strVal val="#ppt_h*1.07"/>
+                                        <p:tav tm="60000">
+                                          <p:val>
+                                            <p:strVal val="#ppt_h*1.14"/>
+                                          </p:val>
+                                        </p:tav>
+                                        <p:tav tm="82000">
+                                          <p:val>
+                                            <p:strVal val="#ppt_h*0.97"/>
                                           </p:val>
                                         </p:tav>
                                         <p:tav tm="100000">
@@ -5123,9 +5445,9 @@
                                     </p:anim>
                                     <p:animEffect transition="in" filter="fade">
                                       <p:cBhvr>
-                                        <p:cTn id="17" dur="225"/>
-                                        <p:tgtEl>
-                                          <p:spTgt spid="5"/>
+                                        <p:cTn id="14" dur="220"/>
+                                        <p:tgtEl>
+                                          <p:spTgt spid="4"/>
                                         </p:tgtEl>
                                       </p:cBhvr>
                                     </p:animEffect>
@@ -5139,32 +5461,32 @@
                     </p:cTn>
                   </p:par>
                   <p:par>
-                    <p:cTn id="25" fill="hold">
+                    <p:cTn id="22" fill="hold">
                       <p:stCondLst>
                         <p:cond delay="indefinite"/>
                       </p:stCondLst>
                       <p:childTnLst>
                         <p:par>
-                          <p:cTn id="26" fill="hold">
+                          <p:cTn id="23" fill="hold">
                             <p:stCondLst>
                               <p:cond delay="0"/>
                             </p:stCondLst>
                             <p:childTnLst>
                               <p:par>
-                                <p:cTn id="20" presetID="53" presetClass="entr" presetSubtype="16" fill="hold" grpId="0" nodeType="clickEffect">
+                                <p:cTn id="17" presetID="53" presetClass="entr" presetSubtype="16" fill="hold" grpId="0" nodeType="clickEffect">
                                   <p:stCondLst>
                                     <p:cond delay="0"/>
                                   </p:stCondLst>
                                   <p:childTnLst>
                                     <p:set>
                                       <p:cBhvr>
-                                        <p:cTn id="21" dur="1" fill="hold">
+                                        <p:cTn id="18" dur="1" fill="hold">
                                           <p:stCondLst>
                                             <p:cond delay="0"/>
                                           </p:stCondLst>
                                         </p:cTn>
                                         <p:tgtEl>
-                                          <p:spTgt spid="6"/>
+                                          <p:spTgt spid="5"/>
                                         </p:tgtEl>
                                         <p:attrNameLst>
                                           <p:attrName>style.visibility</p:attrName>
@@ -5176,9 +5498,9 @@
                                     </p:set>
                                     <p:anim calcmode="lin" valueType="num">
                                       <p:cBhvr>
-                                        <p:cTn id="22" dur="450" fill="hold"/>
-                                        <p:tgtEl>
-                                          <p:spTgt spid="6"/>
+                                        <p:cTn id="19" dur="550" fill="hold"/>
+                                        <p:tgtEl>
+                                          <p:spTgt spid="5"/>
                                         </p:tgtEl>
                                         <p:attrNameLst>
                                           <p:attrName>ppt_w</p:attrName>
@@ -5190,9 +5512,14 @@
                                             <p:strVal val="0"/>
                                           </p:val>
                                         </p:tav>
-                                        <p:tav tm="70000">
-                                          <p:val>
-                                            <p:strVal val="#ppt_w*1.07"/>
+                                        <p:tav tm="60000">
+                                          <p:val>
+                                            <p:strVal val="#ppt_w*1.14"/>
+                                          </p:val>
+                                        </p:tav>
+                                        <p:tav tm="82000">
+                                          <p:val>
+                                            <p:strVal val="#ppt_w*0.97"/>
                                           </p:val>
                                         </p:tav>
                                         <p:tav tm="100000">
@@ -5204,9 +5531,9 @@
                                     </p:anim>
                                     <p:anim calcmode="lin" valueType="num">
                                       <p:cBhvr>
-                                        <p:cTn id="23" dur="450" fill="hold"/>
-                                        <p:tgtEl>
-                                          <p:spTgt spid="6"/>
+                                        <p:cTn id="20" dur="550" fill="hold"/>
+                                        <p:tgtEl>
+                                          <p:spTgt spid="5"/>
                                         </p:tgtEl>
                                         <p:attrNameLst>
                                           <p:attrName>ppt_h</p:attrName>
@@ -5218,9 +5545,14 @@
                                             <p:strVal val="0"/>
                                           </p:val>
                                         </p:tav>
-                                        <p:tav tm="70000">
-                                          <p:val>
-                                            <p:strVal val="#ppt_h*1.07"/>
+                                        <p:tav tm="60000">
+                                          <p:val>
+                                            <p:strVal val="#ppt_h*1.14"/>
+                                          </p:val>
+                                        </p:tav>
+                                        <p:tav tm="82000">
+                                          <p:val>
+                                            <p:strVal val="#ppt_h*0.97"/>
                                           </p:val>
                                         </p:tav>
                                         <p:tav tm="100000">
@@ -5232,9 +5564,9 @@
                                     </p:anim>
                                     <p:animEffect transition="in" filter="fade">
                                       <p:cBhvr>
-                                        <p:cTn id="24" dur="225"/>
-                                        <p:tgtEl>
-                                          <p:spTgt spid="6"/>
+                                        <p:cTn id="21" dur="220"/>
+                                        <p:tgtEl>
+                                          <p:spTgt spid="5"/>
                                         </p:tgtEl>
                                       </p:cBhvr>
                                     </p:animEffect>
@@ -5248,32 +5580,32 @@
                     </p:cTn>
                   </p:par>
                   <p:par>
-                    <p:cTn id="32" fill="hold">
+                    <p:cTn id="29" fill="hold">
                       <p:stCondLst>
                         <p:cond delay="indefinite"/>
                       </p:stCondLst>
                       <p:childTnLst>
                         <p:par>
-                          <p:cTn id="33" fill="hold">
+                          <p:cTn id="30" fill="hold">
                             <p:stCondLst>
                               <p:cond delay="0"/>
                             </p:stCondLst>
                             <p:childTnLst>
                               <p:par>
-                                <p:cTn id="27" presetID="53" presetClass="entr" presetSubtype="16" fill="hold" grpId="0" nodeType="clickEffect">
+                                <p:cTn id="24" presetID="53" presetClass="entr" presetSubtype="16" fill="hold" grpId="0" nodeType="clickEffect">
                                   <p:stCondLst>
                                     <p:cond delay="0"/>
                                   </p:stCondLst>
                                   <p:childTnLst>
                                     <p:set>
                                       <p:cBhvr>
-                                        <p:cTn id="28" dur="1" fill="hold">
+                                        <p:cTn id="25" dur="1" fill="hold">
                                           <p:stCondLst>
                                             <p:cond delay="0"/>
                                           </p:stCondLst>
                                         </p:cTn>
                                         <p:tgtEl>
-                                          <p:spTgt spid="7"/>
+                                          <p:spTgt spid="6"/>
                                         </p:tgtEl>
                                         <p:attrNameLst>
                                           <p:attrName>style.visibility</p:attrName>
@@ -5285,9 +5617,9 @@
                                     </p:set>
                                     <p:anim calcmode="lin" valueType="num">
                                       <p:cBhvr>
-                                        <p:cTn id="29" dur="450" fill="hold"/>
-                                        <p:tgtEl>
-                                          <p:spTgt spid="7"/>
+                                        <p:cTn id="26" dur="550" fill="hold"/>
+                                        <p:tgtEl>
+                                          <p:spTgt spid="6"/>
                                         </p:tgtEl>
                                         <p:attrNameLst>
                                           <p:attrName>ppt_w</p:attrName>
@@ -5299,9 +5631,14 @@
                                             <p:strVal val="0"/>
                                           </p:val>
                                         </p:tav>
-                                        <p:tav tm="70000">
-                                          <p:val>
-                                            <p:strVal val="#ppt_w*1.07"/>
+                                        <p:tav tm="60000">
+                                          <p:val>
+                                            <p:strVal val="#ppt_w*1.14"/>
+                                          </p:val>
+                                        </p:tav>
+                                        <p:tav tm="82000">
+                                          <p:val>
+                                            <p:strVal val="#ppt_w*0.97"/>
                                           </p:val>
                                         </p:tav>
                                         <p:tav tm="100000">
@@ -5313,9 +5650,9 @@
                                     </p:anim>
                                     <p:anim calcmode="lin" valueType="num">
                                       <p:cBhvr>
-                                        <p:cTn id="30" dur="450" fill="hold"/>
-                                        <p:tgtEl>
-                                          <p:spTgt spid="7"/>
+                                        <p:cTn id="27" dur="550" fill="hold"/>
+                                        <p:tgtEl>
+                                          <p:spTgt spid="6"/>
                                         </p:tgtEl>
                                         <p:attrNameLst>
                                           <p:attrName>ppt_h</p:attrName>
@@ -5327,9 +5664,14 @@
                                             <p:strVal val="0"/>
                                           </p:val>
                                         </p:tav>
-                                        <p:tav tm="70000">
-                                          <p:val>
-                                            <p:strVal val="#ppt_h*1.07"/>
+                                        <p:tav tm="60000">
+                                          <p:val>
+                                            <p:strVal val="#ppt_h*1.14"/>
+                                          </p:val>
+                                        </p:tav>
+                                        <p:tav tm="82000">
+                                          <p:val>
+                                            <p:strVal val="#ppt_h*0.97"/>
                                           </p:val>
                                         </p:tav>
                                         <p:tav tm="100000">
@@ -5341,9 +5683,9 @@
                                     </p:anim>
                                     <p:animEffect transition="in" filter="fade">
                                       <p:cBhvr>
-                                        <p:cTn id="31" dur="225"/>
-                                        <p:tgtEl>
-                                          <p:spTgt spid="7"/>
+                                        <p:cTn id="28" dur="220"/>
+                                        <p:tgtEl>
+                                          <p:spTgt spid="6"/>
                                         </p:tgtEl>
                                       </p:cBhvr>
                                     </p:animEffect>
@@ -5357,32 +5699,32 @@
                     </p:cTn>
                   </p:par>
                   <p:par>
-                    <p:cTn id="39" fill="hold">
+                    <p:cTn id="36" fill="hold">
                       <p:stCondLst>
                         <p:cond delay="indefinite"/>
                       </p:stCondLst>
                       <p:childTnLst>
                         <p:par>
-                          <p:cTn id="40" fill="hold">
+                          <p:cTn id="37" fill="hold">
                             <p:stCondLst>
                               <p:cond delay="0"/>
                             </p:stCondLst>
                             <p:childTnLst>
                               <p:par>
-                                <p:cTn id="34" presetID="53" presetClass="entr" presetSubtype="16" fill="hold" grpId="0" nodeType="clickEffect">
+                                <p:cTn id="31" presetID="53" presetClass="entr" presetSubtype="16" fill="hold" grpId="0" nodeType="clickEffect">
                                   <p:stCondLst>
                                     <p:cond delay="0"/>
                                   </p:stCondLst>
                                   <p:childTnLst>
                                     <p:set>
                                       <p:cBhvr>
-                                        <p:cTn id="35" dur="1" fill="hold">
+                                        <p:cTn id="32" dur="1" fill="hold">
                                           <p:stCondLst>
                                             <p:cond delay="0"/>
                                           </p:stCondLst>
                                         </p:cTn>
                                         <p:tgtEl>
-                                          <p:spTgt spid="8"/>
+                                          <p:spTgt spid="7"/>
                                         </p:tgtEl>
                                         <p:attrNameLst>
                                           <p:attrName>style.visibility</p:attrName>
@@ -5394,9 +5736,9 @@
                                     </p:set>
                                     <p:anim calcmode="lin" valueType="num">
                                       <p:cBhvr>
-                                        <p:cTn id="36" dur="600" fill="hold"/>
-                                        <p:tgtEl>
-                                          <p:spTgt spid="8"/>
+                                        <p:cTn id="33" dur="550" fill="hold"/>
+                                        <p:tgtEl>
+                                          <p:spTgt spid="7"/>
                                         </p:tgtEl>
                                         <p:attrNameLst>
                                           <p:attrName>ppt_w</p:attrName>
@@ -5408,9 +5750,14 @@
                                             <p:strVal val="0"/>
                                           </p:val>
                                         </p:tav>
-                                        <p:tav tm="70000">
-                                          <p:val>
-                                            <p:strVal val="#ppt_w*1.07"/>
+                                        <p:tav tm="60000">
+                                          <p:val>
+                                            <p:strVal val="#ppt_w*1.14"/>
+                                          </p:val>
+                                        </p:tav>
+                                        <p:tav tm="82000">
+                                          <p:val>
+                                            <p:strVal val="#ppt_w*0.97"/>
                                           </p:val>
                                         </p:tav>
                                         <p:tav tm="100000">
@@ -5422,9 +5769,9 @@
                                     </p:anim>
                                     <p:anim calcmode="lin" valueType="num">
                                       <p:cBhvr>
-                                        <p:cTn id="37" dur="600" fill="hold"/>
-                                        <p:tgtEl>
-                                          <p:spTgt spid="8"/>
+                                        <p:cTn id="34" dur="550" fill="hold"/>
+                                        <p:tgtEl>
+                                          <p:spTgt spid="7"/>
                                         </p:tgtEl>
                                         <p:attrNameLst>
                                           <p:attrName>ppt_h</p:attrName>
@@ -5436,9 +5783,14 @@
                                             <p:strVal val="0"/>
                                           </p:val>
                                         </p:tav>
-                                        <p:tav tm="70000">
-                                          <p:val>
-                                            <p:strVal val="#ppt_h*1.07"/>
+                                        <p:tav tm="60000">
+                                          <p:val>
+                                            <p:strVal val="#ppt_h*1.14"/>
+                                          </p:val>
+                                        </p:tav>
+                                        <p:tav tm="82000">
+                                          <p:val>
+                                            <p:strVal val="#ppt_h*0.97"/>
                                           </p:val>
                                         </p:tav>
                                         <p:tav tm="100000">
@@ -5450,12 +5802,149 @@
                                     </p:anim>
                                     <p:animEffect transition="in" filter="fade">
                                       <p:cBhvr>
-                                        <p:cTn id="38" dur="300"/>
+                                        <p:cTn id="35" dur="220"/>
+                                        <p:tgtEl>
+                                          <p:spTgt spid="7"/>
+                                        </p:tgtEl>
+                                      </p:cBhvr>
+                                    </p:animEffect>
+                                  </p:childTnLst>
+                                </p:cTn>
+                              </p:par>
+                            </p:childTnLst>
+                          </p:cTn>
+                        </p:par>
+                      </p:childTnLst>
+                    </p:cTn>
+                  </p:par>
+                  <p:par>
+                    <p:cTn id="46" fill="hold">
+                      <p:stCondLst>
+                        <p:cond delay="indefinite"/>
+                      </p:stCondLst>
+                      <p:childTnLst>
+                        <p:par>
+                          <p:cTn id="47" fill="hold">
+                            <p:stCondLst>
+                              <p:cond delay="0"/>
+                            </p:stCondLst>
+                            <p:childTnLst>
+                              <p:par>
+                                <p:cTn id="38" presetID="53" presetClass="entr" presetSubtype="16" fill="hold" grpId="0" nodeType="clickEffect">
+                                  <p:stCondLst>
+                                    <p:cond delay="0"/>
+                                  </p:stCondLst>
+                                  <p:childTnLst>
+                                    <p:set>
+                                      <p:cBhvr>
+                                        <p:cTn id="39" dur="1" fill="hold">
+                                          <p:stCondLst>
+                                            <p:cond delay="0"/>
+                                          </p:stCondLst>
+                                        </p:cTn>
                                         <p:tgtEl>
                                           <p:spTgt spid="8"/>
                                         </p:tgtEl>
+                                        <p:attrNameLst>
+                                          <p:attrName>style.visibility</p:attrName>
+                                        </p:attrNameLst>
+                                      </p:cBhvr>
+                                      <p:to>
+                                        <p:strVal val="visible"/>
+                                      </p:to>
+                                    </p:set>
+                                    <p:anim calcmode="lin" valueType="num">
+                                      <p:cBhvr>
+                                        <p:cTn id="40" dur="650" fill="hold"/>
+                                        <p:tgtEl>
+                                          <p:spTgt spid="8"/>
+                                        </p:tgtEl>
+                                        <p:attrNameLst>
+                                          <p:attrName>ppt_w</p:attrName>
+                                        </p:attrNameLst>
+                                      </p:cBhvr>
+                                      <p:tavLst>
+                                        <p:tav tm="0">
+                                          <p:val>
+                                            <p:strVal val="0"/>
+                                          </p:val>
+                                        </p:tav>
+                                        <p:tav tm="60000">
+                                          <p:val>
+                                            <p:strVal val="#ppt_w*1.14"/>
+                                          </p:val>
+                                        </p:tav>
+                                        <p:tav tm="82000">
+                                          <p:val>
+                                            <p:strVal val="#ppt_w*0.97"/>
+                                          </p:val>
+                                        </p:tav>
+                                        <p:tav tm="100000">
+                                          <p:val>
+                                            <p:strVal val="#ppt_w"/>
+                                          </p:val>
+                                        </p:tav>
+                                      </p:tavLst>
+                                    </p:anim>
+                                    <p:anim calcmode="lin" valueType="num">
+                                      <p:cBhvr>
+                                        <p:cTn id="41" dur="650" fill="hold"/>
+                                        <p:tgtEl>
+                                          <p:spTgt spid="8"/>
+                                        </p:tgtEl>
+                                        <p:attrNameLst>
+                                          <p:attrName>ppt_h</p:attrName>
+                                        </p:attrNameLst>
+                                      </p:cBhvr>
+                                      <p:tavLst>
+                                        <p:tav tm="0">
+                                          <p:val>
+                                            <p:strVal val="0"/>
+                                          </p:val>
+                                        </p:tav>
+                                        <p:tav tm="60000">
+                                          <p:val>
+                                            <p:strVal val="#ppt_h*1.14"/>
+                                          </p:val>
+                                        </p:tav>
+                                        <p:tav tm="82000">
+                                          <p:val>
+                                            <p:strVal val="#ppt_h*0.97"/>
+                                          </p:val>
+                                        </p:tav>
+                                        <p:tav tm="100000">
+                                          <p:val>
+                                            <p:strVal val="#ppt_h"/>
+                                          </p:val>
+                                        </p:tav>
+                                      </p:tavLst>
+                                    </p:anim>
+                                    <p:animEffect transition="in" filter="fade">
+                                      <p:cBhvr>
+                                        <p:cTn id="42" dur="260"/>
+                                        <p:tgtEl>
+                                          <p:spTgt spid="8"/>
+                                        </p:tgtEl>
                                       </p:cBhvr>
                                     </p:animEffect>
+                                  </p:childTnLst>
+                                </p:cTn>
+                              </p:par>
+                              <p:par>
+                                <p:cTn id="43" presetID="6" presetClass="emph" presetSubtype="0" fill="hold" grpId="0" nodeType="withEffect">
+                                  <p:stCondLst>
+                                    <p:cond delay="750"/>
+                                  </p:stCondLst>
+                                  <p:childTnLst>
+                                    <p:animScale>
+                                      <p:cBhvr>
+                                        <p:cTn id="45" dur="180" autoRev="1" fill="hold"/>
+                                        <p:tgtEl>
+                                          <p:spTgt spid="8"/>
+                                        </p:tgtEl>
+                                      </p:cBhvr>
+                                      <p:by x="112000" y="112000"/>
+                                    </p:animScale>
                                   </p:childTnLst>
                                 </p:cTn>
                               </p:par>
@@ -5487,12 +5976,11 @@
       </p:par>
     </p:tnLst>
     <p:bldLst>
-      <p:bldP spid="1" grpId="0" animBg="1"/>
+      <p:bldP spid="3" grpId="0" animBg="1"/>
       <p:bldP spid="4" grpId="0" animBg="1"/>
       <p:bldP spid="5" grpId="0" animBg="1"/>
       <p:bldP spid="6" grpId="0" animBg="1"/>
       <p:bldP spid="7" grpId="0" animBg="1"/>
-      <p:bldP spid="8" grpId="0" animBg="1"/>
     </p:bldLst>
   </p:timing>
 </p:sld>
@@ -5681,7 +6169,7 @@
               <p:cTn id="2" dur="indefinite" nodeType="mainSeq">
                 <p:childTnLst>
                   <p:par>
-                    <p:cTn id="18" fill="hold">
+                    <p:cTn id="8" fill="hold">
                       <p:stCondLst>
                         <p:cond delay="indefinite"/>
                         <p:cond evt="onBegin" delay="0">
@@ -5690,7 +6178,7 @@
                       </p:stCondLst>
                       <p:childTnLst>
                         <p:par>
-                          <p:cTn id="19" fill="hold">
+                          <p:cTn id="9" fill="hold">
                             <p:stCondLst>
                               <p:cond delay="0"/>
                             </p:stCondLst>
@@ -5721,7 +6209,7 @@
                                     </p:set>
                                     <p:anim calcmode="lin" valueType="num">
                                       <p:cBhvr>
-                                        <p:cTn id="5" dur="450" fill="hold"/>
+                                        <p:cTn id="5" dur="550" fill="hold"/>
                                         <p:tgtEl>
                                           <p:spTgt spid="3"/>
                                         </p:tgtEl>
@@ -5735,9 +6223,14 @@
                                             <p:strVal val="0"/>
                                           </p:val>
                                         </p:tav>
-                                        <p:tav tm="70000">
-                                          <p:val>
-                                            <p:strVal val="#ppt_w*1.07"/>
+                                        <p:tav tm="60000">
+                                          <p:val>
+                                            <p:strVal val="#ppt_w*1.14"/>
+                                          </p:val>
+                                        </p:tav>
+                                        <p:tav tm="82000">
+                                          <p:val>
+                                            <p:strVal val="#ppt_w*0.97"/>
                                           </p:val>
                                         </p:tav>
                                         <p:tav tm="100000">
@@ -5749,7 +6242,7 @@
                                     </p:anim>
                                     <p:anim calcmode="lin" valueType="num">
                                       <p:cBhvr>
-                                        <p:cTn id="6" dur="450" fill="hold"/>
+                                        <p:cTn id="6" dur="550" fill="hold"/>
                                         <p:tgtEl>
                                           <p:spTgt spid="3"/>
                                         </p:tgtEl>
@@ -5763,9 +6256,14 @@
                                             <p:strVal val="0"/>
                                           </p:val>
                                         </p:tav>
-                                        <p:tav tm="70000">
-                                          <p:val>
-                                            <p:strVal val="#ppt_h*1.07"/>
+                                        <p:tav tm="60000">
+                                          <p:val>
+                                            <p:strVal val="#ppt_h*1.14"/>
+                                          </p:val>
+                                        </p:tav>
+                                        <p:tav tm="82000">
+                                          <p:val>
+                                            <p:strVal val="#ppt_h*0.97"/>
                                           </p:val>
                                         </p:tav>
                                         <p:tav tm="100000">
@@ -5777,9 +6275,247 @@
                                     </p:anim>
                                     <p:animEffect transition="in" filter="fade">
                                       <p:cBhvr>
-                                        <p:cTn id="7" dur="225"/>
+                                        <p:cTn id="7" dur="220"/>
                                         <p:tgtEl>
                                           <p:spTgt spid="3"/>
+                                        </p:tgtEl>
+                                      </p:cBhvr>
+                                    </p:animEffect>
+                                  </p:childTnLst>
+                                </p:cTn>
+                              </p:par>
+                            </p:childTnLst>
+                          </p:cTn>
+                        </p:par>
+                      </p:childTnLst>
+                    </p:cTn>
+                  </p:par>
+                  <p:par>
+                    <p:cTn id="15" fill="hold">
+                      <p:stCondLst>
+                        <p:cond delay="indefinite"/>
+                      </p:stCondLst>
+                      <p:childTnLst>
+                        <p:par>
+                          <p:cTn id="16" fill="hold">
+                            <p:stCondLst>
+                              <p:cond delay="0"/>
+                            </p:stCondLst>
+                            <p:childTnLst>
+                              <p:par>
+                                <p:cTn id="10" presetID="53" presetClass="entr" presetSubtype="16" fill="hold" grpId="0" nodeType="clickEffect">
+                                  <p:stCondLst>
+                                    <p:cond delay="0"/>
+                                  </p:stCondLst>
+                                  <p:childTnLst>
+                                    <p:set>
+                                      <p:cBhvr>
+                                        <p:cTn id="11" dur="1" fill="hold">
+                                          <p:stCondLst>
+                                            <p:cond delay="0"/>
+                                          </p:stCondLst>
+                                        </p:cTn>
+                                        <p:tgtEl>
+                                          <p:spTgt spid="4"/>
+                                        </p:tgtEl>
+                                        <p:attrNameLst>
+                                          <p:attrName>style.visibility</p:attrName>
+                                        </p:attrNameLst>
+                                      </p:cBhvr>
+                                      <p:to>
+                                        <p:strVal val="visible"/>
+                                      </p:to>
+                                    </p:set>
+                                    <p:anim calcmode="lin" valueType="num">
+                                      <p:cBhvr>
+                                        <p:cTn id="12" dur="650" fill="hold"/>
+                                        <p:tgtEl>
+                                          <p:spTgt spid="4"/>
+                                        </p:tgtEl>
+                                        <p:attrNameLst>
+                                          <p:attrName>ppt_w</p:attrName>
+                                        </p:attrNameLst>
+                                      </p:cBhvr>
+                                      <p:tavLst>
+                                        <p:tav tm="0">
+                                          <p:val>
+                                            <p:strVal val="0"/>
+                                          </p:val>
+                                        </p:tav>
+                                        <p:tav tm="60000">
+                                          <p:val>
+                                            <p:strVal val="#ppt_w*1.14"/>
+                                          </p:val>
+                                        </p:tav>
+                                        <p:tav tm="82000">
+                                          <p:val>
+                                            <p:strVal val="#ppt_w*0.97"/>
+                                          </p:val>
+                                        </p:tav>
+                                        <p:tav tm="100000">
+                                          <p:val>
+                                            <p:strVal val="#ppt_w"/>
+                                          </p:val>
+                                        </p:tav>
+                                      </p:tavLst>
+                                    </p:anim>
+                                    <p:anim calcmode="lin" valueType="num">
+                                      <p:cBhvr>
+                                        <p:cTn id="13" dur="650" fill="hold"/>
+                                        <p:tgtEl>
+                                          <p:spTgt spid="4"/>
+                                        </p:tgtEl>
+                                        <p:attrNameLst>
+                                          <p:attrName>ppt_h</p:attrName>
+                                        </p:attrNameLst>
+                                      </p:cBhvr>
+                                      <p:tavLst>
+                                        <p:tav tm="0">
+                                          <p:val>
+                                            <p:strVal val="0"/>
+                                          </p:val>
+                                        </p:tav>
+                                        <p:tav tm="60000">
+                                          <p:val>
+                                            <p:strVal val="#ppt_h*1.14"/>
+                                          </p:val>
+                                        </p:tav>
+                                        <p:tav tm="82000">
+                                          <p:val>
+                                            <p:strVal val="#ppt_h*0.97"/>
+                                          </p:val>
+                                        </p:tav>
+                                        <p:tav tm="100000">
+                                          <p:val>
+                                            <p:strVal val="#ppt_h"/>
+                                          </p:val>
+                                        </p:tav>
+                                      </p:tavLst>
+                                    </p:anim>
+                                    <p:animEffect transition="in" filter="fade">
+                                      <p:cBhvr>
+                                        <p:cTn id="14" dur="260"/>
+                                        <p:tgtEl>
+                                          <p:spTgt spid="4"/>
+                                        </p:tgtEl>
+                                      </p:cBhvr>
+                                    </p:animEffect>
+                                  </p:childTnLst>
+                                </p:cTn>
+                              </p:par>
+                            </p:childTnLst>
+                          </p:cTn>
+                        </p:par>
+                      </p:childTnLst>
+                    </p:cTn>
+                  </p:par>
+                  <p:par>
+                    <p:cTn id="25" fill="hold">
+                      <p:stCondLst>
+                        <p:cond delay="indefinite"/>
+                      </p:stCondLst>
+                      <p:childTnLst>
+                        <p:par>
+                          <p:cTn id="26" fill="hold">
+                            <p:stCondLst>
+                              <p:cond delay="0"/>
+                            </p:stCondLst>
+                            <p:childTnLst>
+                              <p:par>
+                                <p:cTn id="17" presetID="53" presetClass="entr" presetSubtype="16" fill="hold" grpId="0" nodeType="clickEffect">
+                                  <p:stCondLst>
+                                    <p:cond delay="0"/>
+                                  </p:stCondLst>
+                                  <p:childTnLst>
+                                    <p:set>
+                                      <p:cBhvr>
+                                        <p:cTn id="18" dur="1" fill="hold">
+                                          <p:stCondLst>
+                                            <p:cond delay="0"/>
+                                          </p:stCondLst>
+                                        </p:cTn>
+                                        <p:tgtEl>
+                                          <p:spTgt spid="5"/>
+                                        </p:tgtEl>
+                                        <p:attrNameLst>
+                                          <p:attrName>style.visibility</p:attrName>
+                                        </p:attrNameLst>
+                                      </p:cBhvr>
+                                      <p:to>
+                                        <p:strVal val="visible"/>
+                                      </p:to>
+                                    </p:set>
+                                    <p:anim calcmode="lin" valueType="num">
+                                      <p:cBhvr>
+                                        <p:cTn id="19" dur="550" fill="hold"/>
+                                        <p:tgtEl>
+                                          <p:spTgt spid="5"/>
+                                        </p:tgtEl>
+                                        <p:attrNameLst>
+                                          <p:attrName>ppt_w</p:attrName>
+                                        </p:attrNameLst>
+                                      </p:cBhvr>
+                                      <p:tavLst>
+                                        <p:tav tm="0">
+                                          <p:val>
+                                            <p:strVal val="0"/>
+                                          </p:val>
+                                        </p:tav>
+                                        <p:tav tm="60000">
+                                          <p:val>
+                                            <p:strVal val="#ppt_w*1.14"/>
+                                          </p:val>
+                                        </p:tav>
+                                        <p:tav tm="82000">
+                                          <p:val>
+                                            <p:strVal val="#ppt_w*0.97"/>
+                                          </p:val>
+                                        </p:tav>
+                                        <p:tav tm="100000">
+                                          <p:val>
+                                            <p:strVal val="#ppt_w"/>
+                                          </p:val>
+                                        </p:tav>
+                                      </p:tavLst>
+                                    </p:anim>
+                                    <p:anim calcmode="lin" valueType="num">
+                                      <p:cBhvr>
+                                        <p:cTn id="20" dur="550" fill="hold"/>
+                                        <p:tgtEl>
+                                          <p:spTgt spid="5"/>
+                                        </p:tgtEl>
+                                        <p:attrNameLst>
+                                          <p:attrName>ppt_h</p:attrName>
+                                        </p:attrNameLst>
+                                      </p:cBhvr>
+                                      <p:tavLst>
+                                        <p:tav tm="0">
+                                          <p:val>
+                                            <p:strVal val="0"/>
+                                          </p:val>
+                                        </p:tav>
+                                        <p:tav tm="60000">
+                                          <p:val>
+                                            <p:strVal val="#ppt_h*1.14"/>
+                                          </p:val>
+                                        </p:tav>
+                                        <p:tav tm="82000">
+                                          <p:val>
+                                            <p:strVal val="#ppt_h*0.97"/>
+                                          </p:val>
+                                        </p:tav>
+                                        <p:tav tm="100000">
+                                          <p:val>
+                                            <p:strVal val="#ppt_h"/>
+                                          </p:val>
+                                        </p:tav>
+                                      </p:tavLst>
+                                    </p:anim>
+                                    <p:animEffect transition="in" filter="fade">
+                                      <p:cBhvr>
+                                        <p:cTn id="21" dur="220"/>
+                                        <p:tgtEl>
+                                          <p:spTgt spid="5"/>
                                         </p:tgtEl>
                                       </p:cBhvr>
                                     </p:animEffect>
@@ -5787,179 +6523,20 @@
                                 </p:cTn>
                               </p:par>
                               <p:par>
-                                <p:cTn id="8" presetID="53" presetClass="entr" presetSubtype="16" fill="hold" grpId="0" nodeType="withEffect">
+                                <p:cTn id="22" presetID="6" presetClass="emph" presetSubtype="0" fill="hold" grpId="0" nodeType="withEffect">
                                   <p:stCondLst>
-                                    <p:cond delay="200"/>
+                                    <p:cond delay="450"/>
                                   </p:stCondLst>
                                   <p:childTnLst>
-                                    <p:set>
-                                      <p:cBhvr>
-                                        <p:cTn id="9" dur="1" fill="hold">
-                                          <p:stCondLst>
-                                            <p:cond delay="0"/>
-                                          </p:stCondLst>
-                                        </p:cTn>
+                                    <p:animScale>
+                                      <p:cBhvr>
+                                        <p:cTn id="24" dur="180" autoRev="1" fill="hold"/>
                                         <p:tgtEl>
                                           <p:spTgt spid="4"/>
                                         </p:tgtEl>
-                                        <p:attrNameLst>
-                                          <p:attrName>style.visibility</p:attrName>
-                                        </p:attrNameLst>
-                                      </p:cBhvr>
-                                      <p:to>
-                                        <p:strVal val="visible"/>
-                                      </p:to>
-                                    </p:set>
-                                    <p:anim calcmode="lin" valueType="num">
-                                      <p:cBhvr>
-                                        <p:cTn id="10" dur="600" fill="hold"/>
-                                        <p:tgtEl>
-                                          <p:spTgt spid="4"/>
-                                        </p:tgtEl>
-                                        <p:attrNameLst>
-                                          <p:attrName>ppt_w</p:attrName>
-                                        </p:attrNameLst>
-                                      </p:cBhvr>
-                                      <p:tavLst>
-                                        <p:tav tm="0">
-                                          <p:val>
-                                            <p:strVal val="0"/>
-                                          </p:val>
-                                        </p:tav>
-                                        <p:tav tm="70000">
-                                          <p:val>
-                                            <p:strVal val="#ppt_w*1.07"/>
-                                          </p:val>
-                                        </p:tav>
-                                        <p:tav tm="100000">
-                                          <p:val>
-                                            <p:strVal val="#ppt_w"/>
-                                          </p:val>
-                                        </p:tav>
-                                      </p:tavLst>
-                                    </p:anim>
-                                    <p:anim calcmode="lin" valueType="num">
-                                      <p:cBhvr>
-                                        <p:cTn id="11" dur="600" fill="hold"/>
-                                        <p:tgtEl>
-                                          <p:spTgt spid="4"/>
-                                        </p:tgtEl>
-                                        <p:attrNameLst>
-                                          <p:attrName>ppt_h</p:attrName>
-                                        </p:attrNameLst>
-                                      </p:cBhvr>
-                                      <p:tavLst>
-                                        <p:tav tm="0">
-                                          <p:val>
-                                            <p:strVal val="0"/>
-                                          </p:val>
-                                        </p:tav>
-                                        <p:tav tm="70000">
-                                          <p:val>
-                                            <p:strVal val="#ppt_h*1.07"/>
-                                          </p:val>
-                                        </p:tav>
-                                        <p:tav tm="100000">
-                                          <p:val>
-                                            <p:strVal val="#ppt_h"/>
-                                          </p:val>
-                                        </p:tav>
-                                      </p:tavLst>
-                                    </p:anim>
-                                    <p:animEffect transition="in" filter="fade">
-                                      <p:cBhvr>
-                                        <p:cTn id="12" dur="300"/>
-                                        <p:tgtEl>
-                                          <p:spTgt spid="4"/>
-                                        </p:tgtEl>
-                                      </p:cBhvr>
-                                    </p:animEffect>
-                                  </p:childTnLst>
-                                </p:cTn>
-                              </p:par>
-                              <p:par>
-                                <p:cTn id="13" presetID="42" presetClass="entr" presetSubtype="0" fill="hold" grpId="0" nodeType="withEffect">
-                                  <p:stCondLst>
-                                    <p:cond delay="650"/>
-                                  </p:stCondLst>
-                                  <p:childTnLst>
-                                    <p:set>
-                                      <p:cBhvr>
-                                        <p:cTn id="14" dur="1" fill="hold">
-                                          <p:stCondLst>
-                                            <p:cond delay="0"/>
-                                          </p:stCondLst>
-                                        </p:cTn>
-                                        <p:tgtEl>
-                                          <p:spTgt spid="5"/>
-                                        </p:tgtEl>
-                                        <p:attrNameLst>
-                                          <p:attrName>style.visibility</p:attrName>
-                                        </p:attrNameLst>
-                                      </p:cBhvr>
-                                      <p:to>
-                                        <p:strVal val="visible"/>
-                                      </p:to>
-                                    </p:set>
-                                    <p:anim calcmode="lin" valueType="num">
-                                      <p:cBhvr>
-                                        <p:cTn id="15" dur="500" fill="hold"/>
-                                        <p:tgtEl>
-                                          <p:spTgt spid="5"/>
-                                        </p:tgtEl>
-                                        <p:attrNameLst>
-                                          <p:attrName>ppt_x</p:attrName>
-                                        </p:attrNameLst>
-                                      </p:cBhvr>
-                                      <p:tavLst>
-                                        <p:tav tm="0">
-                                          <p:val>
-                                            <p:strVal val="#ppt_x"/>
-                                          </p:val>
-                                        </p:tav>
-                                        <p:tav tm="100000">
-                                          <p:val>
-                                            <p:strVal val="#ppt_x"/>
-                                          </p:val>
-                                        </p:tav>
-                                      </p:tavLst>
-                                    </p:anim>
-                                    <p:anim calcmode="lin" valueType="num">
-                                      <p:cBhvr>
-                                        <p:cTn id="16" dur="500" fill="hold"/>
-                                        <p:tgtEl>
-                                          <p:spTgt spid="5"/>
-                                        </p:tgtEl>
-                                        <p:attrNameLst>
-                                          <p:attrName>ppt_y</p:attrName>
-                                        </p:attrNameLst>
-                                      </p:cBhvr>
-                                      <p:tavLst>
-                                        <p:tav tm="0">
-                                          <p:val>
-                                            <p:strVal val="#ppt_y+0.08"/>
-                                          </p:val>
-                                        </p:tav>
-                                        <p:tav tm="80000">
-                                          <p:val>
-                                            <p:strVal val="#ppt_y-0.006"/>
-                                          </p:val>
-                                        </p:tav>
-                                        <p:tav tm="100000">
-                                          <p:val>
-                                            <p:strVal val="#ppt_y"/>
-                                          </p:val>
-                                        </p:tav>
-                                      </p:tavLst>
-                                    </p:anim>
-                                    <p:animEffect transition="in" filter="fade">
-                                      <p:cBhvr>
-                                        <p:cTn id="17" dur="500"/>
-                                        <p:tgtEl>
-                                          <p:spTgt spid="5"/>
-                                        </p:tgtEl>
-                                      </p:cBhvr>
-                                    </p:animEffect>
+                                      </p:cBhvr>
+                                      <p:by x="112000" y="112000"/>
+                                    </p:animScale>
                                   </p:childTnLst>
                                 </p:cTn>
                               </p:par>
@@ -5992,7 +6569,6 @@
     </p:tnLst>
     <p:bldLst>
       <p:bldP spid="3" grpId="0" animBg="1"/>
-      <p:bldP spid="4" grpId="0" animBg="1"/>
       <p:bldP spid="5" grpId="0" animBg="1"/>
     </p:bldLst>
   </p:timing>
@@ -6449,7 +7025,7 @@
                             </p:stCondLst>
                             <p:childTnLst>
                               <p:par>
-                                <p:cTn id="3" presetID="42" presetClass="entr" presetSubtype="0" fill="hold" grpId="0" nodeType="afterEffect">
+                                <p:cTn id="3" presetID="53" presetClass="entr" presetSubtype="16" fill="hold" grpId="0" nodeType="afterEffect">
                                   <p:stCondLst>
                                     <p:cond delay="0"/>
                                   </p:stCondLst>
@@ -6462,7 +7038,7 @@
                                           </p:stCondLst>
                                         </p:cTn>
                                         <p:tgtEl>
-                                          <p:spTgt spid="1"/>
+                                          <p:spTgt spid="3"/>
                                         </p:tgtEl>
                                         <p:attrNameLst>
                                           <p:attrName>style.visibility</p:attrName>
@@ -6474,60 +7050,75 @@
                                     </p:set>
                                     <p:anim calcmode="lin" valueType="num">
                                       <p:cBhvr>
-                                        <p:cTn id="5" dur="500" fill="hold"/>
-                                        <p:tgtEl>
-                                          <p:spTgt spid="1"/>
-                                        </p:tgtEl>
-                                        <p:attrNameLst>
-                                          <p:attrName>ppt_x</p:attrName>
+                                        <p:cTn id="5" dur="550" fill="hold"/>
+                                        <p:tgtEl>
+                                          <p:spTgt spid="3"/>
+                                        </p:tgtEl>
+                                        <p:attrNameLst>
+                                          <p:attrName>ppt_w</p:attrName>
                                         </p:attrNameLst>
                                       </p:cBhvr>
                                       <p:tavLst>
                                         <p:tav tm="0">
                                           <p:val>
-                                            <p:strVal val="#ppt_x"/>
+                                            <p:strVal val="0"/>
+                                          </p:val>
+                                        </p:tav>
+                                        <p:tav tm="60000">
+                                          <p:val>
+                                            <p:strVal val="#ppt_w*1.14"/>
+                                          </p:val>
+                                        </p:tav>
+                                        <p:tav tm="82000">
+                                          <p:val>
+                                            <p:strVal val="#ppt_w*0.97"/>
                                           </p:val>
                                         </p:tav>
                                         <p:tav tm="100000">
                                           <p:val>
-                                            <p:strVal val="#ppt_x"/>
+                                            <p:strVal val="#ppt_w"/>
                                           </p:val>
                                         </p:tav>
                                       </p:tavLst>
                                     </p:anim>
                                     <p:anim calcmode="lin" valueType="num">
                                       <p:cBhvr>
-                                        <p:cTn id="6" dur="500" fill="hold"/>
-                                        <p:tgtEl>
-                                          <p:spTgt spid="1"/>
-                                        </p:tgtEl>
-                                        <p:attrNameLst>
-                                          <p:attrName>ppt_y</p:attrName>
+                                        <p:cTn id="6" dur="550" fill="hold"/>
+                                        <p:tgtEl>
+                                          <p:spTgt spid="3"/>
+                                        </p:tgtEl>
+                                        <p:attrNameLst>
+                                          <p:attrName>ppt_h</p:attrName>
                                         </p:attrNameLst>
                                       </p:cBhvr>
                                       <p:tavLst>
                                         <p:tav tm="0">
                                           <p:val>
-                                            <p:strVal val="#ppt_y+0.08"/>
-                                          </p:val>
-                                        </p:tav>
-                                        <p:tav tm="80000">
-                                          <p:val>
-                                            <p:strVal val="#ppt_y-0.006"/>
+                                            <p:strVal val="0"/>
+                                          </p:val>
+                                        </p:tav>
+                                        <p:tav tm="60000">
+                                          <p:val>
+                                            <p:strVal val="#ppt_h*1.14"/>
+                                          </p:val>
+                                        </p:tav>
+                                        <p:tav tm="82000">
+                                          <p:val>
+                                            <p:strVal val="#ppt_h*0.97"/>
                                           </p:val>
                                         </p:tav>
                                         <p:tav tm="100000">
                                           <p:val>
-                                            <p:strVal val="#ppt_y"/>
+                                            <p:strVal val="#ppt_h"/>
                                           </p:val>
                                         </p:tav>
                                       </p:tavLst>
                                     </p:anim>
                                     <p:animEffect transition="in" filter="fade">
                                       <p:cBhvr>
-                                        <p:cTn id="7" dur="500"/>
-                                        <p:tgtEl>
-                                          <p:spTgt spid="1"/>
+                                        <p:cTn id="7" dur="220"/>
+                                        <p:tgtEl>
+                                          <p:spTgt spid="3"/>
                                         </p:tgtEl>
                                       </p:cBhvr>
                                     </p:animEffect>
@@ -6578,7 +7169,7 @@
                                     </p:set>
                                     <p:anim calcmode="lin" valueType="num">
                                       <p:cBhvr>
-                                        <p:cTn id="12" dur="450" fill="hold"/>
+                                        <p:cTn id="12" dur="550" fill="hold"/>
                                         <p:tgtEl>
                                           <p:spTgt spid="4"/>
                                         </p:tgtEl>
@@ -6592,9 +7183,14 @@
                                             <p:strVal val="0"/>
                                           </p:val>
                                         </p:tav>
-                                        <p:tav tm="70000">
-                                          <p:val>
-                                            <p:strVal val="#ppt_w*1.07"/>
+                                        <p:tav tm="60000">
+                                          <p:val>
+                                            <p:strVal val="#ppt_w*1.14"/>
+                                          </p:val>
+                                        </p:tav>
+                                        <p:tav tm="82000">
+                                          <p:val>
+                                            <p:strVal val="#ppt_w*0.97"/>
                                           </p:val>
                                         </p:tav>
                                         <p:tav tm="100000">
@@ -6606,7 +7202,7 @@
                                     </p:anim>
                                     <p:anim calcmode="lin" valueType="num">
                                       <p:cBhvr>
-                                        <p:cTn id="13" dur="450" fill="hold"/>
+                                        <p:cTn id="13" dur="550" fill="hold"/>
                                         <p:tgtEl>
                                           <p:spTgt spid="4"/>
                                         </p:tgtEl>
@@ -6620,9 +7216,14 @@
                                             <p:strVal val="0"/>
                                           </p:val>
                                         </p:tav>
-                                        <p:tav tm="70000">
-                                          <p:val>
-                                            <p:strVal val="#ppt_h*1.07"/>
+                                        <p:tav tm="60000">
+                                          <p:val>
+                                            <p:strVal val="#ppt_h*1.14"/>
+                                          </p:val>
+                                        </p:tav>
+                                        <p:tav tm="82000">
+                                          <p:val>
+                                            <p:strVal val="#ppt_h*0.97"/>
                                           </p:val>
                                         </p:tav>
                                         <p:tav tm="100000">
@@ -6634,7 +7235,7 @@
                                     </p:anim>
                                     <p:animEffect transition="in" filter="fade">
                                       <p:cBhvr>
-                                        <p:cTn id="14" dur="225"/>
+                                        <p:cTn id="14" dur="220"/>
                                         <p:tgtEl>
                                           <p:spTgt spid="4"/>
                                         </p:tgtEl>
@@ -6687,7 +7288,7 @@
                                     </p:set>
                                     <p:anim calcmode="lin" valueType="num">
                                       <p:cBhvr>
-                                        <p:cTn id="19" dur="450" fill="hold"/>
+                                        <p:cTn id="19" dur="550" fill="hold"/>
                                         <p:tgtEl>
                                           <p:spTgt spid="5"/>
                                         </p:tgtEl>
@@ -6701,9 +7302,14 @@
                                             <p:strVal val="0"/>
                                           </p:val>
                                         </p:tav>
-                                        <p:tav tm="70000">
-                                          <p:val>
-                                            <p:strVal val="#ppt_w*1.07"/>
+                                        <p:tav tm="60000">
+                                          <p:val>
+                                            <p:strVal val="#ppt_w*1.14"/>
+                                          </p:val>
+                                        </p:tav>
+                                        <p:tav tm="82000">
+                                          <p:val>
+                                            <p:strVal val="#ppt_w*0.97"/>
                                           </p:val>
                                         </p:tav>
                                         <p:tav tm="100000">
@@ -6715,7 +7321,7 @@
                                     </p:anim>
                                     <p:anim calcmode="lin" valueType="num">
                                       <p:cBhvr>
-                                        <p:cTn id="20" dur="450" fill="hold"/>
+                                        <p:cTn id="20" dur="550" fill="hold"/>
                                         <p:tgtEl>
                                           <p:spTgt spid="5"/>
                                         </p:tgtEl>
@@ -6729,9 +7335,14 @@
                                             <p:strVal val="0"/>
                                           </p:val>
                                         </p:tav>
-                                        <p:tav tm="70000">
-                                          <p:val>
-                                            <p:strVal val="#ppt_h*1.07"/>
+                                        <p:tav tm="60000">
+                                          <p:val>
+                                            <p:strVal val="#ppt_h*1.14"/>
+                                          </p:val>
+                                        </p:tav>
+                                        <p:tav tm="82000">
+                                          <p:val>
+                                            <p:strVal val="#ppt_h*0.97"/>
                                           </p:val>
                                         </p:tav>
                                         <p:tav tm="100000">
@@ -6743,7 +7354,7 @@
                                     </p:anim>
                                     <p:animEffect transition="in" filter="fade">
                                       <p:cBhvr>
-                                        <p:cTn id="21" dur="225"/>
+                                        <p:cTn id="21" dur="220"/>
                                         <p:tgtEl>
                                           <p:spTgt spid="5"/>
                                         </p:tgtEl>
@@ -6796,7 +7407,7 @@
                                     </p:set>
                                     <p:anim calcmode="lin" valueType="num">
                                       <p:cBhvr>
-                                        <p:cTn id="26" dur="450" fill="hold"/>
+                                        <p:cTn id="26" dur="550" fill="hold"/>
                                         <p:tgtEl>
                                           <p:spTgt spid="6"/>
                                         </p:tgtEl>
@@ -6810,9 +7421,14 @@
                                             <p:strVal val="0"/>
                                           </p:val>
                                         </p:tav>
-                                        <p:tav tm="70000">
-                                          <p:val>
-                                            <p:strVal val="#ppt_w*1.07"/>
+                                        <p:tav tm="60000">
+                                          <p:val>
+                                            <p:strVal val="#ppt_w*1.14"/>
+                                          </p:val>
+                                        </p:tav>
+                                        <p:tav tm="82000">
+                                          <p:val>
+                                            <p:strVal val="#ppt_w*0.97"/>
                                           </p:val>
                                         </p:tav>
                                         <p:tav tm="100000">
@@ -6824,7 +7440,7 @@
                                     </p:anim>
                                     <p:anim calcmode="lin" valueType="num">
                                       <p:cBhvr>
-                                        <p:cTn id="27" dur="450" fill="hold"/>
+                                        <p:cTn id="27" dur="550" fill="hold"/>
                                         <p:tgtEl>
                                           <p:spTgt spid="6"/>
                                         </p:tgtEl>
@@ -6838,9 +7454,14 @@
                                             <p:strVal val="0"/>
                                           </p:val>
                                         </p:tav>
-                                        <p:tav tm="70000">
-                                          <p:val>
-                                            <p:strVal val="#ppt_h*1.07"/>
+                                        <p:tav tm="60000">
+                                          <p:val>
+                                            <p:strVal val="#ppt_h*1.14"/>
+                                          </p:val>
+                                        </p:tav>
+                                        <p:tav tm="82000">
+                                          <p:val>
+                                            <p:strVal val="#ppt_h*0.97"/>
                                           </p:val>
                                         </p:tav>
                                         <p:tav tm="100000">
@@ -6852,7 +7473,7 @@
                                     </p:anim>
                                     <p:animEffect transition="in" filter="fade">
                                       <p:cBhvr>
-                                        <p:cTn id="28" dur="225"/>
+                                        <p:cTn id="28" dur="220"/>
                                         <p:tgtEl>
                                           <p:spTgt spid="6"/>
                                         </p:tgtEl>
@@ -6868,13 +7489,13 @@
                     </p:cTn>
                   </p:par>
                   <p:par>
-                    <p:cTn id="36" fill="hold">
+                    <p:cTn id="39" fill="hold">
                       <p:stCondLst>
                         <p:cond delay="indefinite"/>
                       </p:stCondLst>
                       <p:childTnLst>
                         <p:par>
-                          <p:cTn id="37" fill="hold">
+                          <p:cTn id="40" fill="hold">
                             <p:stCondLst>
                               <p:cond delay="0"/>
                             </p:stCondLst>
@@ -6905,7 +7526,7 @@
                                     </p:set>
                                     <p:anim calcmode="lin" valueType="num">
                                       <p:cBhvr>
-                                        <p:cTn id="33" dur="450" fill="hold"/>
+                                        <p:cTn id="33" dur="550" fill="hold"/>
                                         <p:tgtEl>
                                           <p:spTgt spid="7"/>
                                         </p:tgtEl>
@@ -6919,9 +7540,14 @@
                                             <p:strVal val="0"/>
                                           </p:val>
                                         </p:tav>
-                                        <p:tav tm="70000">
-                                          <p:val>
-                                            <p:strVal val="#ppt_w*1.07"/>
+                                        <p:tav tm="60000">
+                                          <p:val>
+                                            <p:strVal val="#ppt_w*1.14"/>
+                                          </p:val>
+                                        </p:tav>
+                                        <p:tav tm="82000">
+                                          <p:val>
+                                            <p:strVal val="#ppt_w*0.97"/>
                                           </p:val>
                                         </p:tav>
                                         <p:tav tm="100000">
@@ -6933,7 +7559,7 @@
                                     </p:anim>
                                     <p:anim calcmode="lin" valueType="num">
                                       <p:cBhvr>
-                                        <p:cTn id="34" dur="450" fill="hold"/>
+                                        <p:cTn id="34" dur="550" fill="hold"/>
                                         <p:tgtEl>
                                           <p:spTgt spid="7"/>
                                         </p:tgtEl>
@@ -6947,9 +7573,14 @@
                                             <p:strVal val="0"/>
                                           </p:val>
                                         </p:tav>
-                                        <p:tav tm="70000">
-                                          <p:val>
-                                            <p:strVal val="#ppt_h*1.07"/>
+                                        <p:tav tm="60000">
+                                          <p:val>
+                                            <p:strVal val="#ppt_h*1.14"/>
+                                          </p:val>
+                                        </p:tav>
+                                        <p:tav tm="82000">
+                                          <p:val>
+                                            <p:strVal val="#ppt_h*0.97"/>
                                           </p:val>
                                         </p:tav>
                                         <p:tav tm="100000">
@@ -6961,12 +7592,30 @@
                                     </p:anim>
                                     <p:animEffect transition="in" filter="fade">
                                       <p:cBhvr>
-                                        <p:cTn id="35" dur="225"/>
+                                        <p:cTn id="35" dur="220"/>
                                         <p:tgtEl>
                                           <p:spTgt spid="7"/>
                                         </p:tgtEl>
                                       </p:cBhvr>
                                     </p:animEffect>
+                                  </p:childTnLst>
+                                </p:cTn>
+                              </p:par>
+                              <p:par>
+                                <p:cTn id="36" presetID="6" presetClass="emph" presetSubtype="0" fill="hold" grpId="0" nodeType="withEffect">
+                                  <p:stCondLst>
+                                    <p:cond delay="450"/>
+                                  </p:stCondLst>
+                                  <p:childTnLst>
+                                    <p:animScale>
+                                      <p:cBhvr>
+                                        <p:cTn id="38" dur="180" autoRev="1" fill="hold"/>
+                                        <p:tgtEl>
+                                          <p:spTgt spid="6"/>
+                                        </p:tgtEl>
+                                      </p:cBhvr>
+                                      <p:by x="112000" y="112000"/>
+                                    </p:animScale>
                                   </p:childTnLst>
                                 </p:cTn>
                               </p:par>
@@ -6998,10 +7647,9 @@
       </p:par>
     </p:tnLst>
     <p:bldLst>
-      <p:bldP spid="1" grpId="0" animBg="1"/>
+      <p:bldP spid="3" grpId="0" animBg="1"/>
       <p:bldP spid="4" grpId="0" animBg="1"/>
       <p:bldP spid="5" grpId="0" animBg="1"/>
-      <p:bldP spid="6" grpId="0" animBg="1"/>
       <p:bldP spid="7" grpId="0" animBg="1"/>
     </p:bldLst>
   </p:timing>
@@ -7276,7 +7924,7 @@
               <p:cTn id="2" dur="indefinite" nodeType="mainSeq">
                 <p:childTnLst>
                   <p:par>
-                    <p:cTn id="11" fill="hold">
+                    <p:cTn id="8" fill="hold">
                       <p:stCondLst>
                         <p:cond delay="indefinite"/>
                         <p:cond evt="onBegin" delay="0">
@@ -7285,13 +7933,13 @@
                       </p:stCondLst>
                       <p:childTnLst>
                         <p:par>
-                          <p:cTn id="12" fill="hold">
+                          <p:cTn id="9" fill="hold">
                             <p:stCondLst>
                               <p:cond delay="0"/>
                             </p:stCondLst>
                             <p:childTnLst>
                               <p:par>
-                                <p:cTn id="3" presetID="42" presetClass="entr" presetSubtype="0" fill="hold" grpId="0" nodeType="afterEffect">
+                                <p:cTn id="3" presetID="53" presetClass="entr" presetSubtype="16" fill="hold" grpId="0" nodeType="afterEffect">
                                   <p:stCondLst>
                                     <p:cond delay="0"/>
                                   </p:stCondLst>
@@ -7304,7 +7952,7 @@
                                           </p:stCondLst>
                                         </p:cTn>
                                         <p:tgtEl>
-                                          <p:spTgt spid="1"/>
+                                          <p:spTgt spid="3"/>
                                         </p:tgtEl>
                                         <p:attrNameLst>
                                           <p:attrName>style.visibility</p:attrName>
@@ -7316,95 +7964,75 @@
                                     </p:set>
                                     <p:anim calcmode="lin" valueType="num">
                                       <p:cBhvr>
-                                        <p:cTn id="5" dur="500" fill="hold"/>
-                                        <p:tgtEl>
-                                          <p:spTgt spid="1"/>
-                                        </p:tgtEl>
-                                        <p:attrNameLst>
-                                          <p:attrName>ppt_x</p:attrName>
+                                        <p:cTn id="5" dur="550" fill="hold"/>
+                                        <p:tgtEl>
+                                          <p:spTgt spid="3"/>
+                                        </p:tgtEl>
+                                        <p:attrNameLst>
+                                          <p:attrName>ppt_w</p:attrName>
                                         </p:attrNameLst>
                                       </p:cBhvr>
                                       <p:tavLst>
                                         <p:tav tm="0">
                                           <p:val>
-                                            <p:strVal val="#ppt_x"/>
+                                            <p:strVal val="0"/>
+                                          </p:val>
+                                        </p:tav>
+                                        <p:tav tm="60000">
+                                          <p:val>
+                                            <p:strVal val="#ppt_w*1.14"/>
+                                          </p:val>
+                                        </p:tav>
+                                        <p:tav tm="82000">
+                                          <p:val>
+                                            <p:strVal val="#ppt_w*0.97"/>
                                           </p:val>
                                         </p:tav>
                                         <p:tav tm="100000">
                                           <p:val>
-                                            <p:strVal val="#ppt_x"/>
+                                            <p:strVal val="#ppt_w"/>
                                           </p:val>
                                         </p:tav>
                                       </p:tavLst>
                                     </p:anim>
                                     <p:anim calcmode="lin" valueType="num">
                                       <p:cBhvr>
-                                        <p:cTn id="6" dur="500" fill="hold"/>
-                                        <p:tgtEl>
-                                          <p:spTgt spid="1"/>
-                                        </p:tgtEl>
-                                        <p:attrNameLst>
-                                          <p:attrName>ppt_y</p:attrName>
+                                        <p:cTn id="6" dur="550" fill="hold"/>
+                                        <p:tgtEl>
+                                          <p:spTgt spid="3"/>
+                                        </p:tgtEl>
+                                        <p:attrNameLst>
+                                          <p:attrName>ppt_h</p:attrName>
                                         </p:attrNameLst>
                                       </p:cBhvr>
                                       <p:tavLst>
                                         <p:tav tm="0">
                                           <p:val>
-                                            <p:strVal val="#ppt_y+0.08"/>
-                                          </p:val>
-                                        </p:tav>
-                                        <p:tav tm="80000">
-                                          <p:val>
-                                            <p:strVal val="#ppt_y-0.006"/>
+                                            <p:strVal val="0"/>
+                                          </p:val>
+                                        </p:tav>
+                                        <p:tav tm="60000">
+                                          <p:val>
+                                            <p:strVal val="#ppt_h*1.14"/>
+                                          </p:val>
+                                        </p:tav>
+                                        <p:tav tm="82000">
+                                          <p:val>
+                                            <p:strVal val="#ppt_h*0.97"/>
                                           </p:val>
                                         </p:tav>
                                         <p:tav tm="100000">
                                           <p:val>
-                                            <p:strVal val="#ppt_y"/>
+                                            <p:strVal val="#ppt_h"/>
                                           </p:val>
                                         </p:tav>
                                       </p:tavLst>
                                     </p:anim>
                                     <p:animEffect transition="in" filter="fade">
                                       <p:cBhvr>
-                                        <p:cTn id="7" dur="500"/>
-                                        <p:tgtEl>
-                                          <p:spTgt spid="1"/>
-                                        </p:tgtEl>
-                                      </p:cBhvr>
-                                    </p:animEffect>
-                                  </p:childTnLst>
-                                </p:cTn>
-                              </p:par>
-                              <p:par>
-                                <p:cTn id="8" presetID="22" presetClass="entr" presetSubtype="8" fill="hold" grpId="0" nodeType="withEffect">
-                                  <p:stCondLst>
-                                    <p:cond delay="500"/>
-                                  </p:stCondLst>
-                                  <p:childTnLst>
-                                    <p:set>
-                                      <p:cBhvr>
-                                        <p:cTn id="9" dur="1" fill="hold">
-                                          <p:stCondLst>
-                                            <p:cond delay="0"/>
-                                          </p:stCondLst>
-                                        </p:cTn>
-                                        <p:tgtEl>
-                                          <p:spTgt spid="4"/>
-                                        </p:tgtEl>
-                                        <p:attrNameLst>
-                                          <p:attrName>style.visibility</p:attrName>
-                                        </p:attrNameLst>
-                                      </p:cBhvr>
-                                      <p:to>
-                                        <p:strVal val="visible"/>
-                                      </p:to>
-                                    </p:set>
-                                    <p:animEffect transition="in" filter="wipe(left)">
-                                      <p:cBhvr>
-                                        <p:cTn id="10" dur="500"/>
-                                        <p:tgtEl>
-                                          <p:spTgt spid="4"/>
+                                        <p:cTn id="7" dur="220"/>
+                                        <p:tgtEl>
+                                          <p:spTgt spid="3"/>
                                         </p:tgtEl>
                                       </p:cBhvr>
                                     </p:animEffect>
@@ -7418,26 +8046,79 @@
                     </p:cTn>
                   </p:par>
                   <p:par>
-                    <p:cTn id="35" fill="hold">
+                    <p:cTn id="13" fill="hold">
                       <p:stCondLst>
                         <p:cond delay="indefinite"/>
                       </p:stCondLst>
                       <p:childTnLst>
                         <p:par>
-                          <p:cTn id="36" fill="hold">
+                          <p:cTn id="14" fill="hold">
                             <p:stCondLst>
                               <p:cond delay="0"/>
                             </p:stCondLst>
                             <p:childTnLst>
                               <p:par>
-                                <p:cTn id="13" presetID="53" presetClass="entr" presetSubtype="16" fill="hold" grpId="0" nodeType="clickEffect">
+                                <p:cTn id="10" presetID="22" presetClass="entr" presetSubtype="8" fill="hold" grpId="0" nodeType="clickEffect">
                                   <p:stCondLst>
                                     <p:cond delay="0"/>
                                   </p:stCondLst>
                                   <p:childTnLst>
                                     <p:set>
                                       <p:cBhvr>
-                                        <p:cTn id="14" dur="1" fill="hold">
+                                        <p:cTn id="11" dur="1" fill="hold">
+                                          <p:stCondLst>
+                                            <p:cond delay="0"/>
+                                          </p:stCondLst>
+                                        </p:cTn>
+                                        <p:tgtEl>
+                                          <p:spTgt spid="4"/>
+                                        </p:tgtEl>
+                                        <p:attrNameLst>
+                                          <p:attrName>style.visibility</p:attrName>
+                                        </p:attrNameLst>
+                                      </p:cBhvr>
+                                      <p:to>
+                                        <p:strVal val="visible"/>
+                                      </p:to>
+                                    </p:set>
+                                    <p:animEffect transition="in" filter="wipe(left)">
+                                      <p:cBhvr>
+                                        <p:cTn id="12" dur="500"/>
+                                        <p:tgtEl>
+                                          <p:spTgt spid="4"/>
+                                        </p:tgtEl>
+                                      </p:cBhvr>
+                                    </p:animEffect>
+                                  </p:childTnLst>
+                                </p:cTn>
+                              </p:par>
+                            </p:childTnLst>
+                          </p:cTn>
+                        </p:par>
+                      </p:childTnLst>
+                    </p:cTn>
+                  </p:par>
+                  <p:par>
+                    <p:cTn id="20" fill="hold">
+                      <p:stCondLst>
+                        <p:cond delay="indefinite"/>
+                      </p:stCondLst>
+                      <p:childTnLst>
+                        <p:par>
+                          <p:cTn id="21" fill="hold">
+                            <p:stCondLst>
+                              <p:cond delay="0"/>
+                            </p:stCondLst>
+                            <p:childTnLst>
+                              <p:par>
+                                <p:cTn id="15" presetID="53" presetClass="entr" presetSubtype="16" fill="hold" grpId="0" nodeType="clickEffect">
+                                  <p:stCondLst>
+                                    <p:cond delay="0"/>
+                                  </p:stCondLst>
+                                  <p:childTnLst>
+                                    <p:set>
+                                      <p:cBhvr>
+                                        <p:cTn id="16" dur="1" fill="hold">
                                           <p:stCondLst>
                                             <p:cond delay="0"/>
                                           </p:stCondLst>
@@ -7455,7 +8136,7 @@
                                     </p:set>
                                     <p:anim calcmode="lin" valueType="num">
                                       <p:cBhvr>
-                                        <p:cTn id="15" dur="450" fill="hold"/>
+                                        <p:cTn id="17" dur="550" fill="hold"/>
                                         <p:tgtEl>
                                           <p:spTgt spid="5"/>
                                         </p:tgtEl>
@@ -7469,9 +8150,14 @@
                                             <p:strVal val="0"/>
                                           </p:val>
                                         </p:tav>
-                                        <p:tav tm="70000">
-                                          <p:val>
-                                            <p:strVal val="#ppt_w*1.07"/>
+                                        <p:tav tm="60000">
+                                          <p:val>
+                                            <p:strVal val="#ppt_w*1.14"/>
+                                          </p:val>
+                                        </p:tav>
+                                        <p:tav tm="82000">
+                                          <p:val>
+                                            <p:strVal val="#ppt_w*0.97"/>
                                           </p:val>
                                         </p:tav>
                                         <p:tav tm="100000">
@@ -7483,7 +8169,7 @@
                                     </p:anim>
                                     <p:anim calcmode="lin" valueType="num">
                                       <p:cBhvr>
-                                        <p:cTn id="16" dur="450" fill="hold"/>
+                                        <p:cTn id="18" dur="550" fill="hold"/>
                                         <p:tgtEl>
                                           <p:spTgt spid="5"/>
                                         </p:tgtEl>
@@ -7497,9 +8183,14 @@
                                             <p:strVal val="0"/>
                                           </p:val>
                                         </p:tav>
-                                        <p:tav tm="70000">
-                                          <p:val>
-                                            <p:strVal val="#ppt_h*1.07"/>
+                                        <p:tav tm="60000">
+                                          <p:val>
+                                            <p:strVal val="#ppt_h*1.14"/>
+                                          </p:val>
+                                        </p:tav>
+                                        <p:tav tm="82000">
+                                          <p:val>
+                                            <p:strVal val="#ppt_h*0.97"/>
                                           </p:val>
                                         </p:tav>
                                         <p:tav tm="100000">
@@ -7511,9 +8202,128 @@
                                     </p:anim>
                                     <p:animEffect transition="in" filter="fade">
                                       <p:cBhvr>
-                                        <p:cTn id="17" dur="225"/>
+                                        <p:cTn id="19" dur="220"/>
                                         <p:tgtEl>
                                           <p:spTgt spid="5"/>
+                                        </p:tgtEl>
+                                      </p:cBhvr>
+                                    </p:animEffect>
+                                  </p:childTnLst>
+                                </p:cTn>
+                              </p:par>
+                            </p:childTnLst>
+                          </p:cTn>
+                        </p:par>
+                      </p:childTnLst>
+                    </p:cTn>
+                  </p:par>
+                  <p:par>
+                    <p:cTn id="45" fill="hold">
+                      <p:stCondLst>
+                        <p:cond delay="indefinite"/>
+                      </p:stCondLst>
+                      <p:childTnLst>
+                        <p:par>
+                          <p:cTn id="46" fill="hold">
+                            <p:stCondLst>
+                              <p:cond delay="0"/>
+                            </p:stCondLst>
+                            <p:childTnLst>
+                              <p:par>
+                                <p:cTn id="22" presetID="53" presetClass="entr" presetSubtype="16" fill="hold" grpId="0" nodeType="clickEffect">
+                                  <p:stCondLst>
+                                    <p:cond delay="0"/>
+                                  </p:stCondLst>
+                                  <p:childTnLst>
+                                    <p:set>
+                                      <p:cBhvr>
+                                        <p:cTn id="23" dur="1" fill="hold">
+                                          <p:stCondLst>
+                                            <p:cond delay="0"/>
+                                          </p:stCondLst>
+                                        </p:cTn>
+                                        <p:tgtEl>
+                                          <p:spTgt spid="6"/>
+                                        </p:tgtEl>
+                                        <p:attrNameLst>
+                                          <p:attrName>style.visibility</p:attrName>
+                                        </p:attrNameLst>
+                                      </p:cBhvr>
+                                      <p:to>
+                                        <p:strVal val="visible"/>
+                                      </p:to>
+                                    </p:set>
+                                    <p:anim calcmode="lin" valueType="num">
+                                      <p:cBhvr>
+                                        <p:cTn id="24" dur="550" fill="hold"/>
+                                        <p:tgtEl>
+                                          <p:spTgt spid="6"/>
+                                        </p:tgtEl>
+                                        <p:attrNameLst>
+                                          <p:attrName>ppt_w</p:attrName>
+                                        </p:attrNameLst>
+                                      </p:cBhvr>
+                                      <p:tavLst>
+                                        <p:tav tm="0">
+                                          <p:val>
+                                            <p:strVal val="0"/>
+                                          </p:val>
+                                        </p:tav>
+                                        <p:tav tm="60000">
+                                          <p:val>
+                                            <p:strVal val="#ppt_w*1.14"/>
+                                          </p:val>
+                                        </p:tav>
+                                        <p:tav tm="82000">
+                                          <p:val>
+                                            <p:strVal val="#ppt_w*0.97"/>
+                                          </p:val>
+                                        </p:tav>
+                                        <p:tav tm="100000">
+                                          <p:val>
+                                            <p:strVal val="#ppt_w"/>
+                                          </p:val>
+                                        </p:tav>
+                                      </p:tavLst>
+                                    </p:anim>
+                                    <p:anim calcmode="lin" valueType="num">
+                                      <p:cBhvr>
+                                        <p:cTn id="25" dur="550" fill="hold"/>
+                                        <p:tgtEl>
+                                          <p:spTgt spid="6"/>
+                                        </p:tgtEl>
+                                        <p:attrNameLst>
+                                          <p:attrName>ppt_h</p:attrName>
+                                        </p:attrNameLst>
+                                      </p:cBhvr>
+                                      <p:tavLst>
+                                        <p:tav tm="0">
+                                          <p:val>
+                                            <p:strVal val="0"/>
+                                          </p:val>
+                                        </p:tav>
+                                        <p:tav tm="60000">
+                                          <p:val>
+                                            <p:strVal val="#ppt_h*1.14"/>
+                                          </p:val>
+                                        </p:tav>
+                                        <p:tav tm="82000">
+                                          <p:val>
+                                            <p:strVal val="#ppt_h*0.97"/>
+                                          </p:val>
+                                        </p:tav>
+                                        <p:tav tm="100000">
+                                          <p:val>
+                                            <p:strVal val="#ppt_h"/>
+                                          </p:val>
+                                        </p:tav>
+                                      </p:tavLst>
+                                    </p:anim>
+                                    <p:animEffect transition="in" filter="fade">
+                                      <p:cBhvr>
+                                        <p:cTn id="26" dur="220"/>
+                                        <p:tgtEl>
+                                          <p:spTgt spid="6"/>
                                         </p:tgtEl>
                                       </p:cBhvr>
                                     </p:animEffect>
@@ -7521,20 +8331,20 @@
                                 </p:cTn>
                               </p:par>
                               <p:par>
-                                <p:cTn id="18" presetID="53" presetClass="entr" presetSubtype="16" fill="hold" grpId="0" nodeType="withEffect">
+                                <p:cTn id="27" presetID="53" presetClass="entr" presetSubtype="16" fill="hold" grpId="0" nodeType="withEffect">
                                   <p:stCondLst>
-                                    <p:cond delay="200"/>
+                                    <p:cond delay="430"/>
                                   </p:stCondLst>
                                   <p:childTnLst>
                                     <p:set>
                                       <p:cBhvr>
-                                        <p:cTn id="19" dur="1" fill="hold">
+                                        <p:cTn id="28" dur="1" fill="hold">
                                           <p:stCondLst>
                                             <p:cond delay="0"/>
                                           </p:stCondLst>
                                         </p:cTn>
                                         <p:tgtEl>
-                                          <p:spTgt spid="6"/>
+                                          <p:spTgt spid="8"/>
                                         </p:tgtEl>
                                         <p:attrNameLst>
                                           <p:attrName>style.visibility</p:attrName>
@@ -7546,9 +8356,9 @@
                                     </p:set>
                                     <p:anim calcmode="lin" valueType="num">
                                       <p:cBhvr>
-                                        <p:cTn id="20" dur="450" fill="hold"/>
-                                        <p:tgtEl>
-                                          <p:spTgt spid="6"/>
+                                        <p:cTn id="29" dur="550" fill="hold"/>
+                                        <p:tgtEl>
+                                          <p:spTgt spid="8"/>
                                         </p:tgtEl>
                                         <p:attrNameLst>
                                           <p:attrName>ppt_w</p:attrName>
@@ -7560,9 +8370,14 @@
                                             <p:strVal val="0"/>
                                           </p:val>
                                         </p:tav>
-                                        <p:tav tm="70000">
-                                          <p:val>
-                                            <p:strVal val="#ppt_w*1.07"/>
+                                        <p:tav tm="60000">
+                                          <p:val>
+                                            <p:strVal val="#ppt_w*1.14"/>
+                                          </p:val>
+                                        </p:tav>
+                                        <p:tav tm="82000">
+                                          <p:val>
+                                            <p:strVal val="#ppt_w*0.97"/>
                                           </p:val>
                                         </p:tav>
                                         <p:tav tm="100000">
@@ -7574,9 +8389,9 @@
                                     </p:anim>
                                     <p:anim calcmode="lin" valueType="num">
                                       <p:cBhvr>
-                                        <p:cTn id="21" dur="450" fill="hold"/>
-                                        <p:tgtEl>
-                                          <p:spTgt spid="6"/>
+                                        <p:cTn id="30" dur="550" fill="hold"/>
+                                        <p:tgtEl>
+                                          <p:spTgt spid="8"/>
                                         </p:tgtEl>
                                         <p:attrNameLst>
                                           <p:attrName>ppt_h</p:attrName>
@@ -7588,9 +8403,14 @@
                                             <p:strVal val="0"/>
                                           </p:val>
                                         </p:tav>
-                                        <p:tav tm="70000">
-                                          <p:val>
-                                            <p:strVal val="#ppt_h*1.07"/>
+                                        <p:tav tm="60000">
+                                          <p:val>
+                                            <p:strVal val="#ppt_h*1.14"/>
+                                          </p:val>
+                                        </p:tav>
+                                        <p:tav tm="82000">
+                                          <p:val>
+                                            <p:strVal val="#ppt_h*0.97"/>
                                           </p:val>
                                         </p:tav>
                                         <p:tav tm="100000">
@@ -7602,9 +8422,9 @@
                                     </p:anim>
                                     <p:animEffect transition="in" filter="fade">
                                       <p:cBhvr>
-                                        <p:cTn id="22" dur="225"/>
-                                        <p:tgtEl>
-                                          <p:spTgt spid="6"/>
+                                        <p:cTn id="31" dur="220"/>
+                                        <p:tgtEl>
+                                          <p:spTgt spid="8"/>
                                         </p:tgtEl>
                                       </p:cBhvr>
                                     </p:animEffect>
@@ -7612,20 +8432,20 @@
                                 </p:cTn>
                               </p:par>
                               <p:par>
-                                <p:cTn id="23" presetID="10" presetClass="entr" presetSubtype="0" fill="hold" grpId="0" nodeType="withEffect">
+                                <p:cTn id="32" presetID="53" presetClass="entr" presetSubtype="16" fill="hold" grpId="0" nodeType="withEffect">
                                   <p:stCondLst>
-                                    <p:cond delay="450"/>
+                                    <p:cond delay="510"/>
                                   </p:stCondLst>
                                   <p:childTnLst>
                                     <p:set>
                                       <p:cBhvr>
-                                        <p:cTn id="24" dur="1" fill="hold">
+                                        <p:cTn id="33" dur="1" fill="hold">
                                           <p:stCondLst>
                                             <p:cond delay="0"/>
                                           </p:stCondLst>
                                         </p:cTn>
                                         <p:tgtEl>
-                                          <p:spTgt spid="8"/>
+                                          <p:spTgt spid="9"/>
                                         </p:tgtEl>
                                         <p:attrNameLst>
                                           <p:attrName>style.visibility</p:attrName>
@@ -7635,11 +8455,77 @@
                                         <p:strVal val="visible"/>
                                       </p:to>
                                     </p:set>
+                                    <p:anim calcmode="lin" valueType="num">
+                                      <p:cBhvr>
+                                        <p:cTn id="34" dur="550" fill="hold"/>
+                                        <p:tgtEl>
+                                          <p:spTgt spid="9"/>
+                                        </p:tgtEl>
+                                        <p:attrNameLst>
+                                          <p:attrName>ppt_w</p:attrName>
+                                        </p:attrNameLst>
+                                      </p:cBhvr>
+                                      <p:tavLst>
+                                        <p:tav tm="0">
+                                          <p:val>
+                                            <p:strVal val="0"/>
+                                          </p:val>
+                                        </p:tav>
+                                        <p:tav tm="60000">
+                                          <p:val>
+                                            <p:strVal val="#ppt_w*1.14"/>
+                                          </p:val>
+                                        </p:tav>
+                                        <p:tav tm="82000">
+                                          <p:val>
+                                            <p:strVal val="#ppt_w*0.97"/>
+                                          </p:val>
+                                        </p:tav>
+                                        <p:tav tm="100000">
+                                          <p:val>
+                                            <p:strVal val="#ppt_w"/>
+                                          </p:val>
+                                        </p:tav>
+                                      </p:tavLst>
+                                    </p:anim>
+                                    <p:anim calcmode="lin" valueType="num">
+                                      <p:cBhvr>
+                                        <p:cTn id="35" dur="550" fill="hold"/>
+                                        <p:tgtEl>
+                                          <p:spTgt spid="9"/>
+                                        </p:tgtEl>
+                                        <p:attrNameLst>
+                                          <p:attrName>ppt_h</p:attrName>
+                                        </p:attrNameLst>
+                                      </p:cBhvr>
+                                      <p:tavLst>
+                                        <p:tav tm="0">
+                                          <p:val>
+                                            <p:strVal val="0"/>
+                                          </p:val>
+                                        </p:tav>
+                                        <p:tav tm="60000">
+                                          <p:val>
+                                            <p:strVal val="#ppt_h*1.14"/>
+                                          </p:val>
+                                        </p:tav>
+                                        <p:tav tm="82000">
+                                          <p:val>
+                                            <p:strVal val="#ppt_h*0.97"/>
+                                          </p:val>
+                                        </p:tav>
+                                        <p:tav tm="100000">
+                                          <p:val>
+                                            <p:strVal val="#ppt_h"/>
+                                          </p:val>
+                                        </p:tav>
+                                      </p:tavLst>
+                                    </p:anim>
                                     <p:animEffect transition="in" filter="fade">
                                       <p:cBhvr>
-                                        <p:cTn id="25" dur="400"/>
-                                        <p:tgtEl>
-                                          <p:spTgt spid="8"/>
+                                        <p:cTn id="36" dur="220"/>
+                                        <p:tgtEl>
+                                          <p:spTgt spid="9"/>
                                         </p:tgtEl>
                                       </p:cBhvr>
                                     </p:animEffect>
@@ -7647,20 +8533,20 @@
                                 </p:cTn>
                               </p:par>
                               <p:par>
-                                <p:cTn id="26" presetID="10" presetClass="entr" presetSubtype="0" fill="hold" grpId="0" nodeType="withEffect">
+                                <p:cTn id="37" presetID="53" presetClass="entr" presetSubtype="16" fill="hold" grpId="0" nodeType="withEffect">
                                   <p:stCondLst>
-                                    <p:cond delay="450"/>
+                                    <p:cond delay="590"/>
                                   </p:stCondLst>
                                   <p:childTnLst>
                                     <p:set>
                                       <p:cBhvr>
-                                        <p:cTn id="27" dur="1" fill="hold">
+                                        <p:cTn id="38" dur="1" fill="hold">
                                           <p:stCondLst>
                                             <p:cond delay="0"/>
                                           </p:stCondLst>
                                         </p:cTn>
                                         <p:tgtEl>
-                                          <p:spTgt spid="9"/>
+                                          <p:spTgt spid="10"/>
                                         </p:tgtEl>
                                         <p:attrNameLst>
                                           <p:attrName>style.visibility</p:attrName>
@@ -7670,11 +8556,77 @@
                                         <p:strVal val="visible"/>
                                       </p:to>
                                     </p:set>
+                                    <p:anim calcmode="lin" valueType="num">
+                                      <p:cBhvr>
+                                        <p:cTn id="39" dur="550" fill="hold"/>
+                                        <p:tgtEl>
+                                          <p:spTgt spid="10"/>
+                                        </p:tgtEl>
+                                        <p:attrNameLst>
+                                          <p:attrName>ppt_w</p:attrName>
+                                        </p:attrNameLst>
+                                      </p:cBhvr>
+                                      <p:tavLst>
+                                        <p:tav tm="0">
+                                          <p:val>
+                                            <p:strVal val="0"/>
+                                          </p:val>
+                                        </p:tav>
+                                        <p:tav tm="60000">
+                                          <p:val>
+                                            <p:strVal val="#ppt_w*1.14"/>
+                                          </p:val>
+                                        </p:tav>
+                                        <p:tav tm="82000">
+                                          <p:val>
+                                            <p:strVal val="#ppt_w*0.97"/>
+                                          </p:val>
+                                        </p:tav>
+                                        <p:tav tm="100000">
+                                          <p:val>
+                                            <p:strVal val="#ppt_w"/>
+                                          </p:val>
+                                        </p:tav>
+                                      </p:tavLst>
+                                    </p:anim>
+                                    <p:anim calcmode="lin" valueType="num">
+                                      <p:cBhvr>
+                                        <p:cTn id="40" dur="550" fill="hold"/>
+                                        <p:tgtEl>
+                                          <p:spTgt spid="10"/>
+                                        </p:tgtEl>
+                                        <p:attrNameLst>
+                                          <p:attrName>ppt_h</p:attrName>
+                                        </p:attrNameLst>
+                                      </p:cBhvr>
+                                      <p:tavLst>
+                                        <p:tav tm="0">
+                                          <p:val>
+                                            <p:strVal val="0"/>
+                                          </p:val>
+                                        </p:tav>
+                                        <p:tav tm="60000">
+                                          <p:val>
+                                            <p:strVal val="#ppt_h*1.14"/>
+                                          </p:val>
+                                        </p:tav>
+                                        <p:tav tm="82000">
+                                          <p:val>
+                                            <p:strVal val="#ppt_h*0.97"/>
+                                          </p:val>
+                                        </p:tav>
+                                        <p:tav tm="100000">
+                                          <p:val>
+                                            <p:strVal val="#ppt_h"/>
+                                          </p:val>
+                                        </p:tav>
+                                      </p:tavLst>
+                                    </p:anim>
                                     <p:animEffect transition="in" filter="fade">
                                       <p:cBhvr>
-                                        <p:cTn id="28" dur="400"/>
-                                        <p:tgtEl>
-                                          <p:spTgt spid="9"/>
+                                        <p:cTn id="41" dur="220"/>
+                                        <p:tgtEl>
+                                          <p:spTgt spid="10"/>
                                         </p:tgtEl>
                                       </p:cBhvr>
                                     </p:animEffect>
@@ -7682,42 +8634,7 @@
                                 </p:cTn>
                               </p:par>
                               <p:par>
-                                <p:cTn id="29" presetID="10" presetClass="entr" presetSubtype="0" fill="hold" grpId="0" nodeType="withEffect">
-                                  <p:stCondLst>
-                                    <p:cond delay="450"/>
-                                  </p:stCondLst>
-                                  <p:childTnLst>
-                                    <p:set>
-                                      <p:cBhvr>
-                                        <p:cTn id="30" dur="1" fill="hold">
-                                          <p:stCondLst>
-                                            <p:cond delay="0"/>
-                                          </p:stCondLst>
-                                        </p:cTn>
-                                        <p:tgtEl>
-                                          <p:spTgt spid="10"/>
-                                        </p:tgtEl>
-                                        <p:attrNameLst>
-                                          <p:attrName>style.visibility</p:attrName>
-                                        </p:attrNameLst>
-                                      </p:cBhvr>
-                                      <p:to>
-                                        <p:strVal val="visible"/>
-                                      </p:to>
-                                    </p:set>
-                                    <p:animEffect transition="in" filter="fade">
-                                      <p:cBhvr>
-                                        <p:cTn id="31" dur="400"/>
-                                        <p:tgtEl>
-                                          <p:spTgt spid="10"/>
-                                        </p:tgtEl>
-                                      </p:cBhvr>
-                                    </p:animEffect>
-                                  </p:childTnLst>
-                                </p:cTn>
-                              </p:par>
-                              <p:par>
-                                <p:cTn id="32" presetID="10" presetClass="entr" presetSubtype="0" fill="hold" grpId="0" nodeType="withEffect">
+                                <p:cTn id="42" presetID="10" presetClass="entr" presetSubtype="0" fill="hold" grpId="0" nodeType="withEffect">
                                   <p:stCondLst>
                                     <p:cond delay="650"/>
                                   </p:stCondLst>
@@ -7727,7 +8644,7 @@
                                   <p:childTnLst>
                                     <p:set>
                                       <p:cBhvr>
-                                        <p:cTn id="33" dur="1" fill="hold">
+                                        <p:cTn id="43" dur="1" fill="hold">
                                           <p:stCondLst>
                                             <p:cond delay="0"/>
                                           </p:stCondLst>
@@ -7745,7 +8662,7 @@
                                     </p:set>
                                     <p:animEffect transition="in" filter="fade">
                                       <p:cBhvr>
-                                        <p:cTn id="34" dur="40"/>
+                                        <p:cTn id="44" dur="40"/>
                                         <p:tgtEl>
                                           <p:spTgt spid="7"/>
                                         </p:tgtEl>
@@ -7782,7 +8699,7 @@
       </p:par>
     </p:tnLst>
     <p:bldLst>
-      <p:bldP spid="1" grpId="0" animBg="1"/>
+      <p:bldP spid="3" grpId="0" animBg="1"/>
       <p:bldP spid="4" grpId="0" animBg="1"/>
       <p:bldP spid="5" grpId="0" animBg="1"/>
       <p:bldP spid="6" grpId="0" animBg="1"/>
@@ -8230,7 +9147,7 @@
                             </p:stCondLst>
                             <p:childTnLst>
                               <p:par>
-                                <p:cTn id="3" presetID="42" presetClass="entr" presetSubtype="0" fill="hold" grpId="0" nodeType="afterEffect">
+                                <p:cTn id="3" presetID="53" presetClass="entr" presetSubtype="16" fill="hold" grpId="0" nodeType="afterEffect">
                                   <p:stCondLst>
                                     <p:cond delay="0"/>
                                   </p:stCondLst>
@@ -8243,7 +9160,7 @@
                                           </p:stCondLst>
                                         </p:cTn>
                                         <p:tgtEl>
-                                          <p:spTgt spid="1"/>
+                                          <p:spTgt spid="3"/>
                                         </p:tgtEl>
                                         <p:attrNameLst>
                                           <p:attrName>style.visibility</p:attrName>
@@ -8255,60 +9172,75 @@
                                     </p:set>
                                     <p:anim calcmode="lin" valueType="num">
                                       <p:cBhvr>
-                                        <p:cTn id="5" dur="500" fill="hold"/>
-                                        <p:tgtEl>
-                                          <p:spTgt spid="1"/>
-                                        </p:tgtEl>
-                                        <p:attrNameLst>
-                                          <p:attrName>ppt_x</p:attrName>
+                                        <p:cTn id="5" dur="550" fill="hold"/>
+                                        <p:tgtEl>
+                                          <p:spTgt spid="3"/>
+                                        </p:tgtEl>
+                                        <p:attrNameLst>
+                                          <p:attrName>ppt_w</p:attrName>
                                         </p:attrNameLst>
                                       </p:cBhvr>
                                       <p:tavLst>
                                         <p:tav tm="0">
                                           <p:val>
-                                            <p:strVal val="#ppt_x"/>
+                                            <p:strVal val="0"/>
+                                          </p:val>
+                                        </p:tav>
+                                        <p:tav tm="60000">
+                                          <p:val>
+                                            <p:strVal val="#ppt_w*1.14"/>
+                                          </p:val>
+                                        </p:tav>
+                                        <p:tav tm="82000">
+                                          <p:val>
+                                            <p:strVal val="#ppt_w*0.97"/>
                                           </p:val>
                                         </p:tav>
                                         <p:tav tm="100000">
                                           <p:val>
-                                            <p:strVal val="#ppt_x"/>
+                                            <p:strVal val="#ppt_w"/>
                                           </p:val>
                                         </p:tav>
                                       </p:tavLst>
                                     </p:anim>
                                     <p:anim calcmode="lin" valueType="num">
                                       <p:cBhvr>
-                                        <p:cTn id="6" dur="500" fill="hold"/>
-                                        <p:tgtEl>
-                                          <p:spTgt spid="1"/>
-                                        </p:tgtEl>
-                                        <p:attrNameLst>
-                                          <p:attrName>ppt_y</p:attrName>
+                                        <p:cTn id="6" dur="550" fill="hold"/>
+                                        <p:tgtEl>
+                                          <p:spTgt spid="3"/>
+                                        </p:tgtEl>
+                                        <p:attrNameLst>
+                                          <p:attrName>ppt_h</p:attrName>
                                         </p:attrNameLst>
                                       </p:cBhvr>
                                       <p:tavLst>
                                         <p:tav tm="0">
                                           <p:val>
-                                            <p:strVal val="#ppt_y+0.08"/>
-                                          </p:val>
-                                        </p:tav>
-                                        <p:tav tm="80000">
-                                          <p:val>
-                                            <p:strVal val="#ppt_y-0.006"/>
+                                            <p:strVal val="0"/>
+                                          </p:val>
+                                        </p:tav>
+                                        <p:tav tm="60000">
+                                          <p:val>
+                                            <p:strVal val="#ppt_h*1.14"/>
+                                          </p:val>
+                                        </p:tav>
+                                        <p:tav tm="82000">
+                                          <p:val>
+                                            <p:strVal val="#ppt_h*0.97"/>
                                           </p:val>
                                         </p:tav>
                                         <p:tav tm="100000">
                                           <p:val>
-                                            <p:strVal val="#ppt_y"/>
+                                            <p:strVal val="#ppt_h"/>
                                           </p:val>
                                         </p:tav>
                                       </p:tavLst>
                                     </p:anim>
                                     <p:animEffect transition="in" filter="fade">
                                       <p:cBhvr>
-                                        <p:cTn id="7" dur="500"/>
-                                        <p:tgtEl>
-                                          <p:spTgt spid="1"/>
+                                        <p:cTn id="7" dur="220"/>
+                                        <p:tgtEl>
+                                          <p:spTgt spid="3"/>
                                         </p:tgtEl>
                                       </p:cBhvr>
                                     </p:animEffect>
@@ -8322,19 +9254,19 @@
                     </p:cTn>
                   </p:par>
                   <p:par>
-                    <p:cTn id="18" fill="hold">
+                    <p:cTn id="20" fill="hold">
                       <p:stCondLst>
                         <p:cond delay="indefinite"/>
                       </p:stCondLst>
                       <p:childTnLst>
                         <p:par>
-                          <p:cTn id="19" fill="hold">
+                          <p:cTn id="21" fill="hold">
                             <p:stCondLst>
                               <p:cond delay="0"/>
                             </p:stCondLst>
                             <p:childTnLst>
                               <p:par>
-                                <p:cTn id="10" presetID="22" presetClass="entr" presetSubtype="8" fill="hold" grpId="0" nodeType="clickEffect">
+                                <p:cTn id="10" presetID="53" presetClass="entr" presetSubtype="16" fill="hold" grpId="0" nodeType="clickEffect">
                                   <p:stCondLst>
                                     <p:cond delay="0"/>
                                   </p:stCondLst>
@@ -8357,9 +9289,75 @@
                                         <p:strVal val="visible"/>
                                       </p:to>
                                     </p:set>
-                                    <p:animEffect transition="in" filter="wipe(left)">
-                                      <p:cBhvr>
-                                        <p:cTn id="12" dur="500"/>
+                                    <p:anim calcmode="lin" valueType="num">
+                                      <p:cBhvr>
+                                        <p:cTn id="12" dur="550" fill="hold"/>
+                                        <p:tgtEl>
+                                          <p:spTgt spid="4"/>
+                                        </p:tgtEl>
+                                        <p:attrNameLst>
+                                          <p:attrName>ppt_w</p:attrName>
+                                        </p:attrNameLst>
+                                      </p:cBhvr>
+                                      <p:tavLst>
+                                        <p:tav tm="0">
+                                          <p:val>
+                                            <p:strVal val="0"/>
+                                          </p:val>
+                                        </p:tav>
+                                        <p:tav tm="60000">
+                                          <p:val>
+                                            <p:strVal val="#ppt_w*1.14"/>
+                                          </p:val>
+                                        </p:tav>
+                                        <p:tav tm="82000">
+                                          <p:val>
+                                            <p:strVal val="#ppt_w*0.97"/>
+                                          </p:val>
+                                        </p:tav>
+                                        <p:tav tm="100000">
+                                          <p:val>
+                                            <p:strVal val="#ppt_w"/>
+                                          </p:val>
+                                        </p:tav>
+                                      </p:tavLst>
+                                    </p:anim>
+                                    <p:anim calcmode="lin" valueType="num">
+                                      <p:cBhvr>
+                                        <p:cTn id="13" dur="550" fill="hold"/>
+                                        <p:tgtEl>
+                                          <p:spTgt spid="4"/>
+                                        </p:tgtEl>
+                                        <p:attrNameLst>
+                                          <p:attrName>ppt_h</p:attrName>
+                                        </p:attrNameLst>
+                                      </p:cBhvr>
+                                      <p:tavLst>
+                                        <p:tav tm="0">
+                                          <p:val>
+                                            <p:strVal val="0"/>
+                                          </p:val>
+                                        </p:tav>
+                                        <p:tav tm="60000">
+                                          <p:val>
+                                            <p:strVal val="#ppt_h*1.14"/>
+                                          </p:val>
+                                        </p:tav>
+                                        <p:tav tm="82000">
+                                          <p:val>
+                                            <p:strVal val="#ppt_h*0.97"/>
+                                          </p:val>
+                                        </p:tav>
+                                        <p:tav tm="100000">
+                                          <p:val>
+                                            <p:strVal val="#ppt_h"/>
+                                          </p:val>
+                                        </p:tav>
+                                      </p:tavLst>
+                                    </p:anim>
+                                    <p:animEffect transition="in" filter="fade">
+                                      <p:cBhvr>
+                                        <p:cTn id="14" dur="220"/>
                                         <p:tgtEl>
                                           <p:spTgt spid="4"/>
                                         </p:tgtEl>
@@ -8369,14 +9367,14 @@
                                 </p:cTn>
                               </p:par>
                               <p:par>
-                                <p:cTn id="13" presetID="53" presetClass="entr" presetSubtype="16" fill="hold" grpId="0" nodeType="withEffect">
+                                <p:cTn id="15" presetID="53" presetClass="entr" presetSubtype="16" fill="hold" grpId="0" nodeType="withEffect">
                                   <p:stCondLst>
                                     <p:cond delay="350"/>
                                   </p:stCondLst>
                                   <p:childTnLst>
                                     <p:set>
                                       <p:cBhvr>
-                                        <p:cTn id="14" dur="1" fill="hold">
+                                        <p:cTn id="16" dur="1" fill="hold">
                                           <p:stCondLst>
                                             <p:cond delay="0"/>
                                           </p:stCondLst>
@@ -8394,7 +9392,7 @@
                                     </p:set>
                                     <p:anim calcmode="lin" valueType="num">
                                       <p:cBhvr>
-                                        <p:cTn id="15" dur="450" fill="hold"/>
+                                        <p:cTn id="17" dur="550" fill="hold"/>
                                         <p:tgtEl>
                                           <p:spTgt spid="5"/>
                                         </p:tgtEl>
@@ -8408,9 +9406,14 @@
                                             <p:strVal val="0"/>
                                           </p:val>
                                         </p:tav>
-                                        <p:tav tm="70000">
-                                          <p:val>
-                                            <p:strVal val="#ppt_w*1.07"/>
+                                        <p:tav tm="60000">
+                                          <p:val>
+                                            <p:strVal val="#ppt_w*1.14"/>
+                                          </p:val>
+                                        </p:tav>
+                                        <p:tav tm="82000">
+                                          <p:val>
+                                            <p:strVal val="#ppt_w*0.97"/>
                                           </p:val>
                                         </p:tav>
                                         <p:tav tm="100000">
@@ -8422,7 +9425,7 @@
                                     </p:anim>
                                     <p:anim calcmode="lin" valueType="num">
                                       <p:cBhvr>
-                                        <p:cTn id="16" dur="450" fill="hold"/>
+                                        <p:cTn id="18" dur="550" fill="hold"/>
                                         <p:tgtEl>
                                           <p:spTgt spid="5"/>
                                         </p:tgtEl>
@@ -8436,9 +9439,14 @@
                                             <p:strVal val="0"/>
                                           </p:val>
                                         </p:tav>
-                                        <p:tav tm="70000">
-                                          <p:val>
-                                            <p:strVal val="#ppt_h*1.07"/>
+                                        <p:tav tm="60000">
+                                          <p:val>
+                                            <p:strVal val="#ppt_h*1.14"/>
+                                          </p:val>
+                                        </p:tav>
+                                        <p:tav tm="82000">
+                                          <p:val>
+                                            <p:strVal val="#ppt_h*0.97"/>
                                           </p:val>
                                         </p:tav>
                                         <p:tav tm="100000">
@@ -8450,7 +9458,7 @@
                                     </p:anim>
                                     <p:animEffect transition="in" filter="fade">
                                       <p:cBhvr>
-                                        <p:cTn id="17" dur="225"/>
+                                        <p:cTn id="19" dur="220"/>
                                         <p:tgtEl>
                                           <p:spTgt spid="5"/>
                                         </p:tgtEl>
@@ -8466,26 +9474,26 @@
                     </p:cTn>
                   </p:par>
                   <p:par>
-                    <p:cTn id="28" fill="hold">
+                    <p:cTn id="32" fill="hold">
                       <p:stCondLst>
                         <p:cond delay="indefinite"/>
                       </p:stCondLst>
                       <p:childTnLst>
                         <p:par>
-                          <p:cTn id="29" fill="hold">
+                          <p:cTn id="33" fill="hold">
                             <p:stCondLst>
                               <p:cond delay="0"/>
                             </p:stCondLst>
                             <p:childTnLst>
                               <p:par>
-                                <p:cTn id="20" presetID="22" presetClass="entr" presetSubtype="8" fill="hold" grpId="0" nodeType="clickEffect">
+                                <p:cTn id="22" presetID="53" presetClass="entr" presetSubtype="16" fill="hold" grpId="0" nodeType="clickEffect">
                                   <p:stCondLst>
                                     <p:cond delay="0"/>
                                   </p:stCondLst>
                                   <p:childTnLst>
                                     <p:set>
                                       <p:cBhvr>
-                                        <p:cTn id="21" dur="1" fill="hold">
+                                        <p:cTn id="23" dur="1" fill="hold">
                                           <p:stCondLst>
                                             <p:cond delay="0"/>
                                           </p:stCondLst>
@@ -8501,9 +9509,75 @@
                                         <p:strVal val="visible"/>
                                       </p:to>
                                     </p:set>
-                                    <p:animEffect transition="in" filter="wipe(left)">
-                                      <p:cBhvr>
-                                        <p:cTn id="22" dur="500"/>
+                                    <p:anim calcmode="lin" valueType="num">
+                                      <p:cBhvr>
+                                        <p:cTn id="24" dur="550" fill="hold"/>
+                                        <p:tgtEl>
+                                          <p:spTgt spid="6"/>
+                                        </p:tgtEl>
+                                        <p:attrNameLst>
+                                          <p:attrName>ppt_w</p:attrName>
+                                        </p:attrNameLst>
+                                      </p:cBhvr>
+                                      <p:tavLst>
+                                        <p:tav tm="0">
+                                          <p:val>
+                                            <p:strVal val="0"/>
+                                          </p:val>
+                                        </p:tav>
+                                        <p:tav tm="60000">
+                                          <p:val>
+                                            <p:strVal val="#ppt_w*1.14"/>
+                                          </p:val>
+                                        </p:tav>
+                                        <p:tav tm="82000">
+                                          <p:val>
+                                            <p:strVal val="#ppt_w*0.97"/>
+                                          </p:val>
+                                        </p:tav>
+                                        <p:tav tm="100000">
+                                          <p:val>
+                                            <p:strVal val="#ppt_w"/>
+                                          </p:val>
+                                        </p:tav>
+                                      </p:tavLst>
+                                    </p:anim>
+                                    <p:anim calcmode="lin" valueType="num">
+                                      <p:cBhvr>
+                                        <p:cTn id="25" dur="550" fill="hold"/>
+                                        <p:tgtEl>
+                                          <p:spTgt spid="6"/>
+                                        </p:tgtEl>
+                                        <p:attrNameLst>
+                                          <p:attrName>ppt_h</p:attrName>
+                                        </p:attrNameLst>
+                                      </p:cBhvr>
+                                      <p:tavLst>
+                                        <p:tav tm="0">
+                                          <p:val>
+                                            <p:strVal val="0"/>
+                                          </p:val>
+                                        </p:tav>
+                                        <p:tav tm="60000">
+                                          <p:val>
+                                            <p:strVal val="#ppt_h*1.14"/>
+                                          </p:val>
+                                        </p:tav>
+                                        <p:tav tm="82000">
+                                          <p:val>
+                                            <p:strVal val="#ppt_h*0.97"/>
+                                          </p:val>
+                                        </p:tav>
+                                        <p:tav tm="100000">
+                                          <p:val>
+                                            <p:strVal val="#ppt_h"/>
+                                          </p:val>
+                                        </p:tav>
+                                      </p:tavLst>
+                                    </p:anim>
+                                    <p:animEffect transition="in" filter="fade">
+                                      <p:cBhvr>
+                                        <p:cTn id="26" dur="220"/>
                                         <p:tgtEl>
                                           <p:spTgt spid="6"/>
                                         </p:tgtEl>
@@ -8513,14 +9587,14 @@
                                 </p:cTn>
                               </p:par>
                               <p:par>
-                                <p:cTn id="23" presetID="53" presetClass="entr" presetSubtype="16" fill="hold" grpId="0" nodeType="withEffect">
+                                <p:cTn id="27" presetID="53" presetClass="entr" presetSubtype="16" fill="hold" grpId="0" nodeType="withEffect">
                                   <p:stCondLst>
                                     <p:cond delay="350"/>
                                   </p:stCondLst>
                                   <p:childTnLst>
                                     <p:set>
                                       <p:cBhvr>
-                                        <p:cTn id="24" dur="1" fill="hold">
+                                        <p:cTn id="28" dur="1" fill="hold">
                                           <p:stCondLst>
                                             <p:cond delay="0"/>
                                           </p:stCondLst>
@@ -8538,7 +9612,7 @@
                                     </p:set>
                                     <p:anim calcmode="lin" valueType="num">
                                       <p:cBhvr>
-                                        <p:cTn id="25" dur="450" fill="hold"/>
+                                        <p:cTn id="29" dur="550" fill="hold"/>
                                         <p:tgtEl>
                                           <p:spTgt spid="7"/>
                                         </p:tgtEl>
@@ -8552,9 +9626,14 @@
                                             <p:strVal val="0"/>
                                           </p:val>
                                         </p:tav>
-                                        <p:tav tm="70000">
-                                          <p:val>
-                                            <p:strVal val="#ppt_w*1.07"/>
+                                        <p:tav tm="60000">
+                                          <p:val>
+                                            <p:strVal val="#ppt_w*1.14"/>
+                                          </p:val>
+                                        </p:tav>
+                                        <p:tav tm="82000">
+                                          <p:val>
+                                            <p:strVal val="#ppt_w*0.97"/>
                                           </p:val>
                                         </p:tav>
                                         <p:tav tm="100000">
@@ -8566,7 +9645,7 @@
                                     </p:anim>
                                     <p:anim calcmode="lin" valueType="num">
                                       <p:cBhvr>
-                                        <p:cTn id="26" dur="450" fill="hold"/>
+                                        <p:cTn id="30" dur="550" fill="hold"/>
                                         <p:tgtEl>
                                           <p:spTgt spid="7"/>
                                         </p:tgtEl>
@@ -8580,9 +9659,14 @@
                                             <p:strVal val="0"/>
                                           </p:val>
                                         </p:tav>
-                                        <p:tav tm="70000">
-                                          <p:val>
-                                            <p:strVal val="#ppt_h*1.07"/>
+                                        <p:tav tm="60000">
+                                          <p:val>
+                                            <p:strVal val="#ppt_h*1.14"/>
+                                          </p:val>
+                                        </p:tav>
+                                        <p:tav tm="82000">
+                                          <p:val>
+                                            <p:strVal val="#ppt_h*0.97"/>
                                           </p:val>
                                         </p:tav>
                                         <p:tav tm="100000">
@@ -8594,7 +9678,7 @@
                                     </p:anim>
                                     <p:animEffect transition="in" filter="fade">
                                       <p:cBhvr>
-                                        <p:cTn id="27" dur="225"/>
+                                        <p:cTn id="31" dur="220"/>
                                         <p:tgtEl>
                                           <p:spTgt spid="7"/>
                                         </p:tgtEl>
@@ -8610,26 +9694,26 @@
                     </p:cTn>
                   </p:par>
                   <p:par>
-                    <p:cTn id="38" fill="hold">
+                    <p:cTn id="44" fill="hold">
                       <p:stCondLst>
                         <p:cond delay="indefinite"/>
                       </p:stCondLst>
                       <p:childTnLst>
                         <p:par>
-                          <p:cTn id="39" fill="hold">
+                          <p:cTn id="45" fill="hold">
                             <p:stCondLst>
                               <p:cond delay="0"/>
                             </p:stCondLst>
                             <p:childTnLst>
                               <p:par>
-                                <p:cTn id="30" presetID="22" presetClass="entr" presetSubtype="8" fill="hold" grpId="0" nodeType="clickEffect">
+                                <p:cTn id="34" presetID="53" presetClass="entr" presetSubtype="16" fill="hold" grpId="0" nodeType="clickEffect">
                                   <p:stCondLst>
                                     <p:cond delay="0"/>
                                   </p:stCondLst>
                                   <p:childTnLst>
                                     <p:set>
                                       <p:cBhvr>
-                                        <p:cTn id="31" dur="1" fill="hold">
+                                        <p:cTn id="35" dur="1" fill="hold">
                                           <p:stCondLst>
                                             <p:cond delay="0"/>
                                           </p:stCondLst>
@@ -8645,9 +9729,75 @@
                                         <p:strVal val="visible"/>
                                       </p:to>
                                     </p:set>
-                                    <p:animEffect transition="in" filter="wipe(left)">
-                                      <p:cBhvr>
-                                        <p:cTn id="32" dur="500"/>
+                                    <p:anim calcmode="lin" valueType="num">
+                                      <p:cBhvr>
+                                        <p:cTn id="36" dur="550" fill="hold"/>
+                                        <p:tgtEl>
+                                          <p:spTgt spid="8"/>
+                                        </p:tgtEl>
+                                        <p:attrNameLst>
+                                          <p:attrName>ppt_w</p:attrName>
+                                        </p:attrNameLst>
+                                      </p:cBhvr>
+                                      <p:tavLst>
+                                        <p:tav tm="0">
+                                          <p:val>
+                                            <p:strVal val="0"/>
+                                          </p:val>
+                                        </p:tav>
+                                        <p:tav tm="60000">
+                                          <p:val>
+                                            <p:strVal val="#ppt_w*1.14"/>
+                                          </p:val>
+                                        </p:tav>
+                                        <p:tav tm="82000">
+                                          <p:val>
+                                            <p:strVal val="#ppt_w*0.97"/>
+                                          </p:val>
+                                        </p:tav>
+                                        <p:tav tm="100000">
+                                          <p:val>
+                                            <p:strVal val="#ppt_w"/>
+                                          </p:val>
+                                        </p:tav>
+                                      </p:tavLst>
+                                    </p:anim>
+                                    <p:anim calcmode="lin" valueType="num">
+                                      <p:cBhvr>
+                                        <p:cTn id="37" dur="550" fill="hold"/>
+                                        <p:tgtEl>
+                                          <p:spTgt spid="8"/>
+                                        </p:tgtEl>
+                                        <p:attrNameLst>
+                                          <p:attrName>ppt_h</p:attrName>
+                                        </p:attrNameLst>
+                                      </p:cBhvr>
+                                      <p:tavLst>
+                                        <p:tav tm="0">
+                                          <p:val>
+                                            <p:strVal val="0"/>
+                                          </p:val>
+                                        </p:tav>
+                                        <p:tav tm="60000">
+                                          <p:val>
+                                            <p:strVal val="#ppt_h*1.14"/>
+                                          </p:val>
+                                        </p:tav>
+                                        <p:tav tm="82000">
+                                          <p:val>
+                                            <p:strVal val="#ppt_h*0.97"/>
+                                          </p:val>
+                                        </p:tav>
+                                        <p:tav tm="100000">
+                                          <p:val>
+                                            <p:strVal val="#ppt_h"/>
+                                          </p:val>
+                                        </p:tav>
+                                      </p:tavLst>
+                                    </p:anim>
+                                    <p:animEffect transition="in" filter="fade">
+                                      <p:cBhvr>
+                                        <p:cTn id="38" dur="220"/>
                                         <p:tgtEl>
                                           <p:spTgt spid="8"/>
                                         </p:tgtEl>
@@ -8657,14 +9807,14 @@
                                 </p:cTn>
                               </p:par>
                               <p:par>
-                                <p:cTn id="33" presetID="53" presetClass="entr" presetSubtype="16" fill="hold" grpId="0" nodeType="withEffect">
+                                <p:cTn id="39" presetID="53" presetClass="entr" presetSubtype="16" fill="hold" grpId="0" nodeType="withEffect">
                                   <p:stCondLst>
                                     <p:cond delay="350"/>
                                   </p:stCondLst>
                                   <p:childTnLst>
                                     <p:set>
                                       <p:cBhvr>
-                                        <p:cTn id="34" dur="1" fill="hold">
+                                        <p:cTn id="40" dur="1" fill="hold">
                                           <p:stCondLst>
                                             <p:cond delay="0"/>
                                           </p:stCondLst>
@@ -8682,7 +9832,7 @@
                                     </p:set>
                                     <p:anim calcmode="lin" valueType="num">
                                       <p:cBhvr>
-                                        <p:cTn id="35" dur="450" fill="hold"/>
+                                        <p:cTn id="41" dur="550" fill="hold"/>
                                         <p:tgtEl>
                                           <p:spTgt spid="9"/>
                                         </p:tgtEl>
@@ -8696,9 +9846,14 @@
                                             <p:strVal val="0"/>
                                           </p:val>
                                         </p:tav>
-                                        <p:tav tm="70000">
-                                          <p:val>
-                                            <p:strVal val="#ppt_w*1.07"/>
+                                        <p:tav tm="60000">
+                                          <p:val>
+                                            <p:strVal val="#ppt_w*1.14"/>
+                                          </p:val>
+                                        </p:tav>
+                                        <p:tav tm="82000">
+                                          <p:val>
+                                            <p:strVal val="#ppt_w*0.97"/>
                                           </p:val>
                                         </p:tav>
                                         <p:tav tm="100000">
@@ -8710,7 +9865,7 @@
                                     </p:anim>
                                     <p:anim calcmode="lin" valueType="num">
                                       <p:cBhvr>
-                                        <p:cTn id="36" dur="450" fill="hold"/>
+                                        <p:cTn id="42" dur="550" fill="hold"/>
                                         <p:tgtEl>
                                           <p:spTgt spid="9"/>
                                         </p:tgtEl>
@@ -8724,9 +9879,14 @@
                                             <p:strVal val="0"/>
                                           </p:val>
                                         </p:tav>
-                                        <p:tav tm="70000">
-                                          <p:val>
-                                            <p:strVal val="#ppt_h*1.07"/>
+                                        <p:tav tm="60000">
+                                          <p:val>
+                                            <p:strVal val="#ppt_h*1.14"/>
+                                          </p:val>
+                                        </p:tav>
+                                        <p:tav tm="82000">
+                                          <p:val>
+                                            <p:strVal val="#ppt_h*0.97"/>
                                           </p:val>
                                         </p:tav>
                                         <p:tav tm="100000">
@@ -8738,7 +9898,7 @@
                                     </p:anim>
                                     <p:animEffect transition="in" filter="fade">
                                       <p:cBhvr>
-                                        <p:cTn id="37" dur="225"/>
+                                        <p:cTn id="43" dur="220"/>
                                         <p:tgtEl>
                                           <p:spTgt spid="9"/>
                                         </p:tgtEl>
@@ -8754,26 +9914,26 @@
                     </p:cTn>
                   </p:par>
                   <p:par>
-                    <p:cTn id="45" fill="hold">
+                    <p:cTn id="54" fill="hold">
                       <p:stCondLst>
                         <p:cond delay="indefinite"/>
                       </p:stCondLst>
                       <p:childTnLst>
                         <p:par>
-                          <p:cTn id="46" fill="hold">
+                          <p:cTn id="55" fill="hold">
                             <p:stCondLst>
                               <p:cond delay="0"/>
                             </p:stCondLst>
                             <p:childTnLst>
                               <p:par>
-                                <p:cTn id="40" presetID="53" presetClass="entr" presetSubtype="16" fill="hold" grpId="0" nodeType="clickEffect">
+                                <p:cTn id="46" presetID="53" presetClass="entr" presetSubtype="16" fill="hold" grpId="0" nodeType="clickEffect">
                                   <p:stCondLst>
                                     <p:cond delay="0"/>
                                   </p:stCondLst>
                                   <p:childTnLst>
                                     <p:set>
                                       <p:cBhvr>
-                                        <p:cTn id="41" dur="1" fill="hold">
+                                        <p:cTn id="47" dur="1" fill="hold">
                                           <p:stCondLst>
                                             <p:cond delay="0"/>
                                           </p:stCondLst>
@@ -8791,7 +9951,7 @@
                                     </p:set>
                                     <p:anim calcmode="lin" valueType="num">
                                       <p:cBhvr>
-                                        <p:cTn id="42" dur="550" fill="hold"/>
+                                        <p:cTn id="48" dur="650" fill="hold"/>
                                         <p:tgtEl>
                                           <p:spTgt spid="10"/>
                                         </p:tgtEl>
@@ -8805,9 +9965,14 @@
                                             <p:strVal val="0"/>
                                           </p:val>
                                         </p:tav>
-                                        <p:tav tm="70000">
-                                          <p:val>
-                                            <p:strVal val="#ppt_w*1.07"/>
+                                        <p:tav tm="60000">
+                                          <p:val>
+                                            <p:strVal val="#ppt_w*1.14"/>
+                                          </p:val>
+                                        </p:tav>
+                                        <p:tav tm="82000">
+                                          <p:val>
+                                            <p:strVal val="#ppt_w*0.97"/>
                                           </p:val>
                                         </p:tav>
                                         <p:tav tm="100000">
@@ -8819,7 +9984,7 @@
                                     </p:anim>
                                     <p:anim calcmode="lin" valueType="num">
                                       <p:cBhvr>
-                                        <p:cTn id="43" dur="550" fill="hold"/>
+                                        <p:cTn id="49" dur="650" fill="hold"/>
                                         <p:tgtEl>
                                           <p:spTgt spid="10"/>
                                         </p:tgtEl>
@@ -8833,9 +9998,14 @@
                                             <p:strVal val="0"/>
                                           </p:val>
                                         </p:tav>
-                                        <p:tav tm="70000">
-                                          <p:val>
-                                            <p:strVal val="#ppt_h*1.07"/>
+                                        <p:tav tm="60000">
+                                          <p:val>
+                                            <p:strVal val="#ppt_h*1.14"/>
+                                          </p:val>
+                                        </p:tav>
+                                        <p:tav tm="82000">
+                                          <p:val>
+                                            <p:strVal val="#ppt_h*0.97"/>
                                           </p:val>
                                         </p:tav>
                                         <p:tav tm="100000">
@@ -8847,12 +10017,30 @@
                                     </p:anim>
                                     <p:animEffect transition="in" filter="fade">
                                       <p:cBhvr>
-                                        <p:cTn id="44" dur="275"/>
+                                        <p:cTn id="50" dur="260"/>
                                         <p:tgtEl>
                                           <p:spTgt spid="10"/>
                                         </p:tgtEl>
                                       </p:cBhvr>
                                     </p:animEffect>
+                                  </p:childTnLst>
+                                </p:cTn>
+                              </p:par>
+                              <p:par>
+                                <p:cTn id="51" presetID="6" presetClass="emph" presetSubtype="0" fill="hold" grpId="0" nodeType="withEffect">
+                                  <p:stCondLst>
+                                    <p:cond delay="750"/>
+                                  </p:stCondLst>
+                                  <p:childTnLst>
+                                    <p:animScale>
+                                      <p:cBhvr>
+                                        <p:cTn id="53" dur="180" autoRev="1" fill="hold"/>
+                                        <p:tgtEl>
+                                          <p:spTgt spid="10"/>
+                                        </p:tgtEl>
+                                      </p:cBhvr>
+                                      <p:by x="112000" y="112000"/>
+                                    </p:animScale>
                                   </p:childTnLst>
                                 </p:cTn>
                               </p:par>
@@ -8884,14 +10072,13 @@
       </p:par>
     </p:tnLst>
     <p:bldLst>
-      <p:bldP spid="1" grpId="0" animBg="1"/>
+      <p:bldP spid="3" grpId="0" animBg="1"/>
       <p:bldP spid="4" grpId="0" animBg="1"/>
       <p:bldP spid="5" grpId="0" animBg="1"/>
       <p:bldP spid="6" grpId="0" animBg="1"/>
       <p:bldP spid="7" grpId="0" animBg="1"/>
       <p:bldP spid="8" grpId="0" animBg="1"/>
       <p:bldP spid="9" grpId="0" animBg="1"/>
-      <p:bldP spid="10" grpId="0" animBg="1"/>
     </p:bldLst>
   </p:timing>
 </p:sld>
@@ -9430,7 +10617,7 @@
               <p:cTn id="2" dur="indefinite" nodeType="mainSeq">
                 <p:childTnLst>
                   <p:par>
-                    <p:cTn id="18" fill="hold">
+                    <p:cTn id="8" fill="hold">
                       <p:stCondLst>
                         <p:cond delay="indefinite"/>
                         <p:cond evt="onBegin" delay="0">
@@ -9439,7 +10626,7 @@
                       </p:stCondLst>
                       <p:childTnLst>
                         <p:par>
-                          <p:cTn id="19" fill="hold">
+                          <p:cTn id="9" fill="hold">
                             <p:stCondLst>
                               <p:cond delay="0"/>
                             </p:stCondLst>
@@ -9470,7 +10657,7 @@
                                     </p:set>
                                     <p:anim calcmode="lin" valueType="num">
                                       <p:cBhvr>
-                                        <p:cTn id="5" dur="450" fill="hold"/>
+                                        <p:cTn id="5" dur="550" fill="hold"/>
                                         <p:tgtEl>
                                           <p:spTgt spid="3"/>
                                         </p:tgtEl>
@@ -9484,9 +10671,14 @@
                                             <p:strVal val="0"/>
                                           </p:val>
                                         </p:tav>
-                                        <p:tav tm="70000">
-                                          <p:val>
-                                            <p:strVal val="#ppt_w*1.07"/>
+                                        <p:tav tm="60000">
+                                          <p:val>
+                                            <p:strVal val="#ppt_w*1.14"/>
+                                          </p:val>
+                                        </p:tav>
+                                        <p:tav tm="82000">
+                                          <p:val>
+                                            <p:strVal val="#ppt_w*0.97"/>
                                           </p:val>
                                         </p:tav>
                                         <p:tav tm="100000">
@@ -9498,7 +10690,7 @@
                                     </p:anim>
                                     <p:anim calcmode="lin" valueType="num">
                                       <p:cBhvr>
-                                        <p:cTn id="6" dur="450" fill="hold"/>
+                                        <p:cTn id="6" dur="550" fill="hold"/>
                                         <p:tgtEl>
                                           <p:spTgt spid="3"/>
                                         </p:tgtEl>
@@ -9512,9 +10704,14 @@
                                             <p:strVal val="0"/>
                                           </p:val>
                                         </p:tav>
-                                        <p:tav tm="70000">
-                                          <p:val>
-                                            <p:strVal val="#ppt_h*1.07"/>
+                                        <p:tav tm="60000">
+                                          <p:val>
+                                            <p:strVal val="#ppt_h*1.14"/>
+                                          </p:val>
+                                        </p:tav>
+                                        <p:tav tm="82000">
+                                          <p:val>
+                                            <p:strVal val="#ppt_h*0.97"/>
                                           </p:val>
                                         </p:tav>
                                         <p:tav tm="100000">
@@ -9526,191 +10723,9 @@
                                     </p:anim>
                                     <p:animEffect transition="in" filter="fade">
                                       <p:cBhvr>
-                                        <p:cTn id="7" dur="225"/>
+                                        <p:cTn id="7" dur="220"/>
                                         <p:tgtEl>
                                           <p:spTgt spid="3"/>
-                                        </p:tgtEl>
-                                      </p:cBhvr>
-                                    </p:animEffect>
-                                  </p:childTnLst>
-                                </p:cTn>
-                              </p:par>
-                              <p:par>
-                                <p:cTn id="8" presetID="53" presetClass="entr" presetSubtype="16" fill="hold" grpId="0" nodeType="withEffect">
-                                  <p:stCondLst>
-                                    <p:cond delay="200"/>
-                                  </p:stCondLst>
-                                  <p:childTnLst>
-                                    <p:set>
-                                      <p:cBhvr>
-                                        <p:cTn id="9" dur="1" fill="hold">
-                                          <p:stCondLst>
-                                            <p:cond delay="0"/>
-                                          </p:stCondLst>
-                                        </p:cTn>
-                                        <p:tgtEl>
-                                          <p:spTgt spid="4"/>
-                                        </p:tgtEl>
-                                        <p:attrNameLst>
-                                          <p:attrName>style.visibility</p:attrName>
-                                        </p:attrNameLst>
-                                      </p:cBhvr>
-                                      <p:to>
-                                        <p:strVal val="visible"/>
-                                      </p:to>
-                                    </p:set>
-                                    <p:anim calcmode="lin" valueType="num">
-                                      <p:cBhvr>
-                                        <p:cTn id="10" dur="600" fill="hold"/>
-                                        <p:tgtEl>
-                                          <p:spTgt spid="4"/>
-                                        </p:tgtEl>
-                                        <p:attrNameLst>
-                                          <p:attrName>ppt_w</p:attrName>
-                                        </p:attrNameLst>
-                                      </p:cBhvr>
-                                      <p:tavLst>
-                                        <p:tav tm="0">
-                                          <p:val>
-                                            <p:strVal val="0"/>
-                                          </p:val>
-                                        </p:tav>
-                                        <p:tav tm="70000">
-                                          <p:val>
-                                            <p:strVal val="#ppt_w*1.07"/>
-                                          </p:val>
-                                        </p:tav>
-                                        <p:tav tm="100000">
-                                          <p:val>
-                                            <p:strVal val="#ppt_w"/>
-                                          </p:val>
-                                        </p:tav>
-                                      </p:tavLst>
-                                    </p:anim>
-                                    <p:anim calcmode="lin" valueType="num">
-                                      <p:cBhvr>
-                                        <p:cTn id="11" dur="600" fill="hold"/>
-                                        <p:tgtEl>
-                                          <p:spTgt spid="4"/>
-                                        </p:tgtEl>
-                                        <p:attrNameLst>
-                                          <p:attrName>ppt_h</p:attrName>
-                                        </p:attrNameLst>
-                                      </p:cBhvr>
-                                      <p:tavLst>
-                                        <p:tav tm="0">
-                                          <p:val>
-                                            <p:strVal val="0"/>
-                                          </p:val>
-                                        </p:tav>
-                                        <p:tav tm="70000">
-                                          <p:val>
-                                            <p:strVal val="#ppt_h*1.07"/>
-                                          </p:val>
-                                        </p:tav>
-                                        <p:tav tm="100000">
-                                          <p:val>
-                                            <p:strVal val="#ppt_h"/>
-                                          </p:val>
-                                        </p:tav>
-                                      </p:tavLst>
-                                    </p:anim>
-                                    <p:animEffect transition="in" filter="fade">
-                                      <p:cBhvr>
-                                        <p:cTn id="12" dur="300"/>
-                                        <p:tgtEl>
-                                          <p:spTgt spid="4"/>
-                                        </p:tgtEl>
-                                      </p:cBhvr>
-                                    </p:animEffect>
-                                  </p:childTnLst>
-                                </p:cTn>
-                              </p:par>
-                              <p:par>
-                                <p:cTn id="13" presetID="53" presetClass="entr" presetSubtype="16" fill="hold" grpId="0" nodeType="withEffect">
-                                  <p:stCondLst>
-                                    <p:cond delay="500"/>
-                                  </p:stCondLst>
-                                  <p:childTnLst>
-                                    <p:set>
-                                      <p:cBhvr>
-                                        <p:cTn id="14" dur="1" fill="hold">
-                                          <p:stCondLst>
-                                            <p:cond delay="0"/>
-                                          </p:stCondLst>
-                                        </p:cTn>
-                                        <p:tgtEl>
-                                          <p:spTgt spid="5"/>
-                                        </p:tgtEl>
-                                        <p:attrNameLst>
-                                          <p:attrName>style.visibility</p:attrName>
-                                        </p:attrNameLst>
-                                      </p:cBhvr>
-                                      <p:to>
-                                        <p:strVal val="visible"/>
-                                      </p:to>
-                                    </p:set>
-                                    <p:anim calcmode="lin" valueType="num">
-                                      <p:cBhvr>
-                                        <p:cTn id="15" dur="450" fill="hold"/>
-                                        <p:tgtEl>
-                                          <p:spTgt spid="5"/>
-                                        </p:tgtEl>
-                                        <p:attrNameLst>
-                                          <p:attrName>ppt_w</p:attrName>
-                                        </p:attrNameLst>
-                                      </p:cBhvr>
-                                      <p:tavLst>
-                                        <p:tav tm="0">
-                                          <p:val>
-                                            <p:strVal val="0"/>
-                                          </p:val>
-                                        </p:tav>
-                                        <p:tav tm="70000">
-                                          <p:val>
-                                            <p:strVal val="#ppt_w*1.07"/>
-                                          </p:val>
-                                        </p:tav>
-                                        <p:tav tm="100000">
-                                          <p:val>
-                                            <p:strVal val="#ppt_w"/>
-                                          </p:val>
-                                        </p:tav>
-                                      </p:tavLst>
-                                    </p:anim>
-                                    <p:anim calcmode="lin" valueType="num">
-                                      <p:cBhvr>
-                                        <p:cTn id="16" dur="450" fill="hold"/>
-                                        <p:tgtEl>
-                                          <p:spTgt spid="5"/>
-                                        </p:tgtEl>
-                                        <p:attrNameLst>
-                                          <p:attrName>ppt_h</p:attrName>
-                                        </p:attrNameLst>
-                                      </p:cBhvr>
-                                      <p:tavLst>
-                                        <p:tav tm="0">
-                                          <p:val>
-                                            <p:strVal val="0"/>
-                                          </p:val>
-                                        </p:tav>
-                                        <p:tav tm="70000">
-                                          <p:val>
-                                            <p:strVal val="#ppt_h*1.07"/>
-                                          </p:val>
-                                        </p:tav>
-                                        <p:tav tm="100000">
-                                          <p:val>
-                                            <p:strVal val="#ppt_h"/>
-                                          </p:val>
-                                        </p:tav>
-                                      </p:tavLst>
-                                    </p:anim>
-                                    <p:animEffect transition="in" filter="fade">
-                                      <p:cBhvr>
-                                        <p:cTn id="17" dur="225"/>
-                                        <p:tgtEl>
-                                          <p:spTgt spid="5"/>
                                         </p:tgtEl>
                                       </p:cBhvr>
                                     </p:animEffect>
@@ -9724,67 +10739,32 @@
                     </p:cTn>
                   </p:par>
                   <p:par>
-                    <p:cTn id="37" fill="hold">
+                    <p:cTn id="20" fill="hold">
                       <p:stCondLst>
                         <p:cond delay="indefinite"/>
                       </p:stCondLst>
                       <p:childTnLst>
                         <p:par>
-                          <p:cTn id="38" fill="hold">
+                          <p:cTn id="21" fill="hold">
                             <p:stCondLst>
                               <p:cond delay="0"/>
                             </p:stCondLst>
                             <p:childTnLst>
                               <p:par>
-                                <p:cTn id="20" presetID="10" presetClass="exit" presetSubtype="0" fill="hold" grpId="1" nodeType="clickEffect">
+                                <p:cTn id="10" presetID="53" presetClass="entr" presetSubtype="16" fill="hold" grpId="0" nodeType="clickEffect">
                                   <p:stCondLst>
                                     <p:cond delay="0"/>
                                   </p:stCondLst>
                                   <p:childTnLst>
-                                    <p:animEffect transition="out" filter="fade">
-                                      <p:cBhvr>
-                                        <p:cTn id="22" dur="250"/>
-                                        <p:tgtEl>
-                                          <p:spTgt spid="4"/>
-                                        </p:tgtEl>
-                                      </p:cBhvr>
-                                    </p:animEffect>
                                     <p:set>
                                       <p:cBhvr>
-                                        <p:cTn id="23" dur="1" fill="hold">
-                                          <p:stCondLst>
-                                            <p:cond delay="249"/>
-                                          </p:stCondLst>
-                                        </p:cTn>
-                                        <p:tgtEl>
-                                          <p:spTgt spid="4"/>
-                                        </p:tgtEl>
-                                        <p:attrNameLst>
-                                          <p:attrName>style.visibility</p:attrName>
-                                        </p:attrNameLst>
-                                      </p:cBhvr>
-                                      <p:to>
-                                        <p:strVal val="hidden"/>
-                                      </p:to>
-                                    </p:set>
-                                  </p:childTnLst>
-                                </p:cTn>
-                              </p:par>
-                              <p:par>
-                                <p:cTn id="24" presetID="53" presetClass="entr" presetSubtype="16" fill="hold" grpId="0" nodeType="withEffect">
-                                  <p:stCondLst>
-                                    <p:cond delay="120"/>
-                                  </p:stCondLst>
-                                  <p:childTnLst>
-                                    <p:set>
-                                      <p:cBhvr>
-                                        <p:cTn id="25" dur="1" fill="hold">
+                                        <p:cTn id="11" dur="1" fill="hold">
                                           <p:stCondLst>
                                             <p:cond delay="0"/>
                                           </p:stCondLst>
                                         </p:cTn>
                                         <p:tgtEl>
-                                          <p:spTgt spid="7"/>
+                                          <p:spTgt spid="4"/>
                                         </p:tgtEl>
                                         <p:attrNameLst>
                                           <p:attrName>style.visibility</p:attrName>
@@ -9796,9 +10776,9 @@
                                     </p:set>
                                     <p:anim calcmode="lin" valueType="num">
                                       <p:cBhvr>
-                                        <p:cTn id="26" dur="450" fill="hold"/>
-                                        <p:tgtEl>
-                                          <p:spTgt spid="7"/>
+                                        <p:cTn id="12" dur="650" fill="hold"/>
+                                        <p:tgtEl>
+                                          <p:spTgt spid="4"/>
                                         </p:tgtEl>
                                         <p:attrNameLst>
                                           <p:attrName>ppt_w</p:attrName>
@@ -9810,9 +10790,14 @@
                                             <p:strVal val="0"/>
                                           </p:val>
                                         </p:tav>
-                                        <p:tav tm="70000">
-                                          <p:val>
-                                            <p:strVal val="#ppt_w*1.07"/>
+                                        <p:tav tm="60000">
+                                          <p:val>
+                                            <p:strVal val="#ppt_w*1.14"/>
+                                          </p:val>
+                                        </p:tav>
+                                        <p:tav tm="82000">
+                                          <p:val>
+                                            <p:strVal val="#ppt_w*0.97"/>
                                           </p:val>
                                         </p:tav>
                                         <p:tav tm="100000">
@@ -9824,9 +10809,9 @@
                                     </p:anim>
                                     <p:anim calcmode="lin" valueType="num">
                                       <p:cBhvr>
-                                        <p:cTn id="27" dur="450" fill="hold"/>
-                                        <p:tgtEl>
-                                          <p:spTgt spid="7"/>
+                                        <p:cTn id="13" dur="650" fill="hold"/>
+                                        <p:tgtEl>
+                                          <p:spTgt spid="4"/>
                                         </p:tgtEl>
                                         <p:attrNameLst>
                                           <p:attrName>ppt_h</p:attrName>
@@ -9838,9 +10823,14 @@
                                             <p:strVal val="0"/>
                                           </p:val>
                                         </p:tav>
-                                        <p:tav tm="70000">
-                                          <p:val>
-                                            <p:strVal val="#ppt_h*1.07"/>
+                                        <p:tav tm="60000">
+                                          <p:val>
+                                            <p:strVal val="#ppt_h*1.14"/>
+                                          </p:val>
+                                        </p:tav>
+                                        <p:tav tm="82000">
+                                          <p:val>
+                                            <p:strVal val="#ppt_h*0.97"/>
                                           </p:val>
                                         </p:tav>
                                         <p:tav tm="100000">
@@ -9852,9 +10842,9 @@
                                     </p:anim>
                                     <p:animEffect transition="in" filter="fade">
                                       <p:cBhvr>
-                                        <p:cTn id="28" dur="225"/>
-                                        <p:tgtEl>
-                                          <p:spTgt spid="7"/>
+                                        <p:cTn id="14" dur="260"/>
+                                        <p:tgtEl>
+                                          <p:spTgt spid="4"/>
                                         </p:tgtEl>
                                       </p:cBhvr>
                                     </p:animEffect>
@@ -9862,55 +10852,20 @@
                                 </p:cTn>
                               </p:par>
                               <p:par>
-                                <p:cTn id="29" presetID="22" presetClass="entr" presetSubtype="8" fill="hold" grpId="0" nodeType="withEffect">
+                                <p:cTn id="15" presetID="53" presetClass="entr" presetSubtype="16" fill="hold" grpId="0" nodeType="withEffect">
                                   <p:stCondLst>
-                                    <p:cond delay="0"/>
+                                    <p:cond delay="300"/>
                                   </p:stCondLst>
                                   <p:childTnLst>
                                     <p:set>
                                       <p:cBhvr>
-                                        <p:cTn id="30" dur="1" fill="hold">
+                                        <p:cTn id="16" dur="1" fill="hold">
                                           <p:stCondLst>
                                             <p:cond delay="0"/>
                                           </p:stCondLst>
                                         </p:cTn>
                                         <p:tgtEl>
-                                          <p:spTgt spid="6"/>
-                                        </p:tgtEl>
-                                        <p:attrNameLst>
-                                          <p:attrName>style.visibility</p:attrName>
-                                        </p:attrNameLst>
-                                      </p:cBhvr>
-                                      <p:to>
-                                        <p:strVal val="visible"/>
-                                      </p:to>
-                                    </p:set>
-                                    <p:animEffect transition="in" filter="wipe(left)">
-                                      <p:cBhvr>
-                                        <p:cTn id="31" dur="300"/>
-                                        <p:tgtEl>
-                                          <p:spTgt spid="6"/>
-                                        </p:tgtEl>
-                                      </p:cBhvr>
-                                    </p:animEffect>
-                                  </p:childTnLst>
-                                </p:cTn>
-                              </p:par>
-                              <p:par>
-                                <p:cTn id="32" presetID="53" presetClass="entr" presetSubtype="16" fill="hold" grpId="0" nodeType="withEffect">
-                                  <p:stCondLst>
-                                    <p:cond delay="250"/>
-                                  </p:stCondLst>
-                                  <p:childTnLst>
-                                    <p:set>
-                                      <p:cBhvr>
-                                        <p:cTn id="33" dur="1" fill="hold">
-                                          <p:stCondLst>
-                                            <p:cond delay="0"/>
-                                          </p:stCondLst>
-                                        </p:cTn>
-                                        <p:tgtEl>
-                                          <p:spTgt spid="8"/>
+                                          <p:spTgt spid="5"/>
                                         </p:tgtEl>
                                         <p:attrNameLst>
                                           <p:attrName>style.visibility</p:attrName>
@@ -9922,9 +10877,9 @@
                                     </p:set>
                                     <p:anim calcmode="lin" valueType="num">
                                       <p:cBhvr>
-                                        <p:cTn id="34" dur="450" fill="hold"/>
-                                        <p:tgtEl>
-                                          <p:spTgt spid="8"/>
+                                        <p:cTn id="17" dur="550" fill="hold"/>
+                                        <p:tgtEl>
+                                          <p:spTgt spid="5"/>
                                         </p:tgtEl>
                                         <p:attrNameLst>
                                           <p:attrName>ppt_w</p:attrName>
@@ -9936,9 +10891,14 @@
                                             <p:strVal val="0"/>
                                           </p:val>
                                         </p:tav>
-                                        <p:tav tm="70000">
-                                          <p:val>
-                                            <p:strVal val="#ppt_w*1.07"/>
+                                        <p:tav tm="60000">
+                                          <p:val>
+                                            <p:strVal val="#ppt_w*1.14"/>
+                                          </p:val>
+                                        </p:tav>
+                                        <p:tav tm="82000">
+                                          <p:val>
+                                            <p:strVal val="#ppt_w*0.97"/>
                                           </p:val>
                                         </p:tav>
                                         <p:tav tm="100000">
@@ -9950,9 +10910,9 @@
                                     </p:anim>
                                     <p:anim calcmode="lin" valueType="num">
                                       <p:cBhvr>
-                                        <p:cTn id="35" dur="450" fill="hold"/>
-                                        <p:tgtEl>
-                                          <p:spTgt spid="8"/>
+                                        <p:cTn id="18" dur="550" fill="hold"/>
+                                        <p:tgtEl>
+                                          <p:spTgt spid="5"/>
                                         </p:tgtEl>
                                         <p:attrNameLst>
                                           <p:attrName>ppt_h</p:attrName>
@@ -9964,9 +10924,14 @@
                                             <p:strVal val="0"/>
                                           </p:val>
                                         </p:tav>
-                                        <p:tav tm="70000">
-                                          <p:val>
-                                            <p:strVal val="#ppt_h*1.07"/>
+                                        <p:tav tm="60000">
+                                          <p:val>
+                                            <p:strVal val="#ppt_h*1.14"/>
+                                          </p:val>
+                                        </p:tav>
+                                        <p:tav tm="82000">
+                                          <p:val>
+                                            <p:strVal val="#ppt_h*0.97"/>
                                           </p:val>
                                         </p:tav>
                                         <p:tav tm="100000">
@@ -9978,9 +10943,9 @@
                                     </p:anim>
                                     <p:animEffect transition="in" filter="fade">
                                       <p:cBhvr>
-                                        <p:cTn id="36" dur="225"/>
-                                        <p:tgtEl>
-                                          <p:spTgt spid="8"/>
+                                        <p:cTn id="19" dur="220"/>
+                                        <p:tgtEl>
+                                          <p:spTgt spid="5"/>
                                         </p:tgtEl>
                                       </p:cBhvr>
                                     </p:animEffect>
@@ -9994,40 +10959,40 @@
                     </p:cTn>
                   </p:par>
                   <p:par>
-                    <p:cTn id="56" fill="hold">
+                    <p:cTn id="39" fill="hold">
                       <p:stCondLst>
                         <p:cond delay="indefinite"/>
                       </p:stCondLst>
                       <p:childTnLst>
                         <p:par>
-                          <p:cTn id="57" fill="hold">
+                          <p:cTn id="40" fill="hold">
                             <p:stCondLst>
                               <p:cond delay="0"/>
                             </p:stCondLst>
                             <p:childTnLst>
                               <p:par>
-                                <p:cTn id="39" presetID="10" presetClass="exit" presetSubtype="0" fill="hold" grpId="1" nodeType="clickEffect">
+                                <p:cTn id="22" presetID="10" presetClass="exit" presetSubtype="0" fill="hold" grpId="1" nodeType="clickEffect">
                                   <p:stCondLst>
                                     <p:cond delay="0"/>
                                   </p:stCondLst>
                                   <p:childTnLst>
                                     <p:animEffect transition="out" filter="fade">
                                       <p:cBhvr>
-                                        <p:cTn id="41" dur="250"/>
-                                        <p:tgtEl>
-                                          <p:spTgt spid="7"/>
+                                        <p:cTn id="24" dur="250"/>
+                                        <p:tgtEl>
+                                          <p:spTgt spid="4"/>
                                         </p:tgtEl>
                                       </p:cBhvr>
                                     </p:animEffect>
                                     <p:set>
                                       <p:cBhvr>
-                                        <p:cTn id="42" dur="1" fill="hold">
+                                        <p:cTn id="25" dur="1" fill="hold">
                                           <p:stCondLst>
                                             <p:cond delay="249"/>
                                           </p:stCondLst>
                                         </p:cTn>
                                         <p:tgtEl>
-                                          <p:spTgt spid="7"/>
+                                          <p:spTgt spid="4"/>
                                         </p:tgtEl>
                                         <p:attrNameLst>
                                           <p:attrName>style.visibility</p:attrName>
@@ -10041,20 +11006,20 @@
                                 </p:cTn>
                               </p:par>
                               <p:par>
-                                <p:cTn id="43" presetID="53" presetClass="entr" presetSubtype="16" fill="hold" grpId="0" nodeType="withEffect">
+                                <p:cTn id="26" presetID="53" presetClass="entr" presetSubtype="16" fill="hold" grpId="0" nodeType="withEffect">
                                   <p:stCondLst>
                                     <p:cond delay="120"/>
                                   </p:stCondLst>
                                   <p:childTnLst>
                                     <p:set>
                                       <p:cBhvr>
-                                        <p:cTn id="44" dur="1" fill="hold">
+                                        <p:cTn id="27" dur="1" fill="hold">
                                           <p:stCondLst>
                                             <p:cond delay="0"/>
                                           </p:stCondLst>
                                         </p:cTn>
                                         <p:tgtEl>
-                                          <p:spTgt spid="10"/>
+                                          <p:spTgt spid="7"/>
                                         </p:tgtEl>
                                         <p:attrNameLst>
                                           <p:attrName>style.visibility</p:attrName>
@@ -10066,9 +11031,9 @@
                                     </p:set>
                                     <p:anim calcmode="lin" valueType="num">
                                       <p:cBhvr>
-                                        <p:cTn id="45" dur="450" fill="hold"/>
-                                        <p:tgtEl>
-                                          <p:spTgt spid="10"/>
+                                        <p:cTn id="28" dur="550" fill="hold"/>
+                                        <p:tgtEl>
+                                          <p:spTgt spid="7"/>
                                         </p:tgtEl>
                                         <p:attrNameLst>
                                           <p:attrName>ppt_w</p:attrName>
@@ -10080,9 +11045,14 @@
                                             <p:strVal val="0"/>
                                           </p:val>
                                         </p:tav>
-                                        <p:tav tm="70000">
-                                          <p:val>
-                                            <p:strVal val="#ppt_w*1.07"/>
+                                        <p:tav tm="60000">
+                                          <p:val>
+                                            <p:strVal val="#ppt_w*1.14"/>
+                                          </p:val>
+                                        </p:tav>
+                                        <p:tav tm="82000">
+                                          <p:val>
+                                            <p:strVal val="#ppt_w*0.97"/>
                                           </p:val>
                                         </p:tav>
                                         <p:tav tm="100000">
@@ -10094,9 +11064,9 @@
                                     </p:anim>
                                     <p:anim calcmode="lin" valueType="num">
                                       <p:cBhvr>
-                                        <p:cTn id="46" dur="450" fill="hold"/>
-                                        <p:tgtEl>
-                                          <p:spTgt spid="10"/>
+                                        <p:cTn id="29" dur="550" fill="hold"/>
+                                        <p:tgtEl>
+                                          <p:spTgt spid="7"/>
                                         </p:tgtEl>
                                         <p:attrNameLst>
                                           <p:attrName>ppt_h</p:attrName>
@@ -10108,9 +11078,14 @@
                                             <p:strVal val="0"/>
                                           </p:val>
                                         </p:tav>
-                                        <p:tav tm="70000">
-                                          <p:val>
-                                            <p:strVal val="#ppt_h*1.07"/>
+                                        <p:tav tm="60000">
+                                          <p:val>
+                                            <p:strVal val="#ppt_h*1.14"/>
+                                          </p:val>
+                                        </p:tav>
+                                        <p:tav tm="82000">
+                                          <p:val>
+                                            <p:strVal val="#ppt_h*0.97"/>
                                           </p:val>
                                         </p:tav>
                                         <p:tav tm="100000">
@@ -10122,9 +11097,9 @@
                                     </p:anim>
                                     <p:animEffect transition="in" filter="fade">
                                       <p:cBhvr>
-                                        <p:cTn id="47" dur="225"/>
-                                        <p:tgtEl>
-                                          <p:spTgt spid="10"/>
+                                        <p:cTn id="30" dur="220"/>
+                                        <p:tgtEl>
+                                          <p:spTgt spid="7"/>
                                         </p:tgtEl>
                                       </p:cBhvr>
                                     </p:animEffect>
@@ -10132,20 +11107,20 @@
                                 </p:cTn>
                               </p:par>
                               <p:par>
-                                <p:cTn id="48" presetID="22" presetClass="entr" presetSubtype="8" fill="hold" grpId="0" nodeType="withEffect">
+                                <p:cTn id="31" presetID="22" presetClass="entr" presetSubtype="8" fill="hold" grpId="0" nodeType="withEffect">
                                   <p:stCondLst>
                                     <p:cond delay="0"/>
                                   </p:stCondLst>
                                   <p:childTnLst>
                                     <p:set>
                                       <p:cBhvr>
-                                        <p:cTn id="49" dur="1" fill="hold">
+                                        <p:cTn id="32" dur="1" fill="hold">
                                           <p:stCondLst>
                                             <p:cond delay="0"/>
                                           </p:stCondLst>
                                         </p:cTn>
                                         <p:tgtEl>
-                                          <p:spTgt spid="9"/>
+                                          <p:spTgt spid="6"/>
                                         </p:tgtEl>
                                         <p:attrNameLst>
                                           <p:attrName>style.visibility</p:attrName>
@@ -10157,9 +11132,9 @@
                                     </p:set>
                                     <p:animEffect transition="in" filter="wipe(left)">
                                       <p:cBhvr>
-                                        <p:cTn id="50" dur="300"/>
-                                        <p:tgtEl>
-                                          <p:spTgt spid="9"/>
+                                        <p:cTn id="33" dur="300"/>
+                                        <p:tgtEl>
+                                          <p:spTgt spid="6"/>
                                         </p:tgtEl>
                                       </p:cBhvr>
                                     </p:animEffect>
@@ -10167,20 +11142,20 @@
                                 </p:cTn>
                               </p:par>
                               <p:par>
-                                <p:cTn id="51" presetID="53" presetClass="entr" presetSubtype="16" fill="hold" grpId="0" nodeType="withEffect">
+                                <p:cTn id="34" presetID="53" presetClass="entr" presetSubtype="16" fill="hold" grpId="0" nodeType="withEffect">
                                   <p:stCondLst>
                                     <p:cond delay="250"/>
                                   </p:stCondLst>
                                   <p:childTnLst>
                                     <p:set>
                                       <p:cBhvr>
-                                        <p:cTn id="52" dur="1" fill="hold">
+                                        <p:cTn id="35" dur="1" fill="hold">
                                           <p:stCondLst>
                                             <p:cond delay="0"/>
                                           </p:stCondLst>
                                         </p:cTn>
                                         <p:tgtEl>
-                                          <p:spTgt spid="11"/>
+                                          <p:spTgt spid="8"/>
                                         </p:tgtEl>
                                         <p:attrNameLst>
                                           <p:attrName>style.visibility</p:attrName>
@@ -10192,9 +11167,9 @@
                                     </p:set>
                                     <p:anim calcmode="lin" valueType="num">
                                       <p:cBhvr>
-                                        <p:cTn id="53" dur="450" fill="hold"/>
-                                        <p:tgtEl>
-                                          <p:spTgt spid="11"/>
+                                        <p:cTn id="36" dur="550" fill="hold"/>
+                                        <p:tgtEl>
+                                          <p:spTgt spid="8"/>
                                         </p:tgtEl>
                                         <p:attrNameLst>
                                           <p:attrName>ppt_w</p:attrName>
@@ -10206,9 +11181,14 @@
                                             <p:strVal val="0"/>
                                           </p:val>
                                         </p:tav>
-                                        <p:tav tm="70000">
-                                          <p:val>
-                                            <p:strVal val="#ppt_w*1.07"/>
+                                        <p:tav tm="60000">
+                                          <p:val>
+                                            <p:strVal val="#ppt_w*1.14"/>
+                                          </p:val>
+                                        </p:tav>
+                                        <p:tav tm="82000">
+                                          <p:val>
+                                            <p:strVal val="#ppt_w*0.97"/>
                                           </p:val>
                                         </p:tav>
                                         <p:tav tm="100000">
@@ -10220,9 +11200,9 @@
                                     </p:anim>
                                     <p:anim calcmode="lin" valueType="num">
                                       <p:cBhvr>
-                                        <p:cTn id="54" dur="450" fill="hold"/>
-                                        <p:tgtEl>
-                                          <p:spTgt spid="11"/>
+                                        <p:cTn id="37" dur="550" fill="hold"/>
+                                        <p:tgtEl>
+                                          <p:spTgt spid="8"/>
                                         </p:tgtEl>
                                         <p:attrNameLst>
                                           <p:attrName>ppt_h</p:attrName>
@@ -10234,9 +11214,14 @@
                                             <p:strVal val="0"/>
                                           </p:val>
                                         </p:tav>
-                                        <p:tav tm="70000">
-                                          <p:val>
-                                            <p:strVal val="#ppt_h*1.07"/>
+                                        <p:tav tm="60000">
+                                          <p:val>
+                                            <p:strVal val="#ppt_h*1.14"/>
+                                          </p:val>
+                                        </p:tav>
+                                        <p:tav tm="82000">
+                                          <p:val>
+                                            <p:strVal val="#ppt_h*0.97"/>
                                           </p:val>
                                         </p:tav>
                                         <p:tav tm="100000">
@@ -10248,9 +11233,9 @@
                                     </p:anim>
                                     <p:animEffect transition="in" filter="fade">
                                       <p:cBhvr>
-                                        <p:cTn id="55" dur="225"/>
-                                        <p:tgtEl>
-                                          <p:spTgt spid="11"/>
+                                        <p:cTn id="38" dur="220"/>
+                                        <p:tgtEl>
+                                          <p:spTgt spid="8"/>
                                         </p:tgtEl>
                                       </p:cBhvr>
                                     </p:animEffect>
@@ -10264,40 +11249,40 @@
                     </p:cTn>
                   </p:par>
                   <p:par>
-                    <p:cTn id="75" fill="hold">
+                    <p:cTn id="58" fill="hold">
                       <p:stCondLst>
                         <p:cond delay="indefinite"/>
                       </p:stCondLst>
                       <p:childTnLst>
                         <p:par>
-                          <p:cTn id="76" fill="hold">
+                          <p:cTn id="59" fill="hold">
                             <p:stCondLst>
                               <p:cond delay="0"/>
                             </p:stCondLst>
                             <p:childTnLst>
                               <p:par>
-                                <p:cTn id="58" presetID="10" presetClass="exit" presetSubtype="0" fill="hold" grpId="1" nodeType="clickEffect">
+                                <p:cTn id="41" presetID="10" presetClass="exit" presetSubtype="0" fill="hold" grpId="1" nodeType="clickEffect">
                                   <p:stCondLst>
                                     <p:cond delay="0"/>
                                   </p:stCondLst>
                                   <p:childTnLst>
                                     <p:animEffect transition="out" filter="fade">
                                       <p:cBhvr>
-                                        <p:cTn id="60" dur="250"/>
-                                        <p:tgtEl>
-                                          <p:spTgt spid="10"/>
+                                        <p:cTn id="43" dur="250"/>
+                                        <p:tgtEl>
+                                          <p:spTgt spid="7"/>
                                         </p:tgtEl>
                                       </p:cBhvr>
                                     </p:animEffect>
                                     <p:set>
                                       <p:cBhvr>
-                                        <p:cTn id="61" dur="1" fill="hold">
+                                        <p:cTn id="44" dur="1" fill="hold">
                                           <p:stCondLst>
                                             <p:cond delay="249"/>
                                           </p:stCondLst>
                                         </p:cTn>
                                         <p:tgtEl>
-                                          <p:spTgt spid="10"/>
+                                          <p:spTgt spid="7"/>
                                         </p:tgtEl>
                                         <p:attrNameLst>
                                           <p:attrName>style.visibility</p:attrName>
@@ -10311,20 +11296,20 @@
                                 </p:cTn>
                               </p:par>
                               <p:par>
-                                <p:cTn id="62" presetID="53" presetClass="entr" presetSubtype="16" fill="hold" grpId="0" nodeType="withEffect">
+                                <p:cTn id="45" presetID="53" presetClass="entr" presetSubtype="16" fill="hold" grpId="0" nodeType="withEffect">
                                   <p:stCondLst>
                                     <p:cond delay="120"/>
                                   </p:stCondLst>
                                   <p:childTnLst>
                                     <p:set>
                                       <p:cBhvr>
-                                        <p:cTn id="63" dur="1" fill="hold">
+                                        <p:cTn id="46" dur="1" fill="hold">
                                           <p:stCondLst>
                                             <p:cond delay="0"/>
                                           </p:stCondLst>
                                         </p:cTn>
                                         <p:tgtEl>
-                                          <p:spTgt spid="13"/>
+                                          <p:spTgt spid="10"/>
                                         </p:tgtEl>
                                         <p:attrNameLst>
                                           <p:attrName>style.visibility</p:attrName>
@@ -10336,9 +11321,9 @@
                                     </p:set>
                                     <p:anim calcmode="lin" valueType="num">
                                       <p:cBhvr>
-                                        <p:cTn id="64" dur="450" fill="hold"/>
-                                        <p:tgtEl>
-                                          <p:spTgt spid="13"/>
+                                        <p:cTn id="47" dur="550" fill="hold"/>
+                                        <p:tgtEl>
+                                          <p:spTgt spid="10"/>
                                         </p:tgtEl>
                                         <p:attrNameLst>
                                           <p:attrName>ppt_w</p:attrName>
@@ -10350,9 +11335,14 @@
                                             <p:strVal val="0"/>
                                           </p:val>
                                         </p:tav>
-                                        <p:tav tm="70000">
-                                          <p:val>
-                                            <p:strVal val="#ppt_w*1.07"/>
+                                        <p:tav tm="60000">
+                                          <p:val>
+                                            <p:strVal val="#ppt_w*1.14"/>
+                                          </p:val>
+                                        </p:tav>
+                                        <p:tav tm="82000">
+                                          <p:val>
+                                            <p:strVal val="#ppt_w*0.97"/>
                                           </p:val>
                                         </p:tav>
                                         <p:tav tm="100000">
@@ -10364,9 +11354,9 @@
                                     </p:anim>
                                     <p:anim calcmode="lin" valueType="num">
                                       <p:cBhvr>
-                                        <p:cTn id="65" dur="450" fill="hold"/>
-                                        <p:tgtEl>
-                                          <p:spTgt spid="13"/>
+                                        <p:cTn id="48" dur="550" fill="hold"/>
+                                        <p:tgtEl>
+                                          <p:spTgt spid="10"/>
                                         </p:tgtEl>
                                         <p:attrNameLst>
                                           <p:attrName>ppt_h</p:attrName>
@@ -10378,9 +11368,14 @@
                                             <p:strVal val="0"/>
                                           </p:val>
                                         </p:tav>
-                                        <p:tav tm="70000">
-                                          <p:val>
-                                            <p:strVal val="#ppt_h*1.07"/>
+                                        <p:tav tm="60000">
+                                          <p:val>
+                                            <p:strVal val="#ppt_h*1.14"/>
+                                          </p:val>
+                                        </p:tav>
+                                        <p:tav tm="82000">
+                                          <p:val>
+                                            <p:strVal val="#ppt_h*0.97"/>
                                           </p:val>
                                         </p:tav>
                                         <p:tav tm="100000">
@@ -10392,9 +11387,9 @@
                                     </p:anim>
                                     <p:animEffect transition="in" filter="fade">
                                       <p:cBhvr>
-                                        <p:cTn id="66" dur="225"/>
-                                        <p:tgtEl>
-                                          <p:spTgt spid="13"/>
+                                        <p:cTn id="49" dur="220"/>
+                                        <p:tgtEl>
+                                          <p:spTgt spid="10"/>
                                         </p:tgtEl>
                                       </p:cBhvr>
                                     </p:animEffect>
@@ -10402,20 +11397,20 @@
                                 </p:cTn>
                               </p:par>
                               <p:par>
-                                <p:cTn id="67" presetID="22" presetClass="entr" presetSubtype="8" fill="hold" grpId="0" nodeType="withEffect">
+                                <p:cTn id="50" presetID="22" presetClass="entr" presetSubtype="8" fill="hold" grpId="0" nodeType="withEffect">
                                   <p:stCondLst>
                                     <p:cond delay="0"/>
                                   </p:stCondLst>
                                   <p:childTnLst>
                                     <p:set>
                                       <p:cBhvr>
-                                        <p:cTn id="68" dur="1" fill="hold">
+                                        <p:cTn id="51" dur="1" fill="hold">
                                           <p:stCondLst>
                                             <p:cond delay="0"/>
                                           </p:stCondLst>
                                         </p:cTn>
                                         <p:tgtEl>
-                                          <p:spTgt spid="12"/>
+                                          <p:spTgt spid="9"/>
                                         </p:tgtEl>
                                         <p:attrNameLst>
                                           <p:attrName>style.visibility</p:attrName>
@@ -10427,9 +11422,9 @@
                                     </p:set>
                                     <p:animEffect transition="in" filter="wipe(left)">
                                       <p:cBhvr>
-                                        <p:cTn id="69" dur="300"/>
-                                        <p:tgtEl>
-                                          <p:spTgt spid="12"/>
+                                        <p:cTn id="52" dur="300"/>
+                                        <p:tgtEl>
+                                          <p:spTgt spid="9"/>
                                         </p:tgtEl>
                                       </p:cBhvr>
                                     </p:animEffect>
@@ -10437,20 +11432,20 @@
                                 </p:cTn>
                               </p:par>
                               <p:par>
-                                <p:cTn id="70" presetID="53" presetClass="entr" presetSubtype="16" fill="hold" grpId="0" nodeType="withEffect">
+                                <p:cTn id="53" presetID="53" presetClass="entr" presetSubtype="16" fill="hold" grpId="0" nodeType="withEffect">
                                   <p:stCondLst>
                                     <p:cond delay="250"/>
                                   </p:stCondLst>
                                   <p:childTnLst>
                                     <p:set>
                                       <p:cBhvr>
-                                        <p:cTn id="71" dur="1" fill="hold">
+                                        <p:cTn id="54" dur="1" fill="hold">
                                           <p:stCondLst>
                                             <p:cond delay="0"/>
                                           </p:stCondLst>
                                         </p:cTn>
                                         <p:tgtEl>
-                                          <p:spTgt spid="14"/>
+                                          <p:spTgt spid="11"/>
                                         </p:tgtEl>
                                         <p:attrNameLst>
                                           <p:attrName>style.visibility</p:attrName>
@@ -10462,9 +11457,9 @@
                                     </p:set>
                                     <p:anim calcmode="lin" valueType="num">
                                       <p:cBhvr>
-                                        <p:cTn id="72" dur="450" fill="hold"/>
-                                        <p:tgtEl>
-                                          <p:spTgt spid="14"/>
+                                        <p:cTn id="55" dur="550" fill="hold"/>
+                                        <p:tgtEl>
+                                          <p:spTgt spid="11"/>
                                         </p:tgtEl>
                                         <p:attrNameLst>
                                           <p:attrName>ppt_w</p:attrName>
@@ -10476,9 +11471,14 @@
                                             <p:strVal val="0"/>
                                           </p:val>
                                         </p:tav>
-                                        <p:tav tm="70000">
-                                          <p:val>
-                                            <p:strVal val="#ppt_w*1.07"/>
+                                        <p:tav tm="60000">
+                                          <p:val>
+                                            <p:strVal val="#ppt_w*1.14"/>
+                                          </p:val>
+                                        </p:tav>
+                                        <p:tav tm="82000">
+                                          <p:val>
+                                            <p:strVal val="#ppt_w*0.97"/>
                                           </p:val>
                                         </p:tav>
                                         <p:tav tm="100000">
@@ -10490,9 +11490,9 @@
                                     </p:anim>
                                     <p:anim calcmode="lin" valueType="num">
                                       <p:cBhvr>
-                                        <p:cTn id="73" dur="450" fill="hold"/>
-                                        <p:tgtEl>
-                                          <p:spTgt spid="14"/>
+                                        <p:cTn id="56" dur="550" fill="hold"/>
+                                        <p:tgtEl>
+                                          <p:spTgt spid="11"/>
                                         </p:tgtEl>
                                         <p:attrNameLst>
                                           <p:attrName>ppt_h</p:attrName>
@@ -10504,9 +11504,14 @@
                                             <p:strVal val="0"/>
                                           </p:val>
                                         </p:tav>
-                                        <p:tav tm="70000">
-                                          <p:val>
-                                            <p:strVal val="#ppt_h*1.07"/>
+                                        <p:tav tm="60000">
+                                          <p:val>
+                                            <p:strVal val="#ppt_h*1.14"/>
+                                          </p:val>
+                                        </p:tav>
+                                        <p:tav tm="82000">
+                                          <p:val>
+                                            <p:strVal val="#ppt_h*0.97"/>
                                           </p:val>
                                         </p:tav>
                                         <p:tav tm="100000">
@@ -10518,9 +11523,9 @@
                                     </p:anim>
                                     <p:animEffect transition="in" filter="fade">
                                       <p:cBhvr>
-                                        <p:cTn id="74" dur="225"/>
-                                        <p:tgtEl>
-                                          <p:spTgt spid="14"/>
+                                        <p:cTn id="57" dur="220"/>
+                                        <p:tgtEl>
+                                          <p:spTgt spid="11"/>
                                         </p:tgtEl>
                                       </p:cBhvr>
                                     </p:animEffect>
@@ -10534,32 +11539,203 @@
                     </p:cTn>
                   </p:par>
                   <p:par>
-                    <p:cTn id="82" fill="hold">
+                    <p:cTn id="77" fill="hold">
                       <p:stCondLst>
                         <p:cond delay="indefinite"/>
                       </p:stCondLst>
                       <p:childTnLst>
                         <p:par>
-                          <p:cTn id="83" fill="hold">
+                          <p:cTn id="78" fill="hold">
                             <p:stCondLst>
                               <p:cond delay="0"/>
                             </p:stCondLst>
                             <p:childTnLst>
                               <p:par>
-                                <p:cTn id="77" presetID="42" presetClass="entr" presetSubtype="0" fill="hold" grpId="0" nodeType="clickEffect">
+                                <p:cTn id="60" presetID="10" presetClass="exit" presetSubtype="0" fill="hold" grpId="1" nodeType="clickEffect">
+                                  <p:stCondLst>
+                                    <p:cond delay="0"/>
+                                  </p:stCondLst>
+                                  <p:childTnLst>
+                                    <p:animEffect transition="out" filter="fade">
+                                      <p:cBhvr>
+                                        <p:cTn id="62" dur="250"/>
+                                        <p:tgtEl>
+                                          <p:spTgt spid="10"/>
+                                        </p:tgtEl>
+                                      </p:cBhvr>
+                                    </p:animEffect>
+                                    <p:set>
+                                      <p:cBhvr>
+                                        <p:cTn id="63" dur="1" fill="hold">
+                                          <p:stCondLst>
+                                            <p:cond delay="249"/>
+                                          </p:stCondLst>
+                                        </p:cTn>
+                                        <p:tgtEl>
+                                          <p:spTgt spid="10"/>
+                                        </p:tgtEl>
+                                        <p:attrNameLst>
+                                          <p:attrName>style.visibility</p:attrName>
+                                        </p:attrNameLst>
+                                      </p:cBhvr>
+                                      <p:to>
+                                        <p:strVal val="hidden"/>
+                                      </p:to>
+                                    </p:set>
+                                  </p:childTnLst>
+                                </p:cTn>
+                              </p:par>
+                              <p:par>
+                                <p:cTn id="64" presetID="53" presetClass="entr" presetSubtype="16" fill="hold" grpId="0" nodeType="withEffect">
+                                  <p:stCondLst>
+                                    <p:cond delay="120"/>
+                                  </p:stCondLst>
+                                  <p:childTnLst>
+                                    <p:set>
+                                      <p:cBhvr>
+                                        <p:cTn id="65" dur="1" fill="hold">
+                                          <p:stCondLst>
+                                            <p:cond delay="0"/>
+                                          </p:stCondLst>
+                                        </p:cTn>
+                                        <p:tgtEl>
+                                          <p:spTgt spid="13"/>
+                                        </p:tgtEl>
+                                        <p:attrNameLst>
+                                          <p:attrName>style.visibility</p:attrName>
+                                        </p:attrNameLst>
+                                      </p:cBhvr>
+                                      <p:to>
+                                        <p:strVal val="visible"/>
+                                      </p:to>
+                                    </p:set>
+                                    <p:anim calcmode="lin" valueType="num">
+                                      <p:cBhvr>
+                                        <p:cTn id="66" dur="550" fill="hold"/>
+                                        <p:tgtEl>
+                                          <p:spTgt spid="13"/>
+                                        </p:tgtEl>
+                                        <p:attrNameLst>
+                                          <p:attrName>ppt_w</p:attrName>
+                                        </p:attrNameLst>
+                                      </p:cBhvr>
+                                      <p:tavLst>
+                                        <p:tav tm="0">
+                                          <p:val>
+                                            <p:strVal val="0"/>
+                                          </p:val>
+                                        </p:tav>
+                                        <p:tav tm="60000">
+                                          <p:val>
+                                            <p:strVal val="#ppt_w*1.14"/>
+                                          </p:val>
+                                        </p:tav>
+                                        <p:tav tm="82000">
+                                          <p:val>
+                                            <p:strVal val="#ppt_w*0.97"/>
+                                          </p:val>
+                                        </p:tav>
+                                        <p:tav tm="100000">
+                                          <p:val>
+                                            <p:strVal val="#ppt_w"/>
+                                          </p:val>
+                                        </p:tav>
+                                      </p:tavLst>
+                                    </p:anim>
+                                    <p:anim calcmode="lin" valueType="num">
+                                      <p:cBhvr>
+                                        <p:cTn id="67" dur="550" fill="hold"/>
+                                        <p:tgtEl>
+                                          <p:spTgt spid="13"/>
+                                        </p:tgtEl>
+                                        <p:attrNameLst>
+                                          <p:attrName>ppt_h</p:attrName>
+                                        </p:attrNameLst>
+                                      </p:cBhvr>
+                                      <p:tavLst>
+                                        <p:tav tm="0">
+                                          <p:val>
+                                            <p:strVal val="0"/>
+                                          </p:val>
+                                        </p:tav>
+                                        <p:tav tm="60000">
+                                          <p:val>
+                                            <p:strVal val="#ppt_h*1.14"/>
+                                          </p:val>
+                                        </p:tav>
+                                        <p:tav tm="82000">
+                                          <p:val>
+                                            <p:strVal val="#ppt_h*0.97"/>
+                                          </p:val>
+                                        </p:tav>
+                                        <p:tav tm="100000">
+                                          <p:val>
+                                            <p:strVal val="#ppt_h"/>
+                                          </p:val>
+                                        </p:tav>
+                                      </p:tavLst>
+                                    </p:anim>
+                                    <p:animEffect transition="in" filter="fade">
+                                      <p:cBhvr>
+                                        <p:cTn id="68" dur="220"/>
+                                        <p:tgtEl>
+                                          <p:spTgt spid="13"/>
+                                        </p:tgtEl>
+                                      </p:cBhvr>
+                                    </p:animEffect>
+                                  </p:childTnLst>
+                                </p:cTn>
+                              </p:par>
+                              <p:par>
+                                <p:cTn id="69" presetID="22" presetClass="entr" presetSubtype="8" fill="hold" grpId="0" nodeType="withEffect">
                                   <p:stCondLst>
                                     <p:cond delay="0"/>
                                   </p:stCondLst>
                                   <p:childTnLst>
                                     <p:set>
                                       <p:cBhvr>
-                                        <p:cTn id="78" dur="1" fill="hold">
+                                        <p:cTn id="70" dur="1" fill="hold">
                                           <p:stCondLst>
                                             <p:cond delay="0"/>
                                           </p:stCondLst>
                                         </p:cTn>
                                         <p:tgtEl>
-                                          <p:spTgt spid="15"/>
+                                          <p:spTgt spid="12"/>
+                                        </p:tgtEl>
+                                        <p:attrNameLst>
+                                          <p:attrName>style.visibility</p:attrName>
+                                        </p:attrNameLst>
+                                      </p:cBhvr>
+                                      <p:to>
+                                        <p:strVal val="visible"/>
+                                      </p:to>
+                                    </p:set>
+                                    <p:animEffect transition="in" filter="wipe(left)">
+                                      <p:cBhvr>
+                                        <p:cTn id="71" dur="300"/>
+                                        <p:tgtEl>
+                                          <p:spTgt spid="12"/>
+                                        </p:tgtEl>
+                                      </p:cBhvr>
+                                    </p:animEffect>
+                                  </p:childTnLst>
+                                </p:cTn>
+                              </p:par>
+                              <p:par>
+                                <p:cTn id="72" presetID="53" presetClass="entr" presetSubtype="16" fill="hold" grpId="0" nodeType="withEffect">
+                                  <p:stCondLst>
+                                    <p:cond delay="250"/>
+                                  </p:stCondLst>
+                                  <p:childTnLst>
+                                    <p:set>
+                                      <p:cBhvr>
+                                        <p:cTn id="73" dur="1" fill="hold">
+                                          <p:stCondLst>
+                                            <p:cond delay="0"/>
+                                          </p:stCondLst>
+                                        </p:cTn>
+                                        <p:tgtEl>
+                                          <p:spTgt spid="14"/>
                                         </p:tgtEl>
                                         <p:attrNameLst>
                                           <p:attrName>style.visibility</p:attrName>
@@ -10571,63 +11747,215 @@
                                     </p:set>
                                     <p:anim calcmode="lin" valueType="num">
                                       <p:cBhvr>
-                                        <p:cTn id="79" dur="500" fill="hold"/>
-                                        <p:tgtEl>
-                                          <p:spTgt spid="15"/>
-                                        </p:tgtEl>
-                                        <p:attrNameLst>
-                                          <p:attrName>ppt_x</p:attrName>
+                                        <p:cTn id="74" dur="550" fill="hold"/>
+                                        <p:tgtEl>
+                                          <p:spTgt spid="14"/>
+                                        </p:tgtEl>
+                                        <p:attrNameLst>
+                                          <p:attrName>ppt_w</p:attrName>
                                         </p:attrNameLst>
                                       </p:cBhvr>
                                       <p:tavLst>
                                         <p:tav tm="0">
                                           <p:val>
-                                            <p:strVal val="#ppt_x"/>
+                                            <p:strVal val="0"/>
+                                          </p:val>
+                                        </p:tav>
+                                        <p:tav tm="60000">
+                                          <p:val>
+                                            <p:strVal val="#ppt_w*1.14"/>
+                                          </p:val>
+                                        </p:tav>
+                                        <p:tav tm="82000">
+                                          <p:val>
+                                            <p:strVal val="#ppt_w*0.97"/>
                                           </p:val>
                                         </p:tav>
                                         <p:tav tm="100000">
                                           <p:val>
-                                            <p:strVal val="#ppt_x"/>
+                                            <p:strVal val="#ppt_w"/>
                                           </p:val>
                                         </p:tav>
                                       </p:tavLst>
                                     </p:anim>
                                     <p:anim calcmode="lin" valueType="num">
                                       <p:cBhvr>
-                                        <p:cTn id="80" dur="500" fill="hold"/>
-                                        <p:tgtEl>
-                                          <p:spTgt spid="15"/>
-                                        </p:tgtEl>
-                                        <p:attrNameLst>
-                                          <p:attrName>ppt_y</p:attrName>
+                                        <p:cTn id="75" dur="550" fill="hold"/>
+                                        <p:tgtEl>
+                                          <p:spTgt spid="14"/>
+                                        </p:tgtEl>
+                                        <p:attrNameLst>
+                                          <p:attrName>ppt_h</p:attrName>
                                         </p:attrNameLst>
                                       </p:cBhvr>
                                       <p:tavLst>
                                         <p:tav tm="0">
                                           <p:val>
-                                            <p:strVal val="#ppt_y+0.08"/>
-                                          </p:val>
-                                        </p:tav>
-                                        <p:tav tm="80000">
-                                          <p:val>
-                                            <p:strVal val="#ppt_y-0.006"/>
+                                            <p:strVal val="0"/>
+                                          </p:val>
+                                        </p:tav>
+                                        <p:tav tm="60000">
+                                          <p:val>
+                                            <p:strVal val="#ppt_h*1.14"/>
+                                          </p:val>
+                                        </p:tav>
+                                        <p:tav tm="82000">
+                                          <p:val>
+                                            <p:strVal val="#ppt_h*0.97"/>
                                           </p:val>
                                         </p:tav>
                                         <p:tav tm="100000">
                                           <p:val>
-                                            <p:strVal val="#ppt_y"/>
+                                            <p:strVal val="#ppt_h"/>
                                           </p:val>
                                         </p:tav>
                                       </p:tavLst>
                                     </p:anim>
                                     <p:animEffect transition="in" filter="fade">
                                       <p:cBhvr>
-                                        <p:cTn id="81" dur="500"/>
+                                        <p:cTn id="76" dur="220"/>
+                                        <p:tgtEl>
+                                          <p:spTgt spid="14"/>
+                                        </p:tgtEl>
+                                      </p:cBhvr>
+                                    </p:animEffect>
+                                  </p:childTnLst>
+                                </p:cTn>
+                              </p:par>
+                            </p:childTnLst>
+                          </p:cTn>
+                        </p:par>
+                      </p:childTnLst>
+                    </p:cTn>
+                  </p:par>
+                  <p:par>
+                    <p:cTn id="87" fill="hold">
+                      <p:stCondLst>
+                        <p:cond delay="indefinite"/>
+                      </p:stCondLst>
+                      <p:childTnLst>
+                        <p:par>
+                          <p:cTn id="88" fill="hold">
+                            <p:stCondLst>
+                              <p:cond delay="0"/>
+                            </p:stCondLst>
+                            <p:childTnLst>
+                              <p:par>
+                                <p:cTn id="79" presetID="53" presetClass="entr" presetSubtype="16" fill="hold" grpId="0" nodeType="clickEffect">
+                                  <p:stCondLst>
+                                    <p:cond delay="0"/>
+                                  </p:stCondLst>
+                                  <p:childTnLst>
+                                    <p:set>
+                                      <p:cBhvr>
+                                        <p:cTn id="80" dur="1" fill="hold">
+                                          <p:stCondLst>
+                                            <p:cond delay="0"/>
+                                          </p:stCondLst>
+                                        </p:cTn>
                                         <p:tgtEl>
                                           <p:spTgt spid="15"/>
                                         </p:tgtEl>
+                                        <p:attrNameLst>
+                                          <p:attrName>style.visibility</p:attrName>
+                                        </p:attrNameLst>
+                                      </p:cBhvr>
+                                      <p:to>
+                                        <p:strVal val="visible"/>
+                                      </p:to>
+                                    </p:set>
+                                    <p:anim calcmode="lin" valueType="num">
+                                      <p:cBhvr>
+                                        <p:cTn id="81" dur="550" fill="hold"/>
+                                        <p:tgtEl>
+                                          <p:spTgt spid="15"/>
+                                        </p:tgtEl>
+                                        <p:attrNameLst>
+                                          <p:attrName>ppt_w</p:attrName>
+                                        </p:attrNameLst>
+                                      </p:cBhvr>
+                                      <p:tavLst>
+                                        <p:tav tm="0">
+                                          <p:val>
+                                            <p:strVal val="0"/>
+                                          </p:val>
+                                        </p:tav>
+                                        <p:tav tm="60000">
+                                          <p:val>
+                                            <p:strVal val="#ppt_w*1.14"/>
+                                          </p:val>
+                                        </p:tav>
+                                        <p:tav tm="82000">
+                                          <p:val>
+                                            <p:strVal val="#ppt_w*0.97"/>
+                                          </p:val>
+                                        </p:tav>
+                                        <p:tav tm="100000">
+                                          <p:val>
+                                            <p:strVal val="#ppt_w"/>
+                                          </p:val>
+                                        </p:tav>
+                                      </p:tavLst>
+                                    </p:anim>
+                                    <p:anim calcmode="lin" valueType="num">
+                                      <p:cBhvr>
+                                        <p:cTn id="82" dur="550" fill="hold"/>
+                                        <p:tgtEl>
+                                          <p:spTgt spid="15"/>
+                                        </p:tgtEl>
+                                        <p:attrNameLst>
+                                          <p:attrName>ppt_h</p:attrName>
+                                        </p:attrNameLst>
+                                      </p:cBhvr>
+                                      <p:tavLst>
+                                        <p:tav tm="0">
+                                          <p:val>
+                                            <p:strVal val="0"/>
+                                          </p:val>
+                                        </p:tav>
+                                        <p:tav tm="60000">
+                                          <p:val>
+                                            <p:strVal val="#ppt_h*1.14"/>
+                                          </p:val>
+                                        </p:tav>
+                                        <p:tav tm="82000">
+                                          <p:val>
+                                            <p:strVal val="#ppt_h*0.97"/>
+                                          </p:val>
+                                        </p:tav>
+                                        <p:tav tm="100000">
+                                          <p:val>
+                                            <p:strVal val="#ppt_h"/>
+                                          </p:val>
+                                        </p:tav>
+                                      </p:tavLst>
+                                    </p:anim>
+                                    <p:animEffect transition="in" filter="fade">
+                                      <p:cBhvr>
+                                        <p:cTn id="83" dur="220"/>
+                                        <p:tgtEl>
+                                          <p:spTgt spid="15"/>
+                                        </p:tgtEl>
                                       </p:cBhvr>
                                     </p:animEffect>
+                                  </p:childTnLst>
+                                </p:cTn>
+                              </p:par>
+                              <p:par>
+                                <p:cTn id="84" presetID="6" presetClass="emph" presetSubtype="0" fill="hold" grpId="0" nodeType="withEffect">
+                                  <p:stCondLst>
+                                    <p:cond delay="450"/>
+                                  </p:stCondLst>
+                                  <p:childTnLst>
+                                    <p:animScale>
+                                      <p:cBhvr>
+                                        <p:cTn id="86" dur="180" autoRev="1" fill="hold"/>
+                                        <p:tgtEl>
+                                          <p:spTgt spid="13"/>
+                                        </p:tgtEl>
+                                      </p:cBhvr>
+                                      <p:by x="112000" y="112000"/>
+                                    </p:animScale>
                                   </p:childTnLst>
                                 </p:cTn>
                               </p:par>
@@ -10671,7 +11999,6 @@
       <p:bldP spid="9" grpId="0" animBg="1"/>
       <p:bldP spid="11" grpId="0" animBg="1"/>
       <p:bldP spid="10" grpId="1" animBg="1"/>
-      <p:bldP spid="13" grpId="0" animBg="1"/>
       <p:bldP spid="12" grpId="0" animBg="1"/>
       <p:bldP spid="14" grpId="0" animBg="1"/>
       <p:bldP spid="15" grpId="0" animBg="1"/>
@@ -11028,7 +12355,7 @@
                             </p:stCondLst>
                             <p:childTnLst>
                               <p:par>
-                                <p:cTn id="3" presetID="42" presetClass="entr" presetSubtype="0" fill="hold" grpId="0" nodeType="afterEffect">
+                                <p:cTn id="3" presetID="53" presetClass="entr" presetSubtype="16" fill="hold" grpId="0" nodeType="afterEffect">
                                   <p:stCondLst>
                                     <p:cond delay="0"/>
                                   </p:stCondLst>
@@ -11041,7 +12368,7 @@
                                           </p:stCondLst>
                                         </p:cTn>
                                         <p:tgtEl>
-                                          <p:spTgt spid="1"/>
+                                          <p:spTgt spid="3"/>
                                         </p:tgtEl>
                                         <p:attrNameLst>
                                           <p:attrName>style.visibility</p:attrName>
@@ -11053,60 +12380,75 @@
                                     </p:set>
                                     <p:anim calcmode="lin" valueType="num">
                                       <p:cBhvr>
-                                        <p:cTn id="5" dur="500" fill="hold"/>
-                                        <p:tgtEl>
-                                          <p:spTgt spid="1"/>
-                                        </p:tgtEl>
-                                        <p:attrNameLst>
-                                          <p:attrName>ppt_x</p:attrName>
+                                        <p:cTn id="5" dur="550" fill="hold"/>
+                                        <p:tgtEl>
+                                          <p:spTgt spid="3"/>
+                                        </p:tgtEl>
+                                        <p:attrNameLst>
+                                          <p:attrName>ppt_w</p:attrName>
                                         </p:attrNameLst>
                                       </p:cBhvr>
                                       <p:tavLst>
                                         <p:tav tm="0">
                                           <p:val>
-                                            <p:strVal val="#ppt_x"/>
+                                            <p:strVal val="0"/>
+                                          </p:val>
+                                        </p:tav>
+                                        <p:tav tm="60000">
+                                          <p:val>
+                                            <p:strVal val="#ppt_w*1.14"/>
+                                          </p:val>
+                                        </p:tav>
+                                        <p:tav tm="82000">
+                                          <p:val>
+                                            <p:strVal val="#ppt_w*0.97"/>
                                           </p:val>
                                         </p:tav>
                                         <p:tav tm="100000">
                                           <p:val>
-                                            <p:strVal val="#ppt_x"/>
+                                            <p:strVal val="#ppt_w"/>
                                           </p:val>
                                         </p:tav>
                                       </p:tavLst>
                                     </p:anim>
                                     <p:anim calcmode="lin" valueType="num">
                                       <p:cBhvr>
-                                        <p:cTn id="6" dur="500" fill="hold"/>
-                                        <p:tgtEl>
-                                          <p:spTgt spid="1"/>
-                                        </p:tgtEl>
-                                        <p:attrNameLst>
-                                          <p:attrName>ppt_y</p:attrName>
+                                        <p:cTn id="6" dur="550" fill="hold"/>
+                                        <p:tgtEl>
+                                          <p:spTgt spid="3"/>
+                                        </p:tgtEl>
+                                        <p:attrNameLst>
+                                          <p:attrName>ppt_h</p:attrName>
                                         </p:attrNameLst>
                                       </p:cBhvr>
                                       <p:tavLst>
                                         <p:tav tm="0">
                                           <p:val>
-                                            <p:strVal val="#ppt_y+0.08"/>
-                                          </p:val>
-                                        </p:tav>
-                                        <p:tav tm="80000">
-                                          <p:val>
-                                            <p:strVal val="#ppt_y-0.006"/>
+                                            <p:strVal val="0"/>
+                                          </p:val>
+                                        </p:tav>
+                                        <p:tav tm="60000">
+                                          <p:val>
+                                            <p:strVal val="#ppt_h*1.14"/>
+                                          </p:val>
+                                        </p:tav>
+                                        <p:tav tm="82000">
+                                          <p:val>
+                                            <p:strVal val="#ppt_h*0.97"/>
                                           </p:val>
                                         </p:tav>
                                         <p:tav tm="100000">
                                           <p:val>
-                                            <p:strVal val="#ppt_y"/>
+                                            <p:strVal val="#ppt_h"/>
                                           </p:val>
                                         </p:tav>
                                       </p:tavLst>
                                     </p:anim>
                                     <p:animEffect transition="in" filter="fade">
                                       <p:cBhvr>
-                                        <p:cTn id="7" dur="500"/>
-                                        <p:tgtEl>
-                                          <p:spTgt spid="1"/>
+                                        <p:cTn id="7" dur="220"/>
+                                        <p:tgtEl>
+                                          <p:spTgt spid="3"/>
                                         </p:tgtEl>
                                       </p:cBhvr>
                                     </p:animEffect>
@@ -11157,7 +12499,7 @@
                                     </p:set>
                                     <p:anim calcmode="lin" valueType="num">
                                       <p:cBhvr>
-                                        <p:cTn id="12" dur="450" fill="hold"/>
+                                        <p:cTn id="12" dur="550" fill="hold"/>
                                         <p:tgtEl>
                                           <p:spTgt spid="4"/>
                                         </p:tgtEl>
@@ -11171,9 +12513,14 @@
                                             <p:strVal val="0"/>
                                           </p:val>
                                         </p:tav>
-                                        <p:tav tm="70000">
-                                          <p:val>
-                                            <p:strVal val="#ppt_w*1.07"/>
+                                        <p:tav tm="60000">
+                                          <p:val>
+                                            <p:strVal val="#ppt_w*1.14"/>
+                                          </p:val>
+                                        </p:tav>
+                                        <p:tav tm="82000">
+                                          <p:val>
+                                            <p:strVal val="#ppt_w*0.97"/>
                                           </p:val>
                                         </p:tav>
                                         <p:tav tm="100000">
@@ -11185,7 +12532,7 @@
                                     </p:anim>
                                     <p:anim calcmode="lin" valueType="num">
                                       <p:cBhvr>
-                                        <p:cTn id="13" dur="450" fill="hold"/>
+                                        <p:cTn id="13" dur="550" fill="hold"/>
                                         <p:tgtEl>
                                           <p:spTgt spid="4"/>
                                         </p:tgtEl>
@@ -11199,9 +12546,14 @@
                                             <p:strVal val="0"/>
                                           </p:val>
                                         </p:tav>
-                                        <p:tav tm="70000">
-                                          <p:val>
-                                            <p:strVal val="#ppt_h*1.07"/>
+                                        <p:tav tm="60000">
+                                          <p:val>
+                                            <p:strVal val="#ppt_h*1.14"/>
+                                          </p:val>
+                                        </p:tav>
+                                        <p:tav tm="82000">
+                                          <p:val>
+                                            <p:strVal val="#ppt_h*0.97"/>
                                           </p:val>
                                         </p:tav>
                                         <p:tav tm="100000">
@@ -11213,7 +12565,7 @@
                                     </p:anim>
                                     <p:animEffect transition="in" filter="fade">
                                       <p:cBhvr>
-                                        <p:cTn id="14" dur="225"/>
+                                        <p:cTn id="14" dur="220"/>
                                         <p:tgtEl>
                                           <p:spTgt spid="4"/>
                                         </p:tgtEl>
@@ -11266,7 +12618,7 @@
                                     </p:set>
                                     <p:anim calcmode="lin" valueType="num">
                                       <p:cBhvr>
-                                        <p:cTn id="19" dur="450" fill="hold"/>
+                                        <p:cTn id="19" dur="550" fill="hold"/>
                                         <p:tgtEl>
                                           <p:spTgt spid="5"/>
                                         </p:tgtEl>
@@ -11280,9 +12632,14 @@
                                             <p:strVal val="0"/>
                                           </p:val>
                                         </p:tav>
-                                        <p:tav tm="70000">
-                                          <p:val>
-                                            <p:strVal val="#ppt_w*1.07"/>
+                                        <p:tav tm="60000">
+                                          <p:val>
+                                            <p:strVal val="#ppt_w*1.14"/>
+                                          </p:val>
+                                        </p:tav>
+                                        <p:tav tm="82000">
+                                          <p:val>
+                                            <p:strVal val="#ppt_w*0.97"/>
                                           </p:val>
                                         </p:tav>
                                         <p:tav tm="100000">
@@ -11294,7 +12651,7 @@
                                     </p:anim>
                                     <p:anim calcmode="lin" valueType="num">
                                       <p:cBhvr>
-                                        <p:cTn id="20" dur="450" fill="hold"/>
+                                        <p:cTn id="20" dur="550" fill="hold"/>
                                         <p:tgtEl>
                                           <p:spTgt spid="5"/>
                                         </p:tgtEl>
@@ -11308,9 +12665,14 @@
                                             <p:strVal val="0"/>
                                           </p:val>
                                         </p:tav>
-                                        <p:tav tm="70000">
-                                          <p:val>
-                                            <p:strVal val="#ppt_h*1.07"/>
+                                        <p:tav tm="60000">
+                                          <p:val>
+                                            <p:strVal val="#ppt_h*1.14"/>
+                                          </p:val>
+                                        </p:tav>
+                                        <p:tav tm="82000">
+                                          <p:val>
+                                            <p:strVal val="#ppt_h*0.97"/>
                                           </p:val>
                                         </p:tav>
                                         <p:tav tm="100000">
@@ -11322,7 +12684,7 @@
                                     </p:anim>
                                     <p:animEffect transition="in" filter="fade">
                                       <p:cBhvr>
-                                        <p:cTn id="21" dur="225"/>
+                                        <p:cTn id="21" dur="220"/>
                                         <p:tgtEl>
                                           <p:spTgt spid="5"/>
                                         </p:tgtEl>
@@ -11375,7 +12737,7 @@
                                     </p:set>
                                     <p:anim calcmode="lin" valueType="num">
                                       <p:cBhvr>
-                                        <p:cTn id="26" dur="450" fill="hold"/>
+                                        <p:cTn id="26" dur="550" fill="hold"/>
                                         <p:tgtEl>
                                           <p:spTgt spid="6"/>
                                         </p:tgtEl>
@@ -11389,9 +12751,14 @@
                                             <p:strVal val="0"/>
                                           </p:val>
                                         </p:tav>
-                                        <p:tav tm="70000">
-                                          <p:val>
-                                            <p:strVal val="#ppt_w*1.07"/>
+                                        <p:tav tm="60000">
+                                          <p:val>
+                                            <p:strVal val="#ppt_w*1.14"/>
+                                          </p:val>
+                                        </p:tav>
+                                        <p:tav tm="82000">
+                                          <p:val>
+                                            <p:strVal val="#ppt_w*0.97"/>
                                           </p:val>
                                         </p:tav>
                                         <p:tav tm="100000">
@@ -11403,7 +12770,7 @@
                                     </p:anim>
                                     <p:anim calcmode="lin" valueType="num">
                                       <p:cBhvr>
-                                        <p:cTn id="27" dur="450" fill="hold"/>
+                                        <p:cTn id="27" dur="550" fill="hold"/>
                                         <p:tgtEl>
                                           <p:spTgt spid="6"/>
                                         </p:tgtEl>
@@ -11417,9 +12784,14 @@
                                             <p:strVal val="0"/>
                                           </p:val>
                                         </p:tav>
-                                        <p:tav tm="70000">
-                                          <p:val>
-                                            <p:strVal val="#ppt_h*1.07"/>
+                                        <p:tav tm="60000">
+                                          <p:val>
+                                            <p:strVal val="#ppt_h*1.14"/>
+                                          </p:val>
+                                        </p:tav>
+                                        <p:tav tm="82000">
+                                          <p:val>
+                                            <p:strVal val="#ppt_h*0.97"/>
                                           </p:val>
                                         </p:tav>
                                         <p:tav tm="100000">
@@ -11431,7 +12803,7 @@
                                     </p:anim>
                                     <p:animEffect transition="in" filter="fade">
                                       <p:cBhvr>
-                                        <p:cTn id="28" dur="225"/>
+                                        <p:cTn id="28" dur="220"/>
                                         <p:tgtEl>
                                           <p:spTgt spid="6"/>
                                         </p:tgtEl>
@@ -11447,13 +12819,13 @@
                     </p:cTn>
                   </p:par>
                   <p:par>
-                    <p:cTn id="36" fill="hold">
+                    <p:cTn id="45" fill="hold">
                       <p:stCondLst>
                         <p:cond delay="indefinite"/>
                       </p:stCondLst>
                       <p:childTnLst>
                         <p:par>
-                          <p:cTn id="37" fill="hold">
+                          <p:cTn id="46" fill="hold">
                             <p:stCondLst>
                               <p:cond delay="0"/>
                             </p:stCondLst>
@@ -11484,7 +12856,7 @@
                                     </p:set>
                                     <p:anim calcmode="lin" valueType="num">
                                       <p:cBhvr>
-                                        <p:cTn id="33" dur="450" fill="hold"/>
+                                        <p:cTn id="33" dur="550" fill="hold"/>
                                         <p:tgtEl>
                                           <p:spTgt spid="7"/>
                                         </p:tgtEl>
@@ -11498,9 +12870,14 @@
                                             <p:strVal val="0"/>
                                           </p:val>
                                         </p:tav>
-                                        <p:tav tm="70000">
-                                          <p:val>
-                                            <p:strVal val="#ppt_w*1.07"/>
+                                        <p:tav tm="60000">
+                                          <p:val>
+                                            <p:strVal val="#ppt_w*1.14"/>
+                                          </p:val>
+                                        </p:tav>
+                                        <p:tav tm="82000">
+                                          <p:val>
+                                            <p:strVal val="#ppt_w*0.97"/>
                                           </p:val>
                                         </p:tav>
                                         <p:tav tm="100000">
@@ -11512,7 +12889,7 @@
                                     </p:anim>
                                     <p:anim calcmode="lin" valueType="num">
                                       <p:cBhvr>
-                                        <p:cTn id="34" dur="450" fill="hold"/>
+                                        <p:cTn id="34" dur="550" fill="hold"/>
                                         <p:tgtEl>
                                           <p:spTgt spid="7"/>
                                         </p:tgtEl>
@@ -11526,9 +12903,14 @@
                                             <p:strVal val="0"/>
                                           </p:val>
                                         </p:tav>
-                                        <p:tav tm="70000">
-                                          <p:val>
-                                            <p:strVal val="#ppt_h*1.07"/>
+                                        <p:tav tm="60000">
+                                          <p:val>
+                                            <p:strVal val="#ppt_h*1.14"/>
+                                          </p:val>
+                                        </p:tav>
+                                        <p:tav tm="82000">
+                                          <p:val>
+                                            <p:strVal val="#ppt_h*0.97"/>
                                           </p:val>
                                         </p:tav>
                                         <p:tav tm="100000">
@@ -11540,12 +12922,66 @@
                                     </p:anim>
                                     <p:animEffect transition="in" filter="fade">
                                       <p:cBhvr>
-                                        <p:cTn id="35" dur="225"/>
+                                        <p:cTn id="35" dur="220"/>
                                         <p:tgtEl>
                                           <p:spTgt spid="7"/>
                                         </p:tgtEl>
                                       </p:cBhvr>
                                     </p:animEffect>
+                                  </p:childTnLst>
+                                </p:cTn>
+                              </p:par>
+                              <p:par>
+                                <p:cTn id="36" presetID="6" presetClass="emph" presetSubtype="0" fill="hold" grpId="0" nodeType="withEffect">
+                                  <p:stCondLst>
+                                    <p:cond delay="420"/>
+                                  </p:stCondLst>
+                                  <p:childTnLst>
+                                    <p:animScale>
+                                      <p:cBhvr>
+                                        <p:cTn id="38" dur="180" autoRev="1" fill="hold"/>
+                                        <p:tgtEl>
+                                          <p:spTgt spid="4"/>
+                                        </p:tgtEl>
+                                      </p:cBhvr>
+                                      <p:by x="112000" y="112000"/>
+                                    </p:animScale>
+                                  </p:childTnLst>
+                                </p:cTn>
+                              </p:par>
+                              <p:par>
+                                <p:cTn id="39" presetID="6" presetClass="emph" presetSubtype="0" fill="hold" grpId="0" nodeType="withEffect">
+                                  <p:stCondLst>
+                                    <p:cond delay="540"/>
+                                  </p:stCondLst>
+                                  <p:childTnLst>
+                                    <p:animScale>
+                                      <p:cBhvr>
+                                        <p:cTn id="41" dur="180" autoRev="1" fill="hold"/>
+                                        <p:tgtEl>
+                                          <p:spTgt spid="5"/>
+                                        </p:tgtEl>
+                                      </p:cBhvr>
+                                      <p:by x="112000" y="112000"/>
+                                    </p:animScale>
+                                  </p:childTnLst>
+                                </p:cTn>
+                              </p:par>
+                              <p:par>
+                                <p:cTn id="42" presetID="6" presetClass="emph" presetSubtype="0" fill="hold" grpId="0" nodeType="withEffect">
+                                  <p:stCondLst>
+                                    <p:cond delay="660"/>
+                                  </p:stCondLst>
+                                  <p:childTnLst>
+                                    <p:animScale>
+                                      <p:cBhvr>
+                                        <p:cTn id="44" dur="180" autoRev="1" fill="hold"/>
+                                        <p:tgtEl>
+                                          <p:spTgt spid="6"/>
+                                        </p:tgtEl>
+                                      </p:cBhvr>
+                                      <p:by x="112000" y="112000"/>
+                                    </p:animScale>
                                   </p:childTnLst>
                                 </p:cTn>
                               </p:par>
@@ -11577,10 +13013,7 @@
       </p:par>
     </p:tnLst>
     <p:bldLst>
-      <p:bldP spid="1" grpId="0" animBg="1"/>
-      <p:bldP spid="4" grpId="0" animBg="1"/>
-      <p:bldP spid="5" grpId="0" animBg="1"/>
-      <p:bldP spid="6" grpId="0" animBg="1"/>
+      <p:bldP spid="3" grpId="0" animBg="1"/>
       <p:bldP spid="7" grpId="0" animBg="1"/>
     </p:bldLst>
   </p:timing>
@@ -12046,7 +13479,7 @@
               <p:cTn id="2" dur="indefinite" nodeType="mainSeq">
                 <p:childTnLst>
                   <p:par>
-                    <p:cTn id="11" fill="hold">
+                    <p:cTn id="8" fill="hold">
                       <p:stCondLst>
                         <p:cond delay="indefinite"/>
                         <p:cond evt="onBegin" delay="0">
@@ -12055,13 +13488,13 @@
                       </p:stCondLst>
                       <p:childTnLst>
                         <p:par>
-                          <p:cTn id="12" fill="hold">
+                          <p:cTn id="9" fill="hold">
                             <p:stCondLst>
                               <p:cond delay="0"/>
                             </p:stCondLst>
                             <p:childTnLst>
                               <p:par>
-                                <p:cTn id="3" presetID="42" presetClass="entr" presetSubtype="0" fill="hold" grpId="0" nodeType="afterEffect">
+                                <p:cTn id="3" presetID="53" presetClass="entr" presetSubtype="16" fill="hold" grpId="0" nodeType="afterEffect">
                                   <p:stCondLst>
                                     <p:cond delay="0"/>
                                   </p:stCondLst>
@@ -12074,7 +13507,7 @@
                                           </p:stCondLst>
                                         </p:cTn>
                                         <p:tgtEl>
-                                          <p:spTgt spid="1"/>
+                                          <p:spTgt spid="3"/>
                                         </p:tgtEl>
                                         <p:attrNameLst>
                                           <p:attrName>style.visibility</p:attrName>
@@ -12086,95 +13519,75 @@
                                     </p:set>
                                     <p:anim calcmode="lin" valueType="num">
                                       <p:cBhvr>
-                                        <p:cTn id="5" dur="500" fill="hold"/>
-                                        <p:tgtEl>
-                                          <p:spTgt spid="1"/>
-                                        </p:tgtEl>
-                                        <p:attrNameLst>
-                                          <p:attrName>ppt_x</p:attrName>
+                                        <p:cTn id="5" dur="550" fill="hold"/>
+                                        <p:tgtEl>
+                                          <p:spTgt spid="3"/>
+                                        </p:tgtEl>
+                                        <p:attrNameLst>
+                                          <p:attrName>ppt_w</p:attrName>
                                         </p:attrNameLst>
                                       </p:cBhvr>
                                       <p:tavLst>
                                         <p:tav tm="0">
                                           <p:val>
-                                            <p:strVal val="#ppt_x"/>
+                                            <p:strVal val="0"/>
+                                          </p:val>
+                                        </p:tav>
+                                        <p:tav tm="60000">
+                                          <p:val>
+                                            <p:strVal val="#ppt_w*1.14"/>
+                                          </p:val>
+                                        </p:tav>
+                                        <p:tav tm="82000">
+                                          <p:val>
+                                            <p:strVal val="#ppt_w*0.97"/>
                                           </p:val>
                                         </p:tav>
                                         <p:tav tm="100000">
                                           <p:val>
-                                            <p:strVal val="#ppt_x"/>
+                                            <p:strVal val="#ppt_w"/>
                                           </p:val>
                                         </p:tav>
                                       </p:tavLst>
                                     </p:anim>
                                     <p:anim calcmode="lin" valueType="num">
                                       <p:cBhvr>
-                                        <p:cTn id="6" dur="500" fill="hold"/>
-                                        <p:tgtEl>
-                                          <p:spTgt spid="1"/>
-                                        </p:tgtEl>
-                                        <p:attrNameLst>
-                                          <p:attrName>ppt_y</p:attrName>
+                                        <p:cTn id="6" dur="550" fill="hold"/>
+                                        <p:tgtEl>
+                                          <p:spTgt spid="3"/>
+                                        </p:tgtEl>
+                                        <p:attrNameLst>
+                                          <p:attrName>ppt_h</p:attrName>
                                         </p:attrNameLst>
                                       </p:cBhvr>
                                       <p:tavLst>
                                         <p:tav tm="0">
                                           <p:val>
-                                            <p:strVal val="#ppt_y+0.08"/>
-                                          </p:val>
-                                        </p:tav>
-                                        <p:tav tm="80000">
-                                          <p:val>
-                                            <p:strVal val="#ppt_y-0.006"/>
+                                            <p:strVal val="0"/>
+                                          </p:val>
+                                        </p:tav>
+                                        <p:tav tm="60000">
+                                          <p:val>
+                                            <p:strVal val="#ppt_h*1.14"/>
+                                          </p:val>
+                                        </p:tav>
+                                        <p:tav tm="82000">
+                                          <p:val>
+                                            <p:strVal val="#ppt_h*0.97"/>
                                           </p:val>
                                         </p:tav>
                                         <p:tav tm="100000">
                                           <p:val>
-                                            <p:strVal val="#ppt_y"/>
+                                            <p:strVal val="#ppt_h"/>
                                           </p:val>
                                         </p:tav>
                                       </p:tavLst>
                                     </p:anim>
                                     <p:animEffect transition="in" filter="fade">
                                       <p:cBhvr>
-                                        <p:cTn id="7" dur="500"/>
-                                        <p:tgtEl>
-                                          <p:spTgt spid="1"/>
-                                        </p:tgtEl>
-                                      </p:cBhvr>
-                                    </p:animEffect>
-                                  </p:childTnLst>
-                                </p:cTn>
-                              </p:par>
-                              <p:par>
-                                <p:cTn id="8" presetID="10" presetClass="entr" presetSubtype="0" fill="hold" grpId="0" nodeType="withEffect">
-                                  <p:stCondLst>
-                                    <p:cond delay="500"/>
-                                  </p:stCondLst>
-                                  <p:childTnLst>
-                                    <p:set>
-                                      <p:cBhvr>
-                                        <p:cTn id="9" dur="1" fill="hold">
-                                          <p:stCondLst>
-                                            <p:cond delay="0"/>
-                                          </p:stCondLst>
-                                        </p:cTn>
-                                        <p:tgtEl>
-                                          <p:spTgt spid="4"/>
-                                        </p:tgtEl>
-                                        <p:attrNameLst>
-                                          <p:attrName>style.visibility</p:attrName>
-                                        </p:attrNameLst>
-                                      </p:cBhvr>
-                                      <p:to>
-                                        <p:strVal val="visible"/>
-                                      </p:to>
-                                    </p:set>
-                                    <p:animEffect transition="in" filter="fade">
-                                      <p:cBhvr>
-                                        <p:cTn id="10" dur="400"/>
-                                        <p:tgtEl>
-                                          <p:spTgt spid="4"/>
+                                        <p:cTn id="7" dur="220"/>
+                                        <p:tgtEl>
+                                          <p:spTgt spid="3"/>
                                         </p:tgtEl>
                                       </p:cBhvr>
                                     </p:animEffect>
@@ -12188,67 +13601,32 @@
                     </p:cTn>
                   </p:par>
                   <p:par>
-                    <p:cTn id="21" fill="hold">
+                    <p:cTn id="15" fill="hold">
                       <p:stCondLst>
                         <p:cond delay="indefinite"/>
                       </p:stCondLst>
                       <p:childTnLst>
                         <p:par>
-                          <p:cTn id="22" fill="hold">
+                          <p:cTn id="16" fill="hold">
                             <p:stCondLst>
                               <p:cond delay="0"/>
                             </p:stCondLst>
                             <p:childTnLst>
                               <p:par>
-                                <p:cTn id="13" presetID="22" presetClass="entr" presetSubtype="8" fill="hold" grpId="0" nodeType="clickEffect">
+                                <p:cTn id="10" presetID="53" presetClass="entr" presetSubtype="16" fill="hold" grpId="0" nodeType="clickEffect">
                                   <p:stCondLst>
                                     <p:cond delay="0"/>
                                   </p:stCondLst>
                                   <p:childTnLst>
                                     <p:set>
                                       <p:cBhvr>
-                                        <p:cTn id="14" dur="1" fill="hold">
+                                        <p:cTn id="11" dur="1" fill="hold">
                                           <p:stCondLst>
                                             <p:cond delay="0"/>
                                           </p:stCondLst>
                                         </p:cTn>
                                         <p:tgtEl>
-                                          <p:spTgt spid="5"/>
-                                        </p:tgtEl>
-                                        <p:attrNameLst>
-                                          <p:attrName>style.visibility</p:attrName>
-                                        </p:attrNameLst>
-                                      </p:cBhvr>
-                                      <p:to>
-                                        <p:strVal val="visible"/>
-                                      </p:to>
-                                    </p:set>
-                                    <p:animEffect transition="in" filter="wipe(left)">
-                                      <p:cBhvr>
-                                        <p:cTn id="15" dur="500"/>
-                                        <p:tgtEl>
-                                          <p:spTgt spid="5"/>
-                                        </p:tgtEl>
-                                      </p:cBhvr>
-                                    </p:animEffect>
-                                  </p:childTnLst>
-                                </p:cTn>
-                              </p:par>
-                              <p:par>
-                                <p:cTn id="16" presetID="53" presetClass="entr" presetSubtype="16" fill="hold" grpId="0" nodeType="withEffect">
-                                  <p:stCondLst>
-                                    <p:cond delay="350"/>
-                                  </p:stCondLst>
-                                  <p:childTnLst>
-                                    <p:set>
-                                      <p:cBhvr>
-                                        <p:cTn id="17" dur="1" fill="hold">
-                                          <p:stCondLst>
-                                            <p:cond delay="0"/>
-                                          </p:stCondLst>
-                                        </p:cTn>
-                                        <p:tgtEl>
-                                          <p:spTgt spid="6"/>
+                                          <p:spTgt spid="4"/>
                                         </p:tgtEl>
                                         <p:attrNameLst>
                                           <p:attrName>style.visibility</p:attrName>
@@ -12260,9 +13638,9 @@
                                     </p:set>
                                     <p:anim calcmode="lin" valueType="num">
                                       <p:cBhvr>
-                                        <p:cTn id="18" dur="450" fill="hold"/>
-                                        <p:tgtEl>
-                                          <p:spTgt spid="6"/>
+                                        <p:cTn id="12" dur="550" fill="hold"/>
+                                        <p:tgtEl>
+                                          <p:spTgt spid="4"/>
                                         </p:tgtEl>
                                         <p:attrNameLst>
                                           <p:attrName>ppt_w</p:attrName>
@@ -12274,9 +13652,14 @@
                                             <p:strVal val="0"/>
                                           </p:val>
                                         </p:tav>
-                                        <p:tav tm="70000">
-                                          <p:val>
-                                            <p:strVal val="#ppt_w*1.07"/>
+                                        <p:tav tm="60000">
+                                          <p:val>
+                                            <p:strVal val="#ppt_w*1.14"/>
+                                          </p:val>
+                                        </p:tav>
+                                        <p:tav tm="82000">
+                                          <p:val>
+                                            <p:strVal val="#ppt_w*0.97"/>
                                           </p:val>
                                         </p:tav>
                                         <p:tav tm="100000">
@@ -12288,9 +13671,9 @@
                                     </p:anim>
                                     <p:anim calcmode="lin" valueType="num">
                                       <p:cBhvr>
-                                        <p:cTn id="19" dur="450" fill="hold"/>
-                                        <p:tgtEl>
-                                          <p:spTgt spid="6"/>
+                                        <p:cTn id="13" dur="550" fill="hold"/>
+                                        <p:tgtEl>
+                                          <p:spTgt spid="4"/>
                                         </p:tgtEl>
                                         <p:attrNameLst>
                                           <p:attrName>ppt_h</p:attrName>
@@ -12302,9 +13685,14 @@
                                             <p:strVal val="0"/>
                                           </p:val>
                                         </p:tav>
-                                        <p:tav tm="70000">
-                                          <p:val>
-                                            <p:strVal val="#ppt_h*1.07"/>
+                                        <p:tav tm="60000">
+                                          <p:val>
+                                            <p:strVal val="#ppt_h*1.14"/>
+                                          </p:val>
+                                        </p:tav>
+                                        <p:tav tm="82000">
+                                          <p:val>
+                                            <p:strVal val="#ppt_h*0.97"/>
                                           </p:val>
                                         </p:tav>
                                         <p:tav tm="100000">
@@ -12316,9 +13704,9 @@
                                     </p:anim>
                                     <p:animEffect transition="in" filter="fade">
                                       <p:cBhvr>
-                                        <p:cTn id="20" dur="225"/>
-                                        <p:tgtEl>
-                                          <p:spTgt spid="6"/>
+                                        <p:cTn id="14" dur="220"/>
+                                        <p:tgtEl>
+                                          <p:spTgt spid="4"/>
                                         </p:tgtEl>
                                       </p:cBhvr>
                                     </p:animEffect>
@@ -12332,32 +13720,32 @@
                     </p:cTn>
                   </p:par>
                   <p:par>
-                    <p:cTn id="31" fill="hold">
+                    <p:cTn id="27" fill="hold">
                       <p:stCondLst>
                         <p:cond delay="indefinite"/>
                       </p:stCondLst>
                       <p:childTnLst>
                         <p:par>
-                          <p:cTn id="32" fill="hold">
+                          <p:cTn id="28" fill="hold">
                             <p:stCondLst>
                               <p:cond delay="0"/>
                             </p:stCondLst>
                             <p:childTnLst>
                               <p:par>
-                                <p:cTn id="23" presetID="22" presetClass="entr" presetSubtype="8" fill="hold" grpId="0" nodeType="clickEffect">
+                                <p:cTn id="17" presetID="53" presetClass="entr" presetSubtype="16" fill="hold" grpId="0" nodeType="clickEffect">
                                   <p:stCondLst>
                                     <p:cond delay="0"/>
                                   </p:stCondLst>
                                   <p:childTnLst>
                                     <p:set>
                                       <p:cBhvr>
-                                        <p:cTn id="24" dur="1" fill="hold">
+                                        <p:cTn id="18" dur="1" fill="hold">
                                           <p:stCondLst>
                                             <p:cond delay="0"/>
                                           </p:stCondLst>
                                         </p:cTn>
                                         <p:tgtEl>
-                                          <p:spTgt spid="7"/>
+                                          <p:spTgt spid="5"/>
                                         </p:tgtEl>
                                         <p:attrNameLst>
                                           <p:attrName>style.visibility</p:attrName>
@@ -12367,11 +13755,77 @@
                                         <p:strVal val="visible"/>
                                       </p:to>
                                     </p:set>
-                                    <p:animEffect transition="in" filter="wipe(left)">
-                                      <p:cBhvr>
-                                        <p:cTn id="25" dur="500"/>
-                                        <p:tgtEl>
-                                          <p:spTgt spid="7"/>
+                                    <p:anim calcmode="lin" valueType="num">
+                                      <p:cBhvr>
+                                        <p:cTn id="19" dur="550" fill="hold"/>
+                                        <p:tgtEl>
+                                          <p:spTgt spid="5"/>
+                                        </p:tgtEl>
+                                        <p:attrNameLst>
+                                          <p:attrName>ppt_w</p:attrName>
+                                        </p:attrNameLst>
+                                      </p:cBhvr>
+                                      <p:tavLst>
+                                        <p:tav tm="0">
+                                          <p:val>
+                                            <p:strVal val="0"/>
+                                          </p:val>
+                                        </p:tav>
+                                        <p:tav tm="60000">
+                                          <p:val>
+                                            <p:strVal val="#ppt_w*1.14"/>
+                                          </p:val>
+                                        </p:tav>
+                                        <p:tav tm="82000">
+                                          <p:val>
+                                            <p:strVal val="#ppt_w*0.97"/>
+                                          </p:val>
+                                        </p:tav>
+                                        <p:tav tm="100000">
+                                          <p:val>
+                                            <p:strVal val="#ppt_w"/>
+                                          </p:val>
+                                        </p:tav>
+                                      </p:tavLst>
+                                    </p:anim>
+                                    <p:anim calcmode="lin" valueType="num">
+                                      <p:cBhvr>
+                                        <p:cTn id="20" dur="550" fill="hold"/>
+                                        <p:tgtEl>
+                                          <p:spTgt spid="5"/>
+                                        </p:tgtEl>
+                                        <p:attrNameLst>
+                                          <p:attrName>ppt_h</p:attrName>
+                                        </p:attrNameLst>
+                                      </p:cBhvr>
+                                      <p:tavLst>
+                                        <p:tav tm="0">
+                                          <p:val>
+                                            <p:strVal val="0"/>
+                                          </p:val>
+                                        </p:tav>
+                                        <p:tav tm="60000">
+                                          <p:val>
+                                            <p:strVal val="#ppt_h*1.14"/>
+                                          </p:val>
+                                        </p:tav>
+                                        <p:tav tm="82000">
+                                          <p:val>
+                                            <p:strVal val="#ppt_h*0.97"/>
+                                          </p:val>
+                                        </p:tav>
+                                        <p:tav tm="100000">
+                                          <p:val>
+                                            <p:strVal val="#ppt_h"/>
+                                          </p:val>
+                                        </p:tav>
+                                      </p:tavLst>
+                                    </p:anim>
+                                    <p:animEffect transition="in" filter="fade">
+                                      <p:cBhvr>
+                                        <p:cTn id="21" dur="220"/>
+                                        <p:tgtEl>
+                                          <p:spTgt spid="5"/>
                                         </p:tgtEl>
                                       </p:cBhvr>
                                     </p:animEffect>
@@ -12379,20 +13833,20 @@
                                 </p:cTn>
                               </p:par>
                               <p:par>
-                                <p:cTn id="26" presetID="53" presetClass="entr" presetSubtype="16" fill="hold" grpId="0" nodeType="withEffect">
+                                <p:cTn id="22" presetID="53" presetClass="entr" presetSubtype="16" fill="hold" grpId="0" nodeType="withEffect">
                                   <p:stCondLst>
                                     <p:cond delay="350"/>
                                   </p:stCondLst>
                                   <p:childTnLst>
                                     <p:set>
                                       <p:cBhvr>
-                                        <p:cTn id="27" dur="1" fill="hold">
+                                        <p:cTn id="23" dur="1" fill="hold">
                                           <p:stCondLst>
                                             <p:cond delay="0"/>
                                           </p:stCondLst>
                                         </p:cTn>
                                         <p:tgtEl>
-                                          <p:spTgt spid="8"/>
+                                          <p:spTgt spid="6"/>
                                         </p:tgtEl>
                                         <p:attrNameLst>
                                           <p:attrName>style.visibility</p:attrName>
@@ -12404,9 +13858,9 @@
                                     </p:set>
                                     <p:anim calcmode="lin" valueType="num">
                                       <p:cBhvr>
-                                        <p:cTn id="28" dur="450" fill="hold"/>
-                                        <p:tgtEl>
-                                          <p:spTgt spid="8"/>
+                                        <p:cTn id="24" dur="550" fill="hold"/>
+                                        <p:tgtEl>
+                                          <p:spTgt spid="6"/>
                                         </p:tgtEl>
                                         <p:attrNameLst>
                                           <p:attrName>ppt_w</p:attrName>
@@ -12418,9 +13872,14 @@
                                             <p:strVal val="0"/>
                                           </p:val>
                                         </p:tav>
-                                        <p:tav tm="70000">
-                                          <p:val>
-                                            <p:strVal val="#ppt_w*1.07"/>
+                                        <p:tav tm="60000">
+                                          <p:val>
+                                            <p:strVal val="#ppt_w*1.14"/>
+                                          </p:val>
+                                        </p:tav>
+                                        <p:tav tm="82000">
+                                          <p:val>
+                                            <p:strVal val="#ppt_w*0.97"/>
                                           </p:val>
                                         </p:tav>
                                         <p:tav tm="100000">
@@ -12432,9 +13891,9 @@
                                     </p:anim>
                                     <p:anim calcmode="lin" valueType="num">
                                       <p:cBhvr>
-                                        <p:cTn id="29" dur="450" fill="hold"/>
-                                        <p:tgtEl>
-                                          <p:spTgt spid="8"/>
+                                        <p:cTn id="25" dur="550" fill="hold"/>
+                                        <p:tgtEl>
+                                          <p:spTgt spid="6"/>
                                         </p:tgtEl>
                                         <p:attrNameLst>
                                           <p:attrName>ppt_h</p:attrName>
@@ -12446,9 +13905,14 @@
                                             <p:strVal val="0"/>
                                           </p:val>
                                         </p:tav>
-                                        <p:tav tm="70000">
-                                          <p:val>
-                                            <p:strVal val="#ppt_h*1.07"/>
+                                        <p:tav tm="60000">
+                                          <p:val>
+                                            <p:strVal val="#ppt_h*1.14"/>
+                                          </p:val>
+                                        </p:tav>
+                                        <p:tav tm="82000">
+                                          <p:val>
+                                            <p:strVal val="#ppt_h*0.97"/>
                                           </p:val>
                                         </p:tav>
                                         <p:tav tm="100000">
@@ -12460,9 +13924,9 @@
                                     </p:anim>
                                     <p:animEffect transition="in" filter="fade">
                                       <p:cBhvr>
-                                        <p:cTn id="30" dur="225"/>
-                                        <p:tgtEl>
-                                          <p:spTgt spid="8"/>
+                                        <p:cTn id="26" dur="220"/>
+                                        <p:tgtEl>
+                                          <p:spTgt spid="6"/>
                                         </p:tgtEl>
                                       </p:cBhvr>
                                     </p:animEffect>
@@ -12476,32 +13940,32 @@
                     </p:cTn>
                   </p:par>
                   <p:par>
-                    <p:cTn id="41" fill="hold">
+                    <p:cTn id="39" fill="hold">
                       <p:stCondLst>
                         <p:cond delay="indefinite"/>
                       </p:stCondLst>
                       <p:childTnLst>
                         <p:par>
-                          <p:cTn id="42" fill="hold">
+                          <p:cTn id="40" fill="hold">
                             <p:stCondLst>
                               <p:cond delay="0"/>
                             </p:stCondLst>
                             <p:childTnLst>
                               <p:par>
-                                <p:cTn id="33" presetID="22" presetClass="entr" presetSubtype="8" fill="hold" grpId="0" nodeType="clickEffect">
+                                <p:cTn id="29" presetID="53" presetClass="entr" presetSubtype="16" fill="hold" grpId="0" nodeType="clickEffect">
                                   <p:stCondLst>
                                     <p:cond delay="0"/>
                                   </p:stCondLst>
                                   <p:childTnLst>
                                     <p:set>
                                       <p:cBhvr>
-                                        <p:cTn id="34" dur="1" fill="hold">
+                                        <p:cTn id="30" dur="1" fill="hold">
                                           <p:stCondLst>
                                             <p:cond delay="0"/>
                                           </p:stCondLst>
                                         </p:cTn>
                                         <p:tgtEl>
-                                          <p:spTgt spid="9"/>
+                                          <p:spTgt spid="7"/>
                                         </p:tgtEl>
                                         <p:attrNameLst>
                                           <p:attrName>style.visibility</p:attrName>
@@ -12511,11 +13975,77 @@
                                         <p:strVal val="visible"/>
                                       </p:to>
                                     </p:set>
-                                    <p:animEffect transition="in" filter="wipe(left)">
-                                      <p:cBhvr>
-                                        <p:cTn id="35" dur="500"/>
-                                        <p:tgtEl>
-                                          <p:spTgt spid="9"/>
+                                    <p:anim calcmode="lin" valueType="num">
+                                      <p:cBhvr>
+                                        <p:cTn id="31" dur="550" fill="hold"/>
+                                        <p:tgtEl>
+                                          <p:spTgt spid="7"/>
+                                        </p:tgtEl>
+                                        <p:attrNameLst>
+                                          <p:attrName>ppt_w</p:attrName>
+                                        </p:attrNameLst>
+                                      </p:cBhvr>
+                                      <p:tavLst>
+                                        <p:tav tm="0">
+                                          <p:val>
+                                            <p:strVal val="0"/>
+                                          </p:val>
+                                        </p:tav>
+                                        <p:tav tm="60000">
+                                          <p:val>
+                                            <p:strVal val="#ppt_w*1.14"/>
+                                          </p:val>
+                                        </p:tav>
+                                        <p:tav tm="82000">
+                                          <p:val>
+                                            <p:strVal val="#ppt_w*0.97"/>
+                                          </p:val>
+                                        </p:tav>
+                                        <p:tav tm="100000">
+                                          <p:val>
+                                            <p:strVal val="#ppt_w"/>
+                                          </p:val>
+                                        </p:tav>
+                                      </p:tavLst>
+                                    </p:anim>
+                                    <p:anim calcmode="lin" valueType="num">
+                                      <p:cBhvr>
+                                        <p:cTn id="32" dur="550" fill="hold"/>
+                                        <p:tgtEl>
+                                          <p:spTgt spid="7"/>
+                                        </p:tgtEl>
+                                        <p:attrNameLst>
+                                          <p:attrName>ppt_h</p:attrName>
+                                        </p:attrNameLst>
+                                      </p:cBhvr>
+                                      <p:tavLst>
+                                        <p:tav tm="0">
+                                          <p:val>
+                                            <p:strVal val="0"/>
+                                          </p:val>
+                                        </p:tav>
+                                        <p:tav tm="60000">
+                                          <p:val>
+                                            <p:strVal val="#ppt_h*1.14"/>
+                                          </p:val>
+                                        </p:tav>
+                                        <p:tav tm="82000">
+                                          <p:val>
+                                            <p:strVal val="#ppt_h*0.97"/>
+                                          </p:val>
+                                        </p:tav>
+                                        <p:tav tm="100000">
+                                          <p:val>
+                                            <p:strVal val="#ppt_h"/>
+                                          </p:val>
+                                        </p:tav>
+                                      </p:tavLst>
+                                    </p:anim>
+                                    <p:animEffect transition="in" filter="fade">
+                                      <p:cBhvr>
+                                        <p:cTn id="33" dur="220"/>
+                                        <p:tgtEl>
+                                          <p:spTgt spid="7"/>
                                         </p:tgtEl>
                                       </p:cBhvr>
                                     </p:animEffect>
@@ -12523,20 +14053,20 @@
                                 </p:cTn>
                               </p:par>
                               <p:par>
-                                <p:cTn id="36" presetID="53" presetClass="entr" presetSubtype="16" fill="hold" grpId="0" nodeType="withEffect">
+                                <p:cTn id="34" presetID="53" presetClass="entr" presetSubtype="16" fill="hold" grpId="0" nodeType="withEffect">
                                   <p:stCondLst>
                                     <p:cond delay="350"/>
                                   </p:stCondLst>
                                   <p:childTnLst>
                                     <p:set>
                                       <p:cBhvr>
-                                        <p:cTn id="37" dur="1" fill="hold">
+                                        <p:cTn id="35" dur="1" fill="hold">
                                           <p:stCondLst>
                                             <p:cond delay="0"/>
                                           </p:stCondLst>
                                         </p:cTn>
                                         <p:tgtEl>
-                                          <p:spTgt spid="10"/>
+                                          <p:spTgt spid="8"/>
                                         </p:tgtEl>
                                         <p:attrNameLst>
                                           <p:attrName>style.visibility</p:attrName>
@@ -12548,9 +14078,9 @@
                                     </p:set>
                                     <p:anim calcmode="lin" valueType="num">
                                       <p:cBhvr>
-                                        <p:cTn id="38" dur="450" fill="hold"/>
-                                        <p:tgtEl>
-                                          <p:spTgt spid="10"/>
+                                        <p:cTn id="36" dur="550" fill="hold"/>
+                                        <p:tgtEl>
+                                          <p:spTgt spid="8"/>
                                         </p:tgtEl>
                                         <p:attrNameLst>
                                           <p:attrName>ppt_w</p:attrName>
@@ -12562,9 +14092,14 @@
                                             <p:strVal val="0"/>
                                           </p:val>
                                         </p:tav>
-                                        <p:tav tm="70000">
-                                          <p:val>
-                                            <p:strVal val="#ppt_w*1.07"/>
+                                        <p:tav tm="60000">
+                                          <p:val>
+                                            <p:strVal val="#ppt_w*1.14"/>
+                                          </p:val>
+                                        </p:tav>
+                                        <p:tav tm="82000">
+                                          <p:val>
+                                            <p:strVal val="#ppt_w*0.97"/>
                                           </p:val>
                                         </p:tav>
                                         <p:tav tm="100000">
@@ -12576,9 +14111,9 @@
                                     </p:anim>
                                     <p:anim calcmode="lin" valueType="num">
                                       <p:cBhvr>
-                                        <p:cTn id="39" dur="450" fill="hold"/>
-                                        <p:tgtEl>
-                                          <p:spTgt spid="10"/>
+                                        <p:cTn id="37" dur="550" fill="hold"/>
+                                        <p:tgtEl>
+                                          <p:spTgt spid="8"/>
                                         </p:tgtEl>
                                         <p:attrNameLst>
                                           <p:attrName>ppt_h</p:attrName>
@@ -12590,9 +14125,14 @@
                                             <p:strVal val="0"/>
                                           </p:val>
                                         </p:tav>
-                                        <p:tav tm="70000">
-                                          <p:val>
-                                            <p:strVal val="#ppt_h*1.07"/>
+                                        <p:tav tm="60000">
+                                          <p:val>
+                                            <p:strVal val="#ppt_h*1.14"/>
+                                          </p:val>
+                                        </p:tav>
+                                        <p:tav tm="82000">
+                                          <p:val>
+                                            <p:strVal val="#ppt_h*0.97"/>
                                           </p:val>
                                         </p:tav>
                                         <p:tav tm="100000">
@@ -12604,9 +14144,9 @@
                                     </p:anim>
                                     <p:animEffect transition="in" filter="fade">
                                       <p:cBhvr>
-                                        <p:cTn id="40" dur="225"/>
-                                        <p:tgtEl>
-                                          <p:spTgt spid="10"/>
+                                        <p:cTn id="38" dur="220"/>
+                                        <p:tgtEl>
+                                          <p:spTgt spid="8"/>
                                         </p:tgtEl>
                                       </p:cBhvr>
                                     </p:animEffect>
@@ -12620,32 +14160,32 @@
                     </p:cTn>
                   </p:par>
                   <p:par>
-                    <p:cTn id="48" fill="hold">
+                    <p:cTn id="51" fill="hold">
                       <p:stCondLst>
                         <p:cond delay="indefinite"/>
                       </p:stCondLst>
                       <p:childTnLst>
                         <p:par>
-                          <p:cTn id="49" fill="hold">
+                          <p:cTn id="52" fill="hold">
                             <p:stCondLst>
                               <p:cond delay="0"/>
                             </p:stCondLst>
                             <p:childTnLst>
                               <p:par>
-                                <p:cTn id="43" presetID="53" presetClass="entr" presetSubtype="16" fill="hold" grpId="0" nodeType="clickEffect">
+                                <p:cTn id="41" presetID="53" presetClass="entr" presetSubtype="16" fill="hold" grpId="0" nodeType="clickEffect">
                                   <p:stCondLst>
                                     <p:cond delay="0"/>
                                   </p:stCondLst>
                                   <p:childTnLst>
                                     <p:set>
                                       <p:cBhvr>
-                                        <p:cTn id="44" dur="1" fill="hold">
+                                        <p:cTn id="42" dur="1" fill="hold">
                                           <p:stCondLst>
                                             <p:cond delay="0"/>
                                           </p:stCondLst>
                                         </p:cTn>
                                         <p:tgtEl>
-                                          <p:spTgt spid="11"/>
+                                          <p:spTgt spid="9"/>
                                         </p:tgtEl>
                                         <p:attrNameLst>
                                           <p:attrName>style.visibility</p:attrName>
@@ -12657,9 +14197,9 @@
                                     </p:set>
                                     <p:anim calcmode="lin" valueType="num">
                                       <p:cBhvr>
-                                        <p:cTn id="45" dur="550" fill="hold"/>
-                                        <p:tgtEl>
-                                          <p:spTgt spid="11"/>
+                                        <p:cTn id="43" dur="550" fill="hold"/>
+                                        <p:tgtEl>
+                                          <p:spTgt spid="9"/>
                                         </p:tgtEl>
                                         <p:attrNameLst>
                                           <p:attrName>ppt_w</p:attrName>
@@ -12671,9 +14211,14 @@
                                             <p:strVal val="0"/>
                                           </p:val>
                                         </p:tav>
-                                        <p:tav tm="70000">
-                                          <p:val>
-                                            <p:strVal val="#ppt_w*1.07"/>
+                                        <p:tav tm="60000">
+                                          <p:val>
+                                            <p:strVal val="#ppt_w*1.14"/>
+                                          </p:val>
+                                        </p:tav>
+                                        <p:tav tm="82000">
+                                          <p:val>
+                                            <p:strVal val="#ppt_w*0.97"/>
                                           </p:val>
                                         </p:tav>
                                         <p:tav tm="100000">
@@ -12685,9 +14230,9 @@
                                     </p:anim>
                                     <p:anim calcmode="lin" valueType="num">
                                       <p:cBhvr>
-                                        <p:cTn id="46" dur="550" fill="hold"/>
-                                        <p:tgtEl>
-                                          <p:spTgt spid="11"/>
+                                        <p:cTn id="44" dur="550" fill="hold"/>
+                                        <p:tgtEl>
+                                          <p:spTgt spid="9"/>
                                         </p:tgtEl>
                                         <p:attrNameLst>
                                           <p:attrName>ppt_h</p:attrName>
@@ -12699,9 +14244,14 @@
                                             <p:strVal val="0"/>
                                           </p:val>
                                         </p:tav>
-                                        <p:tav tm="70000">
-                                          <p:val>
-                                            <p:strVal val="#ppt_h*1.07"/>
+                                        <p:tav tm="60000">
+                                          <p:val>
+                                            <p:strVal val="#ppt_h*1.14"/>
+                                          </p:val>
+                                        </p:tav>
+                                        <p:tav tm="82000">
+                                          <p:val>
+                                            <p:strVal val="#ppt_h*0.97"/>
                                           </p:val>
                                         </p:tav>
                                         <p:tav tm="100000">
@@ -12713,12 +14263,250 @@
                                     </p:anim>
                                     <p:animEffect transition="in" filter="fade">
                                       <p:cBhvr>
-                                        <p:cTn id="47" dur="275"/>
+                                        <p:cTn id="45" dur="220"/>
+                                        <p:tgtEl>
+                                          <p:spTgt spid="9"/>
+                                        </p:tgtEl>
+                                      </p:cBhvr>
+                                    </p:animEffect>
+                                  </p:childTnLst>
+                                </p:cTn>
+                              </p:par>
+                              <p:par>
+                                <p:cTn id="46" presetID="53" presetClass="entr" presetSubtype="16" fill="hold" grpId="0" nodeType="withEffect">
+                                  <p:stCondLst>
+                                    <p:cond delay="350"/>
+                                  </p:stCondLst>
+                                  <p:childTnLst>
+                                    <p:set>
+                                      <p:cBhvr>
+                                        <p:cTn id="47" dur="1" fill="hold">
+                                          <p:stCondLst>
+                                            <p:cond delay="0"/>
+                                          </p:stCondLst>
+                                        </p:cTn>
+                                        <p:tgtEl>
+                                          <p:spTgt spid="10"/>
+                                        </p:tgtEl>
+                                        <p:attrNameLst>
+                                          <p:attrName>style.visibility</p:attrName>
+                                        </p:attrNameLst>
+                                      </p:cBhvr>
+                                      <p:to>
+                                        <p:strVal val="visible"/>
+                                      </p:to>
+                                    </p:set>
+                                    <p:anim calcmode="lin" valueType="num">
+                                      <p:cBhvr>
+                                        <p:cTn id="48" dur="550" fill="hold"/>
+                                        <p:tgtEl>
+                                          <p:spTgt spid="10"/>
+                                        </p:tgtEl>
+                                        <p:attrNameLst>
+                                          <p:attrName>ppt_w</p:attrName>
+                                        </p:attrNameLst>
+                                      </p:cBhvr>
+                                      <p:tavLst>
+                                        <p:tav tm="0">
+                                          <p:val>
+                                            <p:strVal val="0"/>
+                                          </p:val>
+                                        </p:tav>
+                                        <p:tav tm="60000">
+                                          <p:val>
+                                            <p:strVal val="#ppt_w*1.14"/>
+                                          </p:val>
+                                        </p:tav>
+                                        <p:tav tm="82000">
+                                          <p:val>
+                                            <p:strVal val="#ppt_w*0.97"/>
+                                          </p:val>
+                                        </p:tav>
+                                        <p:tav tm="100000">
+                                          <p:val>
+                                            <p:strVal val="#ppt_w"/>
+                                          </p:val>
+                                        </p:tav>
+                                      </p:tavLst>
+                                    </p:anim>
+                                    <p:anim calcmode="lin" valueType="num">
+                                      <p:cBhvr>
+                                        <p:cTn id="49" dur="550" fill="hold"/>
+                                        <p:tgtEl>
+                                          <p:spTgt spid="10"/>
+                                        </p:tgtEl>
+                                        <p:attrNameLst>
+                                          <p:attrName>ppt_h</p:attrName>
+                                        </p:attrNameLst>
+                                      </p:cBhvr>
+                                      <p:tavLst>
+                                        <p:tav tm="0">
+                                          <p:val>
+                                            <p:strVal val="0"/>
+                                          </p:val>
+                                        </p:tav>
+                                        <p:tav tm="60000">
+                                          <p:val>
+                                            <p:strVal val="#ppt_h*1.14"/>
+                                          </p:val>
+                                        </p:tav>
+                                        <p:tav tm="82000">
+                                          <p:val>
+                                            <p:strVal val="#ppt_h*0.97"/>
+                                          </p:val>
+                                        </p:tav>
+                                        <p:tav tm="100000">
+                                          <p:val>
+                                            <p:strVal val="#ppt_h"/>
+                                          </p:val>
+                                        </p:tav>
+                                      </p:tavLst>
+                                    </p:anim>
+                                    <p:animEffect transition="in" filter="fade">
+                                      <p:cBhvr>
+                                        <p:cTn id="50" dur="220"/>
+                                        <p:tgtEl>
+                                          <p:spTgt spid="10"/>
+                                        </p:tgtEl>
+                                      </p:cBhvr>
+                                    </p:animEffect>
+                                  </p:childTnLst>
+                                </p:cTn>
+                              </p:par>
+                            </p:childTnLst>
+                          </p:cTn>
+                        </p:par>
+                      </p:childTnLst>
+                    </p:cTn>
+                  </p:par>
+                  <p:par>
+                    <p:cTn id="61" fill="hold">
+                      <p:stCondLst>
+                        <p:cond delay="indefinite"/>
+                      </p:stCondLst>
+                      <p:childTnLst>
+                        <p:par>
+                          <p:cTn id="62" fill="hold">
+                            <p:stCondLst>
+                              <p:cond delay="0"/>
+                            </p:stCondLst>
+                            <p:childTnLst>
+                              <p:par>
+                                <p:cTn id="53" presetID="53" presetClass="entr" presetSubtype="16" fill="hold" grpId="0" nodeType="clickEffect">
+                                  <p:stCondLst>
+                                    <p:cond delay="0"/>
+                                  </p:stCondLst>
+                                  <p:childTnLst>
+                                    <p:set>
+                                      <p:cBhvr>
+                                        <p:cTn id="54" dur="1" fill="hold">
+                                          <p:stCondLst>
+                                            <p:cond delay="0"/>
+                                          </p:stCondLst>
+                                        </p:cTn>
                                         <p:tgtEl>
                                           <p:spTgt spid="11"/>
                                         </p:tgtEl>
+                                        <p:attrNameLst>
+                                          <p:attrName>style.visibility</p:attrName>
+                                        </p:attrNameLst>
+                                      </p:cBhvr>
+                                      <p:to>
+                                        <p:strVal val="visible"/>
+                                      </p:to>
+                                    </p:set>
+                                    <p:anim calcmode="lin" valueType="num">
+                                      <p:cBhvr>
+                                        <p:cTn id="55" dur="650" fill="hold"/>
+                                        <p:tgtEl>
+                                          <p:spTgt spid="11"/>
+                                        </p:tgtEl>
+                                        <p:attrNameLst>
+                                          <p:attrName>ppt_w</p:attrName>
+                                        </p:attrNameLst>
+                                      </p:cBhvr>
+                                      <p:tavLst>
+                                        <p:tav tm="0">
+                                          <p:val>
+                                            <p:strVal val="0"/>
+                                          </p:val>
+                                        </p:tav>
+                                        <p:tav tm="60000">
+                                          <p:val>
+                                            <p:strVal val="#ppt_w*1.14"/>
+                                          </p:val>
+                                        </p:tav>
+                                        <p:tav tm="82000">
+                                          <p:val>
+                                            <p:strVal val="#ppt_w*0.97"/>
+                                          </p:val>
+                                        </p:tav>
+                                        <p:tav tm="100000">
+                                          <p:val>
+                                            <p:strVal val="#ppt_w"/>
+                                          </p:val>
+                                        </p:tav>
+                                      </p:tavLst>
+                                    </p:anim>
+                                    <p:anim calcmode="lin" valueType="num">
+                                      <p:cBhvr>
+                                        <p:cTn id="56" dur="650" fill="hold"/>
+                                        <p:tgtEl>
+                                          <p:spTgt spid="11"/>
+                                        </p:tgtEl>
+                                        <p:attrNameLst>
+                                          <p:attrName>ppt_h</p:attrName>
+                                        </p:attrNameLst>
+                                      </p:cBhvr>
+                                      <p:tavLst>
+                                        <p:tav tm="0">
+                                          <p:val>
+                                            <p:strVal val="0"/>
+                                          </p:val>
+                                        </p:tav>
+                                        <p:tav tm="60000">
+                                          <p:val>
+                                            <p:strVal val="#ppt_h*1.14"/>
+                                          </p:val>
+                                        </p:tav>
+                                        <p:tav tm="82000">
+                                          <p:val>
+                                            <p:strVal val="#ppt_h*0.97"/>
+                                          </p:val>
+                                        </p:tav>
+                                        <p:tav tm="100000">
+                                          <p:val>
+                                            <p:strVal val="#ppt_h"/>
+                                          </p:val>
+                                        </p:tav>
+                                      </p:tavLst>
+                                    </p:anim>
+                                    <p:animEffect transition="in" filter="fade">
+                                      <p:cBhvr>
+                                        <p:cTn id="57" dur="260"/>
+                                        <p:tgtEl>
+                                          <p:spTgt spid="11"/>
+                                        </p:tgtEl>
                                       </p:cBhvr>
                                     </p:animEffect>
+                                  </p:childTnLst>
+                                </p:cTn>
+                              </p:par>
+                              <p:par>
+                                <p:cTn id="58" presetID="6" presetClass="emph" presetSubtype="0" fill="hold" grpId="0" nodeType="withEffect">
+                                  <p:stCondLst>
+                                    <p:cond delay="750"/>
+                                  </p:stCondLst>
+                                  <p:childTnLst>
+                                    <p:animScale>
+                                      <p:cBhvr>
+                                        <p:cTn id="60" dur="180" autoRev="1" fill="hold"/>
+                                        <p:tgtEl>
+                                          <p:spTgt spid="11"/>
+                                        </p:tgtEl>
+                                      </p:cBhvr>
+                                      <p:by x="112000" y="112000"/>
+                                    </p:animScale>
                                   </p:childTnLst>
                                 </p:cTn>
                               </p:par>
@@ -12750,7 +14538,7 @@
       </p:par>
     </p:tnLst>
     <p:bldLst>
-      <p:bldP spid="1" grpId="0" animBg="1"/>
+      <p:bldP spid="3" grpId="0" animBg="1"/>
       <p:bldP spid="4" grpId="0" animBg="1"/>
       <p:bldP spid="5" grpId="0" animBg="1"/>
       <p:bldP spid="6" grpId="0" animBg="1"/>
@@ -12758,7 +14546,6 @@
       <p:bldP spid="8" grpId="0" animBg="1"/>
       <p:bldP spid="9" grpId="0" animBg="1"/>
       <p:bldP spid="10" grpId="0" animBg="1"/>
-      <p:bldP spid="11" grpId="0" animBg="1"/>
     </p:bldLst>
   </p:timing>
 </p:sld>
@@ -12911,12 +14698,12 @@
         </p:nvSpPr>
         <p:spPr>
           <a:xfrm rot="120000">
-            <a:off x="6172200" y="3063240"/>
-            <a:ext cx="5349240" cy="2514600"/>
+            <a:off x="6172200" y="3429000"/>
+            <a:ext cx="5349240" cy="2103120"/>
           </a:xfrm>
           <a:prstGeom prst="roundRect">
             <a:avLst>
-              <a:gd name="adj" fmla="val 10909"/>
+              <a:gd name="adj" fmla="val 13043"/>
             </a:avLst>
           </a:prstGeom>
           <a:solidFill>
@@ -12934,23 +14721,6 @@
         <p:txBody>
           <a:bodyPr wrap="square" lIns="304800" tIns="431800" rIns="431800" bIns="304800" rtlCol="0" anchor="ctr"/>
           <a:lstStyle/>
-          <a:p>
-            <a:pPr algn="l" indent="0" marL="0">
-              <a:buNone/>
-            </a:pPr>
-            <a:r>
-              <a:rPr lang="en-US" sz="1300" spc="200" kern="0" dirty="0">
-                <a:solidFill>
-                  <a:srgbClr val="BDB8C8"/>
-                </a:solidFill>
-                <a:latin typeface="Consolas" pitchFamily="34" charset="0"/>
-                <a:ea typeface="Consolas" pitchFamily="34" charset="-122"/>
-                <a:cs typeface="Consolas" pitchFamily="34" charset="-120"/>
-              </a:rPr>
-              <a:t>NOBODY BUYS YOUR SERVICE FOR THE SERVICE</a:t>
-            </a:r>
-            <a:endParaRPr lang="en-US" sz="1300" dirty="0"/>
-          </a:p>
           <a:p>
             <a:pPr algn="l" indent="0" marL="0">
               <a:buNone/>
@@ -12994,7 +14764,63 @@
               </a:rPr>
               <a:t> you hand them.</a:t>
             </a:r>
-            <a:endParaRPr lang="en-US" sz="1300" dirty="0"/>
+            <a:endParaRPr lang="en-US" sz="3600" dirty="0"/>
+          </a:p>
+        </p:txBody>
+      </p:sp>
+      <p:sp>
+        <p:nvSpPr>
+          <p:cNvPr id="6" name="Service"/>
+          <p:cNvSpPr txBox="1"/>
+          <p:nvPr/>
+        </p:nvSpPr>
+        <p:spPr>
+          <a:xfrm>
+            <a:off x="6172200" y="2240280"/>
+            <a:ext cx="5349240" cy="868680"/>
+          </a:xfrm>
+          <a:prstGeom prst="rect">
+            <a:avLst/>
+          </a:prstGeom>
+          <a:noFill/>
+          <a:ln/>
+        </p:spPr>
+        <p:txBody>
+          <a:bodyPr wrap="square" lIns="0" tIns="0" rIns="0" bIns="0" rtlCol="0" anchor="t"/>
+          <a:lstStyle/>
+          <a:p>
+            <a:pPr indent="0" marL="0">
+              <a:buNone/>
+            </a:pPr>
+            <a:r>
+              <a:rPr lang="en-US" sz="2400" b="1" dirty="0">
+                <a:solidFill>
+                  <a:srgbClr val="FFFFFF"/>
+                </a:solidFill>
+                <a:latin typeface="Arial" pitchFamily="34" charset="0"/>
+                <a:ea typeface="Arial" pitchFamily="34" charset="-122"/>
+                <a:cs typeface="Arial" pitchFamily="34" charset="-120"/>
+              </a:rPr>
+              <a:t>Nobody buys your service</a:t>
+            </a:r>
+            <a:endParaRPr lang="en-US" sz="2400" dirty="0"/>
+          </a:p>
+          <a:p>
+            <a:pPr indent="0" marL="0">
+              <a:buNone/>
+            </a:pPr>
+            <a:r>
+              <a:rPr lang="en-US" sz="2400" b="1" dirty="0">
+                <a:solidFill>
+                  <a:srgbClr val="FFFFFF"/>
+                </a:solidFill>
+                <a:latin typeface="Arial" pitchFamily="34" charset="0"/>
+                <a:ea typeface="Arial" pitchFamily="34" charset="-122"/>
+                <a:cs typeface="Arial" pitchFamily="34" charset="-120"/>
+              </a:rPr>
+              <a:t>for the service.</a:t>
+            </a:r>
+            <a:endParaRPr lang="en-US" sz="2400" dirty="0"/>
           </a:p>
         </p:txBody>
       </p:sp>
@@ -13030,7 +14856,7 @@
                             </p:stCondLst>
                             <p:childTnLst>
                               <p:par>
-                                <p:cTn id="3" presetID="42" presetClass="entr" presetSubtype="0" fill="hold" grpId="0" nodeType="afterEffect">
+                                <p:cTn id="3" presetID="53" presetClass="entr" presetSubtype="16" fill="hold" grpId="0" nodeType="afterEffect">
                                   <p:stCondLst>
                                     <p:cond delay="0"/>
                                   </p:stCondLst>
@@ -13043,7 +14869,7 @@
                                           </p:stCondLst>
                                         </p:cTn>
                                         <p:tgtEl>
-                                          <p:spTgt spid="1"/>
+                                          <p:spTgt spid="3"/>
                                         </p:tgtEl>
                                         <p:attrNameLst>
                                           <p:attrName>style.visibility</p:attrName>
@@ -13055,60 +14881,75 @@
                                     </p:set>
                                     <p:anim calcmode="lin" valueType="num">
                                       <p:cBhvr>
-                                        <p:cTn id="5" dur="500" fill="hold"/>
-                                        <p:tgtEl>
-                                          <p:spTgt spid="1"/>
-                                        </p:tgtEl>
-                                        <p:attrNameLst>
-                                          <p:attrName>ppt_x</p:attrName>
+                                        <p:cTn id="5" dur="550" fill="hold"/>
+                                        <p:tgtEl>
+                                          <p:spTgt spid="3"/>
+                                        </p:tgtEl>
+                                        <p:attrNameLst>
+                                          <p:attrName>ppt_w</p:attrName>
                                         </p:attrNameLst>
                                       </p:cBhvr>
                                       <p:tavLst>
                                         <p:tav tm="0">
                                           <p:val>
-                                            <p:strVal val="#ppt_x"/>
+                                            <p:strVal val="0"/>
+                                          </p:val>
+                                        </p:tav>
+                                        <p:tav tm="60000">
+                                          <p:val>
+                                            <p:strVal val="#ppt_w*1.14"/>
+                                          </p:val>
+                                        </p:tav>
+                                        <p:tav tm="82000">
+                                          <p:val>
+                                            <p:strVal val="#ppt_w*0.97"/>
                                           </p:val>
                                         </p:tav>
                                         <p:tav tm="100000">
                                           <p:val>
-                                            <p:strVal val="#ppt_x"/>
+                                            <p:strVal val="#ppt_w"/>
                                           </p:val>
                                         </p:tav>
                                       </p:tavLst>
                                     </p:anim>
                                     <p:anim calcmode="lin" valueType="num">
                                       <p:cBhvr>
-                                        <p:cTn id="6" dur="500" fill="hold"/>
-                                        <p:tgtEl>
-                                          <p:spTgt spid="1"/>
-                                        </p:tgtEl>
-                                        <p:attrNameLst>
-                                          <p:attrName>ppt_y</p:attrName>
+                                        <p:cTn id="6" dur="550" fill="hold"/>
+                                        <p:tgtEl>
+                                          <p:spTgt spid="3"/>
+                                        </p:tgtEl>
+                                        <p:attrNameLst>
+                                          <p:attrName>ppt_h</p:attrName>
                                         </p:attrNameLst>
                                       </p:cBhvr>
                                       <p:tavLst>
                                         <p:tav tm="0">
                                           <p:val>
-                                            <p:strVal val="#ppt_y+0.08"/>
-                                          </p:val>
-                                        </p:tav>
-                                        <p:tav tm="80000">
-                                          <p:val>
-                                            <p:strVal val="#ppt_y-0.006"/>
+                                            <p:strVal val="0"/>
+                                          </p:val>
+                                        </p:tav>
+                                        <p:tav tm="60000">
+                                          <p:val>
+                                            <p:strVal val="#ppt_h*1.14"/>
+                                          </p:val>
+                                        </p:tav>
+                                        <p:tav tm="82000">
+                                          <p:val>
+                                            <p:strVal val="#ppt_h*0.97"/>
                                           </p:val>
                                         </p:tav>
                                         <p:tav tm="100000">
                                           <p:val>
-                                            <p:strVal val="#ppt_y"/>
+                                            <p:strVal val="#ppt_h"/>
                                           </p:val>
                                         </p:tav>
                                       </p:tavLst>
                                     </p:anim>
                                     <p:animEffect transition="in" filter="fade">
                                       <p:cBhvr>
-                                        <p:cTn id="7" dur="500"/>
-                                        <p:tgtEl>
-                                          <p:spTgt spid="1"/>
+                                        <p:cTn id="7" dur="220"/>
+                                        <p:tgtEl>
+                                          <p:spTgt spid="3"/>
                                         </p:tgtEl>
                                       </p:cBhvr>
                                     </p:animEffect>
@@ -13159,7 +15000,7 @@
                                     </p:set>
                                     <p:anim calcmode="lin" valueType="num">
                                       <p:cBhvr>
-                                        <p:cTn id="12" dur="450" fill="hold"/>
+                                        <p:cTn id="12" dur="550" fill="hold"/>
                                         <p:tgtEl>
                                           <p:spTgt spid="4"/>
                                         </p:tgtEl>
@@ -13173,9 +15014,14 @@
                                             <p:strVal val="0"/>
                                           </p:val>
                                         </p:tav>
-                                        <p:tav tm="70000">
-                                          <p:val>
-                                            <p:strVal val="#ppt_w*1.07"/>
+                                        <p:tav tm="60000">
+                                          <p:val>
+                                            <p:strVal val="#ppt_w*1.14"/>
+                                          </p:val>
+                                        </p:tav>
+                                        <p:tav tm="82000">
+                                          <p:val>
+                                            <p:strVal val="#ppt_w*0.97"/>
                                           </p:val>
                                         </p:tav>
                                         <p:tav tm="100000">
@@ -13187,7 +15033,7 @@
                                     </p:anim>
                                     <p:anim calcmode="lin" valueType="num">
                                       <p:cBhvr>
-                                        <p:cTn id="13" dur="450" fill="hold"/>
+                                        <p:cTn id="13" dur="550" fill="hold"/>
                                         <p:tgtEl>
                                           <p:spTgt spid="4"/>
                                         </p:tgtEl>
@@ -13201,9 +15047,14 @@
                                             <p:strVal val="0"/>
                                           </p:val>
                                         </p:tav>
-                                        <p:tav tm="70000">
-                                          <p:val>
-                                            <p:strVal val="#ppt_h*1.07"/>
+                                        <p:tav tm="60000">
+                                          <p:val>
+                                            <p:strVal val="#ppt_h*1.14"/>
+                                          </p:val>
+                                        </p:tav>
+                                        <p:tav tm="82000">
+                                          <p:val>
+                                            <p:strVal val="#ppt_h*0.97"/>
                                           </p:val>
                                         </p:tav>
                                         <p:tav tm="100000">
@@ -13215,7 +15066,7 @@
                                     </p:anim>
                                     <p:animEffect transition="in" filter="fade">
                                       <p:cBhvr>
-                                        <p:cTn id="14" dur="225"/>
+                                        <p:cTn id="14" dur="220"/>
                                         <p:tgtEl>
                                           <p:spTgt spid="4"/>
                                         </p:tgtEl>
@@ -13256,7 +15107,7 @@
                                           </p:stCondLst>
                                         </p:cTn>
                                         <p:tgtEl>
-                                          <p:spTgt spid="5"/>
+                                          <p:spTgt spid="6"/>
                                         </p:tgtEl>
                                         <p:attrNameLst>
                                           <p:attrName>style.visibility</p:attrName>
@@ -13268,9 +15119,9 @@
                                     </p:set>
                                     <p:anim calcmode="lin" valueType="num">
                                       <p:cBhvr>
-                                        <p:cTn id="19" dur="450" fill="hold"/>
-                                        <p:tgtEl>
-                                          <p:spTgt spid="5"/>
+                                        <p:cTn id="19" dur="550" fill="hold"/>
+                                        <p:tgtEl>
+                                          <p:spTgt spid="6"/>
                                         </p:tgtEl>
                                         <p:attrNameLst>
                                           <p:attrName>ppt_w</p:attrName>
@@ -13282,9 +15133,14 @@
                                             <p:strVal val="0"/>
                                           </p:val>
                                         </p:tav>
-                                        <p:tav tm="70000">
-                                          <p:val>
-                                            <p:strVal val="#ppt_w*1.07"/>
+                                        <p:tav tm="60000">
+                                          <p:val>
+                                            <p:strVal val="#ppt_w*1.14"/>
+                                          </p:val>
+                                        </p:tav>
+                                        <p:tav tm="82000">
+                                          <p:val>
+                                            <p:strVal val="#ppt_w*0.97"/>
                                           </p:val>
                                         </p:tav>
                                         <p:tav tm="100000">
@@ -13296,9 +15152,9 @@
                                     </p:anim>
                                     <p:anim calcmode="lin" valueType="num">
                                       <p:cBhvr>
-                                        <p:cTn id="20" dur="450" fill="hold"/>
-                                        <p:tgtEl>
-                                          <p:spTgt spid="5"/>
+                                        <p:cTn id="20" dur="550" fill="hold"/>
+                                        <p:tgtEl>
+                                          <p:spTgt spid="6"/>
                                         </p:tgtEl>
                                         <p:attrNameLst>
                                           <p:attrName>ppt_h</p:attrName>
@@ -13310,9 +15166,14 @@
                                             <p:strVal val="0"/>
                                           </p:val>
                                         </p:tav>
-                                        <p:tav tm="70000">
-                                          <p:val>
-                                            <p:strVal val="#ppt_h*1.07"/>
+                                        <p:tav tm="60000">
+                                          <p:val>
+                                            <p:strVal val="#ppt_h*1.14"/>
+                                          </p:val>
+                                        </p:tav>
+                                        <p:tav tm="82000">
+                                          <p:val>
+                                            <p:strVal val="#ppt_h*0.97"/>
                                           </p:val>
                                         </p:tav>
                                         <p:tav tm="100000">
@@ -13324,12 +15185,149 @@
                                     </p:anim>
                                     <p:animEffect transition="in" filter="fade">
                                       <p:cBhvr>
-                                        <p:cTn id="21" dur="225"/>
+                                        <p:cTn id="21" dur="220"/>
+                                        <p:tgtEl>
+                                          <p:spTgt spid="6"/>
+                                        </p:tgtEl>
+                                      </p:cBhvr>
+                                    </p:animEffect>
+                                  </p:childTnLst>
+                                </p:cTn>
+                              </p:par>
+                            </p:childTnLst>
+                          </p:cTn>
+                        </p:par>
+                      </p:childTnLst>
+                    </p:cTn>
+                  </p:par>
+                  <p:par>
+                    <p:cTn id="32" fill="hold">
+                      <p:stCondLst>
+                        <p:cond delay="indefinite"/>
+                      </p:stCondLst>
+                      <p:childTnLst>
+                        <p:par>
+                          <p:cTn id="33" fill="hold">
+                            <p:stCondLst>
+                              <p:cond delay="0"/>
+                            </p:stCondLst>
+                            <p:childTnLst>
+                              <p:par>
+                                <p:cTn id="24" presetID="53" presetClass="entr" presetSubtype="16" fill="hold" grpId="0" nodeType="clickEffect">
+                                  <p:stCondLst>
+                                    <p:cond delay="0"/>
+                                  </p:stCondLst>
+                                  <p:childTnLst>
+                                    <p:set>
+                                      <p:cBhvr>
+                                        <p:cTn id="25" dur="1" fill="hold">
+                                          <p:stCondLst>
+                                            <p:cond delay="0"/>
+                                          </p:stCondLst>
+                                        </p:cTn>
                                         <p:tgtEl>
                                           <p:spTgt spid="5"/>
                                         </p:tgtEl>
+                                        <p:attrNameLst>
+                                          <p:attrName>style.visibility</p:attrName>
+                                        </p:attrNameLst>
+                                      </p:cBhvr>
+                                      <p:to>
+                                        <p:strVal val="visible"/>
+                                      </p:to>
+                                    </p:set>
+                                    <p:anim calcmode="lin" valueType="num">
+                                      <p:cBhvr>
+                                        <p:cTn id="26" dur="550" fill="hold"/>
+                                        <p:tgtEl>
+                                          <p:spTgt spid="5"/>
+                                        </p:tgtEl>
+                                        <p:attrNameLst>
+                                          <p:attrName>ppt_w</p:attrName>
+                                        </p:attrNameLst>
+                                      </p:cBhvr>
+                                      <p:tavLst>
+                                        <p:tav tm="0">
+                                          <p:val>
+                                            <p:strVal val="0"/>
+                                          </p:val>
+                                        </p:tav>
+                                        <p:tav tm="60000">
+                                          <p:val>
+                                            <p:strVal val="#ppt_w*1.14"/>
+                                          </p:val>
+                                        </p:tav>
+                                        <p:tav tm="82000">
+                                          <p:val>
+                                            <p:strVal val="#ppt_w*0.97"/>
+                                          </p:val>
+                                        </p:tav>
+                                        <p:tav tm="100000">
+                                          <p:val>
+                                            <p:strVal val="#ppt_w"/>
+                                          </p:val>
+                                        </p:tav>
+                                      </p:tavLst>
+                                    </p:anim>
+                                    <p:anim calcmode="lin" valueType="num">
+                                      <p:cBhvr>
+                                        <p:cTn id="27" dur="550" fill="hold"/>
+                                        <p:tgtEl>
+                                          <p:spTgt spid="5"/>
+                                        </p:tgtEl>
+                                        <p:attrNameLst>
+                                          <p:attrName>ppt_h</p:attrName>
+                                        </p:attrNameLst>
+                                      </p:cBhvr>
+                                      <p:tavLst>
+                                        <p:tav tm="0">
+                                          <p:val>
+                                            <p:strVal val="0"/>
+                                          </p:val>
+                                        </p:tav>
+                                        <p:tav tm="60000">
+                                          <p:val>
+                                            <p:strVal val="#ppt_h*1.14"/>
+                                          </p:val>
+                                        </p:tav>
+                                        <p:tav tm="82000">
+                                          <p:val>
+                                            <p:strVal val="#ppt_h*0.97"/>
+                                          </p:val>
+                                        </p:tav>
+                                        <p:tav tm="100000">
+                                          <p:val>
+                                            <p:strVal val="#ppt_h"/>
+                                          </p:val>
+                                        </p:tav>
+                                      </p:tavLst>
+                                    </p:anim>
+                                    <p:animEffect transition="in" filter="fade">
+                                      <p:cBhvr>
+                                        <p:cTn id="28" dur="220"/>
+                                        <p:tgtEl>
+                                          <p:spTgt spid="5"/>
+                                        </p:tgtEl>
                                       </p:cBhvr>
                                     </p:animEffect>
+                                  </p:childTnLst>
+                                </p:cTn>
+                              </p:par>
+                              <p:par>
+                                <p:cTn id="29" presetID="6" presetClass="emph" presetSubtype="0" fill="hold" grpId="0" nodeType="withEffect">
+                                  <p:stCondLst>
+                                    <p:cond delay="650"/>
+                                  </p:stCondLst>
+                                  <p:childTnLst>
+                                    <p:animScale>
+                                      <p:cBhvr>
+                                        <p:cTn id="31" dur="180" autoRev="1" fill="hold"/>
+                                        <p:tgtEl>
+                                          <p:spTgt spid="5"/>
+                                        </p:tgtEl>
+                                      </p:cBhvr>
+                                      <p:by x="112000" y="112000"/>
+                                    </p:animScale>
                                   </p:childTnLst>
                                 </p:cTn>
                               </p:par>
@@ -13361,9 +15359,9 @@
       </p:par>
     </p:tnLst>
     <p:bldLst>
-      <p:bldP spid="1" grpId="0" animBg="1"/>
+      <p:bldP spid="3" grpId="0" animBg="1"/>
       <p:bldP spid="4" grpId="0" animBg="1"/>
-      <p:bldP spid="5" grpId="0" animBg="1"/>
+      <p:bldP spid="6" grpId="0" animBg="1"/>
     </p:bldLst>
   </p:timing>
 </p:sld>
